--- a/docs/slot_classifier_share.pptx
+++ b/docs/slot_classifier_share.pptx
@@ -5,20 +5,20 @@
     <p:sldMasterId id="2147483648" r:id="rId1"/>
   </p:sldMasterIdLst>
   <p:sldIdLst>
-    <p:sldId id="256" r:id="rId7"/>
-    <p:sldId id="257" r:id="rId8"/>
-    <p:sldId id="258" r:id="rId9"/>
-    <p:sldId id="259" r:id="rId10"/>
-    <p:sldId id="260" r:id="rId11"/>
-    <p:sldId id="261" r:id="rId12"/>
-    <p:sldId id="262" r:id="rId13"/>
-    <p:sldId id="263" r:id="rId14"/>
-    <p:sldId id="264" r:id="rId15"/>
-    <p:sldId id="265" r:id="rId16"/>
-    <p:sldId id="266" r:id="rId17"/>
-    <p:sldId id="267" r:id="rId18"/>
+    <p:sldId id="256" r:id="rId2"/>
+    <p:sldId id="257" r:id="rId3"/>
+    <p:sldId id="258" r:id="rId4"/>
+    <p:sldId id="259" r:id="rId5"/>
+    <p:sldId id="260" r:id="rId6"/>
+    <p:sldId id="261" r:id="rId7"/>
+    <p:sldId id="262" r:id="rId8"/>
+    <p:sldId id="263" r:id="rId9"/>
+    <p:sldId id="264" r:id="rId10"/>
+    <p:sldId id="265" r:id="rId11"/>
+    <p:sldId id="266" r:id="rId12"/>
+    <p:sldId id="267" r:id="rId13"/>
   </p:sldIdLst>
-  <p:sldSz cx="12188952" cy="6858000" type="screen4x3"/>
+  <p:sldSz cx="12188825" cy="6858000"/>
   <p:notesSz cx="6858000" cy="9144000"/>
   <p:defaultTextStyle>
     <a:defPPr>
@@ -115,6 +115,22 @@
       </a:defRPr>
     </a:lvl9pPr>
   </p:defaultTextStyle>
+  <p:extLst>
+    <p:ext uri="{EFAFB233-063F-42B5-8137-9DF3F51BA10A}">
+      <p15:sldGuideLst xmlns:p15="http://schemas.microsoft.com/office/powerpoint/2012/main">
+        <p15:guide id="1" orient="horz" pos="2160">
+          <p15:clr>
+            <a:srgbClr val="A4A3A4"/>
+          </p15:clr>
+        </p15:guide>
+        <p15:guide id="2" pos="2880">
+          <p15:clr>
+            <a:srgbClr val="A4A3A4"/>
+          </p15:clr>
+        </p15:guide>
+      </p15:sldGuideLst>
+    </p:ext>
+  </p:extLst>
 </p:presentation>
 </file>
 
@@ -156,10 +172,9 @@
           <a:lstStyle/>
           <a:p>
             <a:r>
-              <a:rPr lang="en-US" smtClean="0"/>
+              <a:rPr lang="en-US"/>
               <a:t>Click to edit Master title style</a:t>
             </a:r>
-            <a:endParaRPr lang="en-US"/>
           </a:p>
         </p:txBody>
       </p:sp>
@@ -275,10 +290,9 @@
           </a:lstStyle>
           <a:p>
             <a:r>
-              <a:rPr lang="en-US" smtClean="0"/>
+              <a:rPr lang="en-US"/>
               <a:t>Click to edit Master subtitle style</a:t>
             </a:r>
-            <a:endParaRPr lang="en-US"/>
           </a:p>
         </p:txBody>
       </p:sp>
@@ -299,7 +313,7 @@
           <a:p>
             <a:fld id="{5BCAD085-E8A6-8845-BD4E-CB4CCA059FC4}" type="datetimeFigureOut">
               <a:rPr lang="en-US" smtClean="0"/>
-              <a:t>1/27/13</a:t>
+              <a:t>5/19/2026</a:t>
             </a:fld>
             <a:endParaRPr lang="en-US"/>
           </a:p>
@@ -393,10 +407,9 @@
           <a:lstStyle/>
           <a:p>
             <a:r>
-              <a:rPr lang="en-US" smtClean="0"/>
+              <a:rPr lang="en-US"/>
               <a:t>Click to edit Master title style</a:t>
             </a:r>
-            <a:endParaRPr lang="en-US"/>
           </a:p>
         </p:txBody>
       </p:sp>
@@ -417,38 +430,37 @@
           <a:p>
             <a:pPr lvl="0"/>
             <a:r>
-              <a:rPr lang="en-US" smtClean="0"/>
+              <a:rPr lang="en-US"/>
               <a:t>Click to edit Master text styles</a:t>
             </a:r>
           </a:p>
           <a:p>
             <a:pPr lvl="1"/>
             <a:r>
-              <a:rPr lang="en-US" smtClean="0"/>
+              <a:rPr lang="en-US"/>
               <a:t>Second level</a:t>
             </a:r>
           </a:p>
           <a:p>
             <a:pPr lvl="2"/>
             <a:r>
-              <a:rPr lang="en-US" smtClean="0"/>
+              <a:rPr lang="en-US"/>
               <a:t>Third level</a:t>
             </a:r>
           </a:p>
           <a:p>
             <a:pPr lvl="3"/>
             <a:r>
-              <a:rPr lang="en-US" smtClean="0"/>
+              <a:rPr lang="en-US"/>
               <a:t>Fourth level</a:t>
             </a:r>
           </a:p>
           <a:p>
             <a:pPr lvl="4"/>
             <a:r>
-              <a:rPr lang="en-US" smtClean="0"/>
+              <a:rPr lang="en-US"/>
               <a:t>Fifth level</a:t>
             </a:r>
-            <a:endParaRPr lang="en-US"/>
           </a:p>
         </p:txBody>
       </p:sp>
@@ -469,7 +481,7 @@
           <a:p>
             <a:fld id="{5BCAD085-E8A6-8845-BD4E-CB4CCA059FC4}" type="datetimeFigureOut">
               <a:rPr lang="en-US" smtClean="0"/>
-              <a:t>1/27/13</a:t>
+              <a:t>5/19/2026</a:t>
             </a:fld>
             <a:endParaRPr lang="en-US"/>
           </a:p>
@@ -568,10 +580,9 @@
           <a:lstStyle/>
           <a:p>
             <a:r>
-              <a:rPr lang="en-US" smtClean="0"/>
+              <a:rPr lang="en-US"/>
               <a:t>Click to edit Master title style</a:t>
             </a:r>
-            <a:endParaRPr lang="en-US"/>
           </a:p>
         </p:txBody>
       </p:sp>
@@ -597,38 +608,37 @@
           <a:p>
             <a:pPr lvl="0"/>
             <a:r>
-              <a:rPr lang="en-US" smtClean="0"/>
+              <a:rPr lang="en-US"/>
               <a:t>Click to edit Master text styles</a:t>
             </a:r>
           </a:p>
           <a:p>
             <a:pPr lvl="1"/>
             <a:r>
-              <a:rPr lang="en-US" smtClean="0"/>
+              <a:rPr lang="en-US"/>
               <a:t>Second level</a:t>
             </a:r>
           </a:p>
           <a:p>
             <a:pPr lvl="2"/>
             <a:r>
-              <a:rPr lang="en-US" smtClean="0"/>
+              <a:rPr lang="en-US"/>
               <a:t>Third level</a:t>
             </a:r>
           </a:p>
           <a:p>
             <a:pPr lvl="3"/>
             <a:r>
-              <a:rPr lang="en-US" smtClean="0"/>
+              <a:rPr lang="en-US"/>
               <a:t>Fourth level</a:t>
             </a:r>
           </a:p>
           <a:p>
             <a:pPr lvl="4"/>
             <a:r>
-              <a:rPr lang="en-US" smtClean="0"/>
+              <a:rPr lang="en-US"/>
               <a:t>Fifth level</a:t>
             </a:r>
-            <a:endParaRPr lang="en-US"/>
           </a:p>
         </p:txBody>
       </p:sp>
@@ -649,7 +659,7 @@
           <a:p>
             <a:fld id="{5BCAD085-E8A6-8845-BD4E-CB4CCA059FC4}" type="datetimeFigureOut">
               <a:rPr lang="en-US" smtClean="0"/>
-              <a:t>1/27/13</a:t>
+              <a:t>5/19/2026</a:t>
             </a:fld>
             <a:endParaRPr lang="en-US"/>
           </a:p>
@@ -743,10 +753,9 @@
           <a:lstStyle/>
           <a:p>
             <a:r>
-              <a:rPr lang="en-US" smtClean="0"/>
+              <a:rPr lang="en-US"/>
               <a:t>Click to edit Master title style</a:t>
             </a:r>
-            <a:endParaRPr lang="en-US"/>
           </a:p>
         </p:txBody>
       </p:sp>
@@ -767,38 +776,37 @@
           <a:p>
             <a:pPr lvl="0"/>
             <a:r>
-              <a:rPr lang="en-US" smtClean="0"/>
+              <a:rPr lang="en-US"/>
               <a:t>Click to edit Master text styles</a:t>
             </a:r>
           </a:p>
           <a:p>
             <a:pPr lvl="1"/>
             <a:r>
-              <a:rPr lang="en-US" smtClean="0"/>
+              <a:rPr lang="en-US"/>
               <a:t>Second level</a:t>
             </a:r>
           </a:p>
           <a:p>
             <a:pPr lvl="2"/>
             <a:r>
-              <a:rPr lang="en-US" smtClean="0"/>
+              <a:rPr lang="en-US"/>
               <a:t>Third level</a:t>
             </a:r>
           </a:p>
           <a:p>
             <a:pPr lvl="3"/>
             <a:r>
-              <a:rPr lang="en-US" smtClean="0"/>
+              <a:rPr lang="en-US"/>
               <a:t>Fourth level</a:t>
             </a:r>
           </a:p>
           <a:p>
             <a:pPr lvl="4"/>
             <a:r>
-              <a:rPr lang="en-US" smtClean="0"/>
+              <a:rPr lang="en-US"/>
               <a:t>Fifth level</a:t>
             </a:r>
-            <a:endParaRPr lang="en-US"/>
           </a:p>
         </p:txBody>
       </p:sp>
@@ -819,7 +827,7 @@
           <a:p>
             <a:fld id="{5BCAD085-E8A6-8845-BD4E-CB4CCA059FC4}" type="datetimeFigureOut">
               <a:rPr lang="en-US" smtClean="0"/>
-              <a:t>1/27/13</a:t>
+              <a:t>5/19/2026</a:t>
             </a:fld>
             <a:endParaRPr lang="en-US"/>
           </a:p>
@@ -922,10 +930,9 @@
           </a:lstStyle>
           <a:p>
             <a:r>
-              <a:rPr lang="en-US" smtClean="0"/>
+              <a:rPr lang="en-US"/>
               <a:t>Click to edit Master title style</a:t>
             </a:r>
-            <a:endParaRPr lang="en-US"/>
           </a:p>
         </p:txBody>
       </p:sp>
@@ -1042,7 +1049,7 @@
           <a:p>
             <a:pPr lvl="0"/>
             <a:r>
-              <a:rPr lang="en-US" smtClean="0"/>
+              <a:rPr lang="en-US"/>
               <a:t>Click to edit Master text styles</a:t>
             </a:r>
           </a:p>
@@ -1065,7 +1072,7 @@
           <a:p>
             <a:fld id="{5BCAD085-E8A6-8845-BD4E-CB4CCA059FC4}" type="datetimeFigureOut">
               <a:rPr lang="en-US" smtClean="0"/>
-              <a:t>1/27/13</a:t>
+              <a:t>5/19/2026</a:t>
             </a:fld>
             <a:endParaRPr lang="en-US"/>
           </a:p>
@@ -1159,10 +1166,9 @@
           <a:lstStyle/>
           <a:p>
             <a:r>
-              <a:rPr lang="en-US" smtClean="0"/>
+              <a:rPr lang="en-US"/>
               <a:t>Click to edit Master title style</a:t>
             </a:r>
-            <a:endParaRPr lang="en-US"/>
           </a:p>
         </p:txBody>
       </p:sp>
@@ -1216,38 +1222,37 @@
           <a:p>
             <a:pPr lvl="0"/>
             <a:r>
-              <a:rPr lang="en-US" smtClean="0"/>
+              <a:rPr lang="en-US"/>
               <a:t>Click to edit Master text styles</a:t>
             </a:r>
           </a:p>
           <a:p>
             <a:pPr lvl="1"/>
             <a:r>
-              <a:rPr lang="en-US" smtClean="0"/>
+              <a:rPr lang="en-US"/>
               <a:t>Second level</a:t>
             </a:r>
           </a:p>
           <a:p>
             <a:pPr lvl="2"/>
             <a:r>
-              <a:rPr lang="en-US" smtClean="0"/>
+              <a:rPr lang="en-US"/>
               <a:t>Third level</a:t>
             </a:r>
           </a:p>
           <a:p>
             <a:pPr lvl="3"/>
             <a:r>
-              <a:rPr lang="en-US" smtClean="0"/>
+              <a:rPr lang="en-US"/>
               <a:t>Fourth level</a:t>
             </a:r>
           </a:p>
           <a:p>
             <a:pPr lvl="4"/>
             <a:r>
-              <a:rPr lang="en-US" smtClean="0"/>
+              <a:rPr lang="en-US"/>
               <a:t>Fifth level</a:t>
             </a:r>
-            <a:endParaRPr lang="en-US"/>
           </a:p>
         </p:txBody>
       </p:sp>
@@ -1301,38 +1306,37 @@
           <a:p>
             <a:pPr lvl="0"/>
             <a:r>
-              <a:rPr lang="en-US" smtClean="0"/>
+              <a:rPr lang="en-US"/>
               <a:t>Click to edit Master text styles</a:t>
             </a:r>
           </a:p>
           <a:p>
             <a:pPr lvl="1"/>
             <a:r>
-              <a:rPr lang="en-US" smtClean="0"/>
+              <a:rPr lang="en-US"/>
               <a:t>Second level</a:t>
             </a:r>
           </a:p>
           <a:p>
             <a:pPr lvl="2"/>
             <a:r>
-              <a:rPr lang="en-US" smtClean="0"/>
+              <a:rPr lang="en-US"/>
               <a:t>Third level</a:t>
             </a:r>
           </a:p>
           <a:p>
             <a:pPr lvl="3"/>
             <a:r>
-              <a:rPr lang="en-US" smtClean="0"/>
+              <a:rPr lang="en-US"/>
               <a:t>Fourth level</a:t>
             </a:r>
           </a:p>
           <a:p>
             <a:pPr lvl="4"/>
             <a:r>
-              <a:rPr lang="en-US" smtClean="0"/>
+              <a:rPr lang="en-US"/>
               <a:t>Fifth level</a:t>
             </a:r>
-            <a:endParaRPr lang="en-US"/>
           </a:p>
         </p:txBody>
       </p:sp>
@@ -1353,7 +1357,7 @@
           <a:p>
             <a:fld id="{5BCAD085-E8A6-8845-BD4E-CB4CCA059FC4}" type="datetimeFigureOut">
               <a:rPr lang="en-US" smtClean="0"/>
-              <a:t>1/27/13</a:t>
+              <a:t>5/19/2026</a:t>
             </a:fld>
             <a:endParaRPr lang="en-US"/>
           </a:p>
@@ -1451,10 +1455,9 @@
           </a:lstStyle>
           <a:p>
             <a:r>
-              <a:rPr lang="en-US" smtClean="0"/>
+              <a:rPr lang="en-US"/>
               <a:t>Click to edit Master title style</a:t>
             </a:r>
-            <a:endParaRPr lang="en-US"/>
           </a:p>
         </p:txBody>
       </p:sp>
@@ -1517,7 +1520,7 @@
           <a:p>
             <a:pPr lvl="0"/>
             <a:r>
-              <a:rPr lang="en-US" smtClean="0"/>
+              <a:rPr lang="en-US"/>
               <a:t>Click to edit Master text styles</a:t>
             </a:r>
           </a:p>
@@ -1573,38 +1576,37 @@
           <a:p>
             <a:pPr lvl="0"/>
             <a:r>
-              <a:rPr lang="en-US" smtClean="0"/>
+              <a:rPr lang="en-US"/>
               <a:t>Click to edit Master text styles</a:t>
             </a:r>
           </a:p>
           <a:p>
             <a:pPr lvl="1"/>
             <a:r>
-              <a:rPr lang="en-US" smtClean="0"/>
+              <a:rPr lang="en-US"/>
               <a:t>Second level</a:t>
             </a:r>
           </a:p>
           <a:p>
             <a:pPr lvl="2"/>
             <a:r>
-              <a:rPr lang="en-US" smtClean="0"/>
+              <a:rPr lang="en-US"/>
               <a:t>Third level</a:t>
             </a:r>
           </a:p>
           <a:p>
             <a:pPr lvl="3"/>
             <a:r>
-              <a:rPr lang="en-US" smtClean="0"/>
+              <a:rPr lang="en-US"/>
               <a:t>Fourth level</a:t>
             </a:r>
           </a:p>
           <a:p>
             <a:pPr lvl="4"/>
             <a:r>
-              <a:rPr lang="en-US" smtClean="0"/>
+              <a:rPr lang="en-US"/>
               <a:t>Fifth level</a:t>
             </a:r>
-            <a:endParaRPr lang="en-US"/>
           </a:p>
         </p:txBody>
       </p:sp>
@@ -1667,7 +1669,7 @@
           <a:p>
             <a:pPr lvl="0"/>
             <a:r>
-              <a:rPr lang="en-US" smtClean="0"/>
+              <a:rPr lang="en-US"/>
               <a:t>Click to edit Master text styles</a:t>
             </a:r>
           </a:p>
@@ -1723,38 +1725,37 @@
           <a:p>
             <a:pPr lvl="0"/>
             <a:r>
-              <a:rPr lang="en-US" smtClean="0"/>
+              <a:rPr lang="en-US"/>
               <a:t>Click to edit Master text styles</a:t>
             </a:r>
           </a:p>
           <a:p>
             <a:pPr lvl="1"/>
             <a:r>
-              <a:rPr lang="en-US" smtClean="0"/>
+              <a:rPr lang="en-US"/>
               <a:t>Second level</a:t>
             </a:r>
           </a:p>
           <a:p>
             <a:pPr lvl="2"/>
             <a:r>
-              <a:rPr lang="en-US" smtClean="0"/>
+              <a:rPr lang="en-US"/>
               <a:t>Third level</a:t>
             </a:r>
           </a:p>
           <a:p>
             <a:pPr lvl="3"/>
             <a:r>
-              <a:rPr lang="en-US" smtClean="0"/>
+              <a:rPr lang="en-US"/>
               <a:t>Fourth level</a:t>
             </a:r>
           </a:p>
           <a:p>
             <a:pPr lvl="4"/>
             <a:r>
-              <a:rPr lang="en-US" smtClean="0"/>
+              <a:rPr lang="en-US"/>
               <a:t>Fifth level</a:t>
             </a:r>
-            <a:endParaRPr lang="en-US"/>
           </a:p>
         </p:txBody>
       </p:sp>
@@ -1775,7 +1776,7 @@
           <a:p>
             <a:fld id="{5BCAD085-E8A6-8845-BD4E-CB4CCA059FC4}" type="datetimeFigureOut">
               <a:rPr lang="en-US" smtClean="0"/>
-              <a:t>1/27/13</a:t>
+              <a:t>5/19/2026</a:t>
             </a:fld>
             <a:endParaRPr lang="en-US"/>
           </a:p>
@@ -1869,10 +1870,9 @@
           <a:lstStyle/>
           <a:p>
             <a:r>
-              <a:rPr lang="en-US" smtClean="0"/>
+              <a:rPr lang="en-US"/>
               <a:t>Click to edit Master title style</a:t>
             </a:r>
-            <a:endParaRPr lang="en-US"/>
           </a:p>
         </p:txBody>
       </p:sp>
@@ -1893,7 +1893,7 @@
           <a:p>
             <a:fld id="{5BCAD085-E8A6-8845-BD4E-CB4CCA059FC4}" type="datetimeFigureOut">
               <a:rPr lang="en-US" smtClean="0"/>
-              <a:t>1/27/13</a:t>
+              <a:t>5/19/2026</a:t>
             </a:fld>
             <a:endParaRPr lang="en-US"/>
           </a:p>
@@ -1988,7 +1988,7 @@
           <a:p>
             <a:fld id="{5BCAD085-E8A6-8845-BD4E-CB4CCA059FC4}" type="datetimeFigureOut">
               <a:rPr lang="en-US" smtClean="0"/>
-              <a:t>1/27/13</a:t>
+              <a:t>5/19/2026</a:t>
             </a:fld>
             <a:endParaRPr lang="en-US"/>
           </a:p>
@@ -2091,10 +2091,9 @@
           </a:lstStyle>
           <a:p>
             <a:r>
-              <a:rPr lang="en-US" smtClean="0"/>
+              <a:rPr lang="en-US"/>
               <a:t>Click to edit Master title style</a:t>
             </a:r>
-            <a:endParaRPr lang="en-US"/>
           </a:p>
         </p:txBody>
       </p:sp>
@@ -2148,38 +2147,37 @@
           <a:p>
             <a:pPr lvl="0"/>
             <a:r>
-              <a:rPr lang="en-US" smtClean="0"/>
+              <a:rPr lang="en-US"/>
               <a:t>Click to edit Master text styles</a:t>
             </a:r>
           </a:p>
           <a:p>
             <a:pPr lvl="1"/>
             <a:r>
-              <a:rPr lang="en-US" smtClean="0"/>
+              <a:rPr lang="en-US"/>
               <a:t>Second level</a:t>
             </a:r>
           </a:p>
           <a:p>
             <a:pPr lvl="2"/>
             <a:r>
-              <a:rPr lang="en-US" smtClean="0"/>
+              <a:rPr lang="en-US"/>
               <a:t>Third level</a:t>
             </a:r>
           </a:p>
           <a:p>
             <a:pPr lvl="3"/>
             <a:r>
-              <a:rPr lang="en-US" smtClean="0"/>
+              <a:rPr lang="en-US"/>
               <a:t>Fourth level</a:t>
             </a:r>
           </a:p>
           <a:p>
             <a:pPr lvl="4"/>
             <a:r>
-              <a:rPr lang="en-US" smtClean="0"/>
+              <a:rPr lang="en-US"/>
               <a:t>Fifth level</a:t>
             </a:r>
-            <a:endParaRPr lang="en-US"/>
           </a:p>
         </p:txBody>
       </p:sp>
@@ -2242,7 +2240,7 @@
           <a:p>
             <a:pPr lvl="0"/>
             <a:r>
-              <a:rPr lang="en-US" smtClean="0"/>
+              <a:rPr lang="en-US"/>
               <a:t>Click to edit Master text styles</a:t>
             </a:r>
           </a:p>
@@ -2265,7 +2263,7 @@
           <a:p>
             <a:fld id="{5BCAD085-E8A6-8845-BD4E-CB4CCA059FC4}" type="datetimeFigureOut">
               <a:rPr lang="en-US" smtClean="0"/>
-              <a:t>1/27/13</a:t>
+              <a:t>5/19/2026</a:t>
             </a:fld>
             <a:endParaRPr lang="en-US"/>
           </a:p>
@@ -2368,10 +2366,9 @@
           </a:lstStyle>
           <a:p>
             <a:r>
-              <a:rPr lang="en-US" smtClean="0"/>
+              <a:rPr lang="en-US"/>
               <a:t>Click to edit Master title style</a:t>
             </a:r>
-            <a:endParaRPr lang="en-US"/>
           </a:p>
         </p:txBody>
       </p:sp>
@@ -2495,7 +2492,7 @@
           <a:p>
             <a:pPr lvl="0"/>
             <a:r>
-              <a:rPr lang="en-US" smtClean="0"/>
+              <a:rPr lang="en-US"/>
               <a:t>Click to edit Master text styles</a:t>
             </a:r>
           </a:p>
@@ -2518,7 +2515,7 @@
           <a:p>
             <a:fld id="{5BCAD085-E8A6-8845-BD4E-CB4CCA059FC4}" type="datetimeFigureOut">
               <a:rPr lang="en-US" smtClean="0"/>
-              <a:t>1/27/13</a:t>
+              <a:t>5/19/2026</a:t>
             </a:fld>
             <a:endParaRPr lang="en-US"/>
           </a:p>
@@ -2627,10 +2624,9 @@
           <a:lstStyle/>
           <a:p>
             <a:r>
-              <a:rPr lang="en-US" smtClean="0"/>
+              <a:rPr lang="en-US"/>
               <a:t>Click to edit Master title style</a:t>
             </a:r>
-            <a:endParaRPr lang="en-US"/>
           </a:p>
         </p:txBody>
       </p:sp>
@@ -2661,38 +2657,37 @@
           <a:p>
             <a:pPr lvl="0"/>
             <a:r>
-              <a:rPr lang="en-US" smtClean="0"/>
+              <a:rPr lang="en-US"/>
               <a:t>Click to edit Master text styles</a:t>
             </a:r>
           </a:p>
           <a:p>
             <a:pPr lvl="1"/>
             <a:r>
-              <a:rPr lang="en-US" smtClean="0"/>
+              <a:rPr lang="en-US"/>
               <a:t>Second level</a:t>
             </a:r>
           </a:p>
           <a:p>
             <a:pPr lvl="2"/>
             <a:r>
-              <a:rPr lang="en-US" smtClean="0"/>
+              <a:rPr lang="en-US"/>
               <a:t>Third level</a:t>
             </a:r>
           </a:p>
           <a:p>
             <a:pPr lvl="3"/>
             <a:r>
-              <a:rPr lang="en-US" smtClean="0"/>
+              <a:rPr lang="en-US"/>
               <a:t>Fourth level</a:t>
             </a:r>
           </a:p>
           <a:p>
             <a:pPr lvl="4"/>
             <a:r>
-              <a:rPr lang="en-US" smtClean="0"/>
+              <a:rPr lang="en-US"/>
               <a:t>Fifth level</a:t>
             </a:r>
-            <a:endParaRPr lang="en-US"/>
           </a:p>
         </p:txBody>
       </p:sp>
@@ -2731,7 +2726,7 @@
           <a:p>
             <a:fld id="{5BCAD085-E8A6-8845-BD4E-CB4CCA059FC4}" type="datetimeFigureOut">
               <a:rPr lang="en-US" smtClean="0"/>
-              <a:t>1/27/13</a:t>
+              <a:t>5/19/2026</a:t>
             </a:fld>
             <a:endParaRPr lang="en-US"/>
           </a:p>
@@ -3090,7 +3085,7 @@
 </file>
 
 <file path=ppt/slides/slide1.xml><?xml version="1.0" encoding="utf-8"?>
-<p:sld xmlns:a="http://schemas.openxmlformats.org/drawingml/2006/main" xmlns:p="http://schemas.openxmlformats.org/presentationml/2006/main" xmlns:r="http://schemas.openxmlformats.org/officeDocument/2006/relationships">
+<p:sld xmlns:a="http://schemas.openxmlformats.org/drawingml/2006/main" xmlns:r="http://schemas.openxmlformats.org/officeDocument/2006/relationships" xmlns:p="http://schemas.openxmlformats.org/presentationml/2006/main">
   <p:cSld>
     <p:spTree>
       <p:nvGrpSpPr>
@@ -3098,7 +3093,14 @@
         <p:cNvGrpSpPr/>
         <p:nvPr/>
       </p:nvGrpSpPr>
-      <p:grpSpPr/>
+      <p:grpSpPr>
+        <a:xfrm>
+          <a:off x="0" y="0"/>
+          <a:ext cx="0" cy="0"/>
+          <a:chOff x="0" y="0"/>
+          <a:chExt cx="0" cy="0"/>
+        </a:xfrm>
+      </p:grpSpPr>
       <p:sp>
         <p:nvSpPr>
           <p:cNvPr id="2" name="TextBox 1"/>
@@ -3125,7 +3127,9 @@
             <a:spAutoFit/>
           </a:bodyPr>
           <a:lstStyle/>
-          <a:p/>
+          <a:p>
+            <a:endParaRPr/>
+          </a:p>
         </p:txBody>
       </p:sp>
       <p:sp>
@@ -3154,7 +3158,9 @@
             <a:spAutoFit/>
           </a:bodyPr>
           <a:lstStyle/>
-          <a:p/>
+          <a:p>
+            <a:endParaRPr/>
+          </a:p>
         </p:txBody>
       </p:sp>
       <p:sp>
@@ -3183,7 +3189,9 @@
             <a:spAutoFit/>
           </a:bodyPr>
           <a:lstStyle/>
-          <a:p/>
+          <a:p>
+            <a:endParaRPr/>
+          </a:p>
         </p:txBody>
       </p:sp>
       <p:sp>
@@ -3206,7 +3214,7 @@
           </a:ln>
         </p:spPr>
         <p:txBody>
-          <a:bodyPr wrap="square" lIns="50000" rIns="50000" tIns="50000" bIns="50000">
+          <a:bodyPr wrap="square" lIns="50000" tIns="50000" rIns="50000" bIns="50000">
             <a:spAutoFit/>
           </a:bodyPr>
           <a:lstStyle/>
@@ -3250,7 +3258,9 @@
             <a:spAutoFit/>
           </a:bodyPr>
           <a:lstStyle/>
-          <a:p/>
+          <a:p>
+            <a:endParaRPr/>
+          </a:p>
         </p:txBody>
       </p:sp>
       <p:sp>
@@ -3273,7 +3283,7 @@
           </a:ln>
         </p:spPr>
         <p:txBody>
-          <a:bodyPr wrap="square" lIns="50000" rIns="50000" tIns="50000" bIns="50000">
+          <a:bodyPr wrap="square" lIns="50000" tIns="50000" rIns="50000" bIns="50000">
             <a:spAutoFit/>
           </a:bodyPr>
           <a:lstStyle/>
@@ -3311,7 +3321,7 @@
           </a:ln>
         </p:spPr>
         <p:txBody>
-          <a:bodyPr wrap="square" lIns="50000" rIns="50000" tIns="50000" bIns="50000">
+          <a:bodyPr wrap="square" lIns="50000" tIns="50000" rIns="50000" bIns="50000">
             <a:spAutoFit/>
           </a:bodyPr>
           <a:lstStyle/>
@@ -3349,7 +3359,7 @@
           </a:ln>
         </p:spPr>
         <p:txBody>
-          <a:bodyPr wrap="square" lIns="50000" rIns="50000" tIns="50000" bIns="50000">
+          <a:bodyPr wrap="square" lIns="50000" tIns="50000" rIns="50000" bIns="50000">
             <a:spAutoFit/>
           </a:bodyPr>
           <a:lstStyle/>
@@ -3393,7 +3403,9 @@
             <a:spAutoFit/>
           </a:bodyPr>
           <a:lstStyle/>
-          <a:p/>
+          <a:p>
+            <a:endParaRPr/>
+          </a:p>
         </p:txBody>
       </p:sp>
       <p:sp>
@@ -3418,7 +3430,7 @@
           </a:ln>
         </p:spPr>
         <p:txBody>
-          <a:bodyPr wrap="square" lIns="50000" rIns="50000" tIns="50000" bIns="50000" anchor="ctr">
+          <a:bodyPr wrap="square" lIns="50000" tIns="50000" rIns="50000" bIns="50000" anchor="ctr">
             <a:spAutoFit/>
           </a:bodyPr>
           <a:lstStyle/>
@@ -3445,7 +3457,7 @@
 </file>
 
 <file path=ppt/slides/slide10.xml><?xml version="1.0" encoding="utf-8"?>
-<p:sld xmlns:a="http://schemas.openxmlformats.org/drawingml/2006/main" xmlns:p="http://schemas.openxmlformats.org/presentationml/2006/main" xmlns:r="http://schemas.openxmlformats.org/officeDocument/2006/relationships">
+<p:sld xmlns:a="http://schemas.openxmlformats.org/drawingml/2006/main" xmlns:r="http://schemas.openxmlformats.org/officeDocument/2006/relationships" xmlns:p="http://schemas.openxmlformats.org/presentationml/2006/main">
   <p:cSld>
     <p:spTree>
       <p:nvGrpSpPr>
@@ -3453,7 +3465,14 @@
         <p:cNvGrpSpPr/>
         <p:nvPr/>
       </p:nvGrpSpPr>
-      <p:grpSpPr/>
+      <p:grpSpPr>
+        <a:xfrm>
+          <a:off x="0" y="0"/>
+          <a:ext cx="0" cy="0"/>
+          <a:chOff x="0" y="0"/>
+          <a:chExt cx="0" cy="0"/>
+        </a:xfrm>
+      </p:grpSpPr>
       <p:sp>
         <p:nvSpPr>
           <p:cNvPr id="2" name="TextBox 1"/>
@@ -3480,7 +3499,9 @@
             <a:spAutoFit/>
           </a:bodyPr>
           <a:lstStyle/>
-          <a:p/>
+          <a:p>
+            <a:endParaRPr/>
+          </a:p>
         </p:txBody>
       </p:sp>
       <p:sp>
@@ -3509,7 +3530,9 @@
             <a:spAutoFit/>
           </a:bodyPr>
           <a:lstStyle/>
-          <a:p/>
+          <a:p>
+            <a:endParaRPr/>
+          </a:p>
         </p:txBody>
       </p:sp>
       <p:sp>
@@ -3538,7 +3561,9 @@
             <a:spAutoFit/>
           </a:bodyPr>
           <a:lstStyle/>
-          <a:p/>
+          <a:p>
+            <a:endParaRPr/>
+          </a:p>
         </p:txBody>
       </p:sp>
       <p:sp>
@@ -3561,7 +3586,7 @@
           </a:ln>
         </p:spPr>
         <p:txBody>
-          <a:bodyPr wrap="square" lIns="50000" rIns="50000" tIns="50000" bIns="50000">
+          <a:bodyPr wrap="square" lIns="50000" tIns="50000" rIns="50000" bIns="50000">
             <a:spAutoFit/>
           </a:bodyPr>
           <a:lstStyle/>
@@ -3599,7 +3624,7 @@
           </a:ln>
         </p:spPr>
         <p:txBody>
-          <a:bodyPr wrap="square" lIns="50000" rIns="50000" tIns="50000" bIns="50000">
+          <a:bodyPr wrap="square" lIns="50000" tIns="50000" rIns="50000" bIns="50000">
             <a:spAutoFit/>
           </a:bodyPr>
           <a:lstStyle/>
@@ -3645,7 +3670,9 @@
             <a:spAutoFit/>
           </a:bodyPr>
           <a:lstStyle/>
-          <a:p/>
+          <a:p>
+            <a:endParaRPr/>
+          </a:p>
         </p:txBody>
       </p:sp>
       <p:sp>
@@ -3668,7 +3695,7 @@
           </a:ln>
         </p:spPr>
         <p:txBody>
-          <a:bodyPr wrap="square" lIns="50000" rIns="50000" tIns="50000" bIns="50000" anchor="ctr">
+          <a:bodyPr wrap="square" lIns="50000" tIns="50000" rIns="50000" bIns="50000" anchor="ctr">
             <a:spAutoFit/>
           </a:bodyPr>
           <a:lstStyle/>
@@ -3706,7 +3733,7 @@
           </a:ln>
         </p:spPr>
         <p:txBody>
-          <a:bodyPr wrap="square" lIns="50000" rIns="50000" tIns="50000" bIns="50000">
+          <a:bodyPr wrap="square" lIns="50000" tIns="50000" rIns="50000" bIns="50000">
             <a:spAutoFit/>
           </a:bodyPr>
           <a:lstStyle/>
@@ -3752,7 +3779,9 @@
             <a:spAutoFit/>
           </a:bodyPr>
           <a:lstStyle/>
-          <a:p/>
+          <a:p>
+            <a:endParaRPr/>
+          </a:p>
         </p:txBody>
       </p:sp>
       <p:sp>
@@ -3775,7 +3804,7 @@
           </a:ln>
         </p:spPr>
         <p:txBody>
-          <a:bodyPr wrap="square" lIns="50000" rIns="50000" tIns="50000" bIns="50000">
+          <a:bodyPr wrap="square" lIns="50000" tIns="50000" rIns="50000" bIns="50000">
             <a:spAutoFit/>
           </a:bodyPr>
           <a:lstStyle/>
@@ -3813,7 +3842,7 @@
           </a:ln>
         </p:spPr>
         <p:txBody>
-          <a:bodyPr wrap="square" lIns="50000" rIns="50000" tIns="50000" bIns="50000">
+          <a:bodyPr wrap="square" lIns="50000" tIns="50000" rIns="50000" bIns="50000">
             <a:spAutoFit/>
           </a:bodyPr>
           <a:lstStyle/>
@@ -3857,7 +3886,9 @@
             <a:spAutoFit/>
           </a:bodyPr>
           <a:lstStyle/>
-          <a:p/>
+          <a:p>
+            <a:endParaRPr/>
+          </a:p>
         </p:txBody>
       </p:sp>
       <p:sp>
@@ -3882,7 +3913,7 @@
           </a:ln>
         </p:spPr>
         <p:txBody>
-          <a:bodyPr wrap="square" lIns="50000" rIns="50000" tIns="50000" bIns="50000" anchor="ctr">
+          <a:bodyPr wrap="square" lIns="50000" tIns="50000" rIns="50000" bIns="50000" anchor="ctr">
             <a:spAutoFit/>
           </a:bodyPr>
           <a:lstStyle/>
@@ -3926,7 +3957,9 @@
             <a:spAutoFit/>
           </a:bodyPr>
           <a:lstStyle/>
-          <a:p/>
+          <a:p>
+            <a:endParaRPr/>
+          </a:p>
         </p:txBody>
       </p:sp>
       <p:sp>
@@ -3949,7 +3982,7 @@
           </a:ln>
         </p:spPr>
         <p:txBody>
-          <a:bodyPr wrap="square" lIns="50000" rIns="50000" tIns="50000" bIns="50000">
+          <a:bodyPr wrap="square" lIns="50000" tIns="50000" rIns="50000" bIns="50000">
             <a:spAutoFit/>
           </a:bodyPr>
           <a:lstStyle/>
@@ -3993,7 +4026,9 @@
             <a:spAutoFit/>
           </a:bodyPr>
           <a:lstStyle/>
-          <a:p/>
+          <a:p>
+            <a:endParaRPr/>
+          </a:p>
         </p:txBody>
       </p:sp>
       <p:sp>
@@ -4018,7 +4053,7 @@
           </a:ln>
         </p:spPr>
         <p:txBody>
-          <a:bodyPr wrap="square" lIns="50000" rIns="50000" tIns="50000" bIns="50000" anchor="ctr">
+          <a:bodyPr wrap="square" lIns="50000" tIns="50000" rIns="50000" bIns="50000" anchor="ctr">
             <a:spAutoFit/>
           </a:bodyPr>
           <a:lstStyle/>
@@ -4062,7 +4097,9 @@
             <a:spAutoFit/>
           </a:bodyPr>
           <a:lstStyle/>
-          <a:p/>
+          <a:p>
+            <a:endParaRPr/>
+          </a:p>
         </p:txBody>
       </p:sp>
       <p:sp>
@@ -4085,7 +4122,7 @@
           </a:ln>
         </p:spPr>
         <p:txBody>
-          <a:bodyPr wrap="square" lIns="50000" rIns="50000" tIns="50000" bIns="50000">
+          <a:bodyPr wrap="square" lIns="50000" tIns="50000" rIns="50000" bIns="50000">
             <a:spAutoFit/>
           </a:bodyPr>
           <a:lstStyle/>
@@ -4129,7 +4166,9 @@
             <a:spAutoFit/>
           </a:bodyPr>
           <a:lstStyle/>
-          <a:p/>
+          <a:p>
+            <a:endParaRPr/>
+          </a:p>
         </p:txBody>
       </p:sp>
       <p:sp>
@@ -4154,7 +4193,7 @@
           </a:ln>
         </p:spPr>
         <p:txBody>
-          <a:bodyPr wrap="square" lIns="50000" rIns="50000" tIns="50000" bIns="50000" anchor="ctr">
+          <a:bodyPr wrap="square" lIns="50000" tIns="50000" rIns="50000" bIns="50000" anchor="ctr">
             <a:spAutoFit/>
           </a:bodyPr>
           <a:lstStyle/>
@@ -4198,7 +4237,9 @@
             <a:spAutoFit/>
           </a:bodyPr>
           <a:lstStyle/>
-          <a:p/>
+          <a:p>
+            <a:endParaRPr/>
+          </a:p>
         </p:txBody>
       </p:sp>
       <p:sp>
@@ -4221,7 +4262,7 @@
           </a:ln>
         </p:spPr>
         <p:txBody>
-          <a:bodyPr wrap="square" lIns="50000" rIns="50000" tIns="50000" bIns="50000">
+          <a:bodyPr wrap="square" lIns="50000" tIns="50000" rIns="50000" bIns="50000">
             <a:spAutoFit/>
           </a:bodyPr>
           <a:lstStyle/>
@@ -4265,7 +4306,9 @@
             <a:spAutoFit/>
           </a:bodyPr>
           <a:lstStyle/>
-          <a:p/>
+          <a:p>
+            <a:endParaRPr/>
+          </a:p>
         </p:txBody>
       </p:sp>
       <p:sp>
@@ -4290,7 +4333,7 @@
           </a:ln>
         </p:spPr>
         <p:txBody>
-          <a:bodyPr wrap="square" lIns="50000" rIns="50000" tIns="50000" bIns="50000" anchor="ctr">
+          <a:bodyPr wrap="square" lIns="50000" tIns="50000" rIns="50000" bIns="50000" anchor="ctr">
             <a:spAutoFit/>
           </a:bodyPr>
           <a:lstStyle/>
@@ -4334,7 +4377,9 @@
             <a:spAutoFit/>
           </a:bodyPr>
           <a:lstStyle/>
-          <a:p/>
+          <a:p>
+            <a:endParaRPr/>
+          </a:p>
         </p:txBody>
       </p:sp>
       <p:sp>
@@ -4357,7 +4402,7 @@
           </a:ln>
         </p:spPr>
         <p:txBody>
-          <a:bodyPr wrap="square" lIns="50000" rIns="50000" tIns="50000" bIns="50000">
+          <a:bodyPr wrap="square" lIns="50000" tIns="50000" rIns="50000" bIns="50000">
             <a:spAutoFit/>
           </a:bodyPr>
           <a:lstStyle/>
@@ -4401,7 +4446,9 @@
             <a:spAutoFit/>
           </a:bodyPr>
           <a:lstStyle/>
-          <a:p/>
+          <a:p>
+            <a:endParaRPr/>
+          </a:p>
         </p:txBody>
       </p:sp>
       <p:sp>
@@ -4426,7 +4473,7 @@
           </a:ln>
         </p:spPr>
         <p:txBody>
-          <a:bodyPr wrap="square" lIns="50000" rIns="50000" tIns="50000" bIns="50000" anchor="ctr">
+          <a:bodyPr wrap="square" lIns="50000" tIns="50000" rIns="50000" bIns="50000" anchor="ctr">
             <a:spAutoFit/>
           </a:bodyPr>
           <a:lstStyle/>
@@ -4470,7 +4517,9 @@
             <a:spAutoFit/>
           </a:bodyPr>
           <a:lstStyle/>
-          <a:p/>
+          <a:p>
+            <a:endParaRPr/>
+          </a:p>
         </p:txBody>
       </p:sp>
       <p:sp>
@@ -4493,7 +4542,7 @@
           </a:ln>
         </p:spPr>
         <p:txBody>
-          <a:bodyPr wrap="square" lIns="50000" rIns="50000" tIns="50000" bIns="50000">
+          <a:bodyPr wrap="square" lIns="50000" tIns="50000" rIns="50000" bIns="50000">
             <a:spAutoFit/>
           </a:bodyPr>
           <a:lstStyle/>
@@ -4537,7 +4586,9 @@
             <a:spAutoFit/>
           </a:bodyPr>
           <a:lstStyle/>
-          <a:p/>
+          <a:p>
+            <a:endParaRPr/>
+          </a:p>
         </p:txBody>
       </p:sp>
       <p:sp>
@@ -4560,7 +4611,7 @@
           </a:ln>
         </p:spPr>
         <p:txBody>
-          <a:bodyPr wrap="square" lIns="50000" rIns="50000" tIns="50000" bIns="50000">
+          <a:bodyPr wrap="square" lIns="50000" tIns="50000" rIns="50000" bIns="50000">
             <a:spAutoFit/>
           </a:bodyPr>
           <a:lstStyle/>
@@ -4587,7 +4638,7 @@
 </file>
 
 <file path=ppt/slides/slide11.xml><?xml version="1.0" encoding="utf-8"?>
-<p:sld xmlns:a="http://schemas.openxmlformats.org/drawingml/2006/main" xmlns:p="http://schemas.openxmlformats.org/presentationml/2006/main" xmlns:r="http://schemas.openxmlformats.org/officeDocument/2006/relationships">
+<p:sld xmlns:a="http://schemas.openxmlformats.org/drawingml/2006/main" xmlns:r="http://schemas.openxmlformats.org/officeDocument/2006/relationships" xmlns:p="http://schemas.openxmlformats.org/presentationml/2006/main">
   <p:cSld>
     <p:spTree>
       <p:nvGrpSpPr>
@@ -4595,7 +4646,14 @@
         <p:cNvGrpSpPr/>
         <p:nvPr/>
       </p:nvGrpSpPr>
-      <p:grpSpPr/>
+      <p:grpSpPr>
+        <a:xfrm>
+          <a:off x="0" y="0"/>
+          <a:ext cx="0" cy="0"/>
+          <a:chOff x="0" y="0"/>
+          <a:chExt cx="0" cy="0"/>
+        </a:xfrm>
+      </p:grpSpPr>
       <p:sp>
         <p:nvSpPr>
           <p:cNvPr id="2" name="TextBox 1"/>
@@ -4622,7 +4680,9 @@
             <a:spAutoFit/>
           </a:bodyPr>
           <a:lstStyle/>
-          <a:p/>
+          <a:p>
+            <a:endParaRPr/>
+          </a:p>
         </p:txBody>
       </p:sp>
       <p:sp>
@@ -4651,7 +4711,9 @@
             <a:spAutoFit/>
           </a:bodyPr>
           <a:lstStyle/>
-          <a:p/>
+          <a:p>
+            <a:endParaRPr/>
+          </a:p>
         </p:txBody>
       </p:sp>
       <p:sp>
@@ -4680,7 +4742,9 @@
             <a:spAutoFit/>
           </a:bodyPr>
           <a:lstStyle/>
-          <a:p/>
+          <a:p>
+            <a:endParaRPr/>
+          </a:p>
         </p:txBody>
       </p:sp>
       <p:sp>
@@ -4703,7 +4767,7 @@
           </a:ln>
         </p:spPr>
         <p:txBody>
-          <a:bodyPr wrap="square" lIns="50000" rIns="50000" tIns="50000" bIns="50000">
+          <a:bodyPr wrap="square" lIns="50000" tIns="50000" rIns="50000" bIns="50000">
             <a:spAutoFit/>
           </a:bodyPr>
           <a:lstStyle/>
@@ -4747,7 +4811,9 @@
             <a:spAutoFit/>
           </a:bodyPr>
           <a:lstStyle/>
-          <a:p/>
+          <a:p>
+            <a:endParaRPr/>
+          </a:p>
         </p:txBody>
       </p:sp>
       <p:sp>
@@ -4770,7 +4836,7 @@
           </a:ln>
         </p:spPr>
         <p:txBody>
-          <a:bodyPr wrap="square" lIns="50000" rIns="50000" tIns="50000" bIns="50000">
+          <a:bodyPr wrap="square" lIns="50000" tIns="50000" rIns="50000" bIns="50000">
             <a:spAutoFit/>
           </a:bodyPr>
           <a:lstStyle/>
@@ -4814,7 +4880,9 @@
             <a:spAutoFit/>
           </a:bodyPr>
           <a:lstStyle/>
-          <a:p/>
+          <a:p>
+            <a:endParaRPr/>
+          </a:p>
         </p:txBody>
       </p:sp>
       <p:sp>
@@ -4837,7 +4905,7 @@
           </a:ln>
         </p:spPr>
         <p:txBody>
-          <a:bodyPr wrap="square" lIns="50000" rIns="50000" tIns="50000" bIns="50000">
+          <a:bodyPr wrap="square" lIns="50000" tIns="50000" rIns="50000" bIns="50000">
             <a:spAutoFit/>
           </a:bodyPr>
           <a:lstStyle/>
@@ -4875,7 +4943,7 @@
           </a:ln>
         </p:spPr>
         <p:txBody>
-          <a:bodyPr wrap="square" lIns="50000" rIns="50000" tIns="50000" bIns="50000">
+          <a:bodyPr wrap="square" lIns="50000" tIns="50000" rIns="50000" bIns="50000">
             <a:spAutoFit/>
           </a:bodyPr>
           <a:lstStyle/>
@@ -4919,7 +4987,9 @@
             <a:spAutoFit/>
           </a:bodyPr>
           <a:lstStyle/>
-          <a:p/>
+          <a:p>
+            <a:endParaRPr/>
+          </a:p>
         </p:txBody>
       </p:sp>
       <p:sp>
@@ -4942,7 +5012,7 @@
           </a:ln>
         </p:spPr>
         <p:txBody>
-          <a:bodyPr wrap="square" lIns="50000" rIns="50000" tIns="50000" bIns="50000">
+          <a:bodyPr wrap="square" lIns="50000" tIns="50000" rIns="50000" bIns="50000">
             <a:spAutoFit/>
           </a:bodyPr>
           <a:lstStyle/>
@@ -4986,7 +5056,9 @@
             <a:spAutoFit/>
           </a:bodyPr>
           <a:lstStyle/>
-          <a:p/>
+          <a:p>
+            <a:endParaRPr/>
+          </a:p>
         </p:txBody>
       </p:sp>
       <p:sp>
@@ -5009,7 +5081,7 @@
           </a:ln>
         </p:spPr>
         <p:txBody>
-          <a:bodyPr wrap="square" lIns="50000" rIns="50000" tIns="50000" bIns="50000">
+          <a:bodyPr wrap="square" lIns="50000" tIns="50000" rIns="50000" bIns="50000">
             <a:spAutoFit/>
           </a:bodyPr>
           <a:lstStyle/>
@@ -5053,7 +5125,9 @@
             <a:spAutoFit/>
           </a:bodyPr>
           <a:lstStyle/>
-          <a:p/>
+          <a:p>
+            <a:endParaRPr/>
+          </a:p>
         </p:txBody>
       </p:sp>
       <p:sp>
@@ -5076,7 +5150,7 @@
           </a:ln>
         </p:spPr>
         <p:txBody>
-          <a:bodyPr wrap="square" lIns="50000" rIns="50000" tIns="50000" bIns="50000">
+          <a:bodyPr wrap="square" lIns="50000" tIns="50000" rIns="50000" bIns="50000">
             <a:spAutoFit/>
           </a:bodyPr>
           <a:lstStyle/>
@@ -5120,7 +5194,9 @@
             <a:spAutoFit/>
           </a:bodyPr>
           <a:lstStyle/>
-          <a:p/>
+          <a:p>
+            <a:endParaRPr/>
+          </a:p>
         </p:txBody>
       </p:sp>
       <p:sp>
@@ -5143,7 +5219,7 @@
           </a:ln>
         </p:spPr>
         <p:txBody>
-          <a:bodyPr wrap="square" lIns="50000" rIns="50000" tIns="50000" bIns="50000">
+          <a:bodyPr wrap="square" lIns="50000" tIns="50000" rIns="50000" bIns="50000">
             <a:spAutoFit/>
           </a:bodyPr>
           <a:lstStyle/>
@@ -5187,7 +5263,9 @@
             <a:spAutoFit/>
           </a:bodyPr>
           <a:lstStyle/>
-          <a:p/>
+          <a:p>
+            <a:endParaRPr/>
+          </a:p>
         </p:txBody>
       </p:sp>
       <p:sp>
@@ -5210,7 +5288,7 @@
           </a:ln>
         </p:spPr>
         <p:txBody>
-          <a:bodyPr wrap="square" lIns="50000" rIns="50000" tIns="50000" bIns="50000">
+          <a:bodyPr wrap="square" lIns="50000" tIns="50000" rIns="50000" bIns="50000">
             <a:spAutoFit/>
           </a:bodyPr>
           <a:lstStyle/>
@@ -5237,7 +5315,7 @@
 </file>
 
 <file path=ppt/slides/slide12.xml><?xml version="1.0" encoding="utf-8"?>
-<p:sld xmlns:a="http://schemas.openxmlformats.org/drawingml/2006/main" xmlns:p="http://schemas.openxmlformats.org/presentationml/2006/main" xmlns:r="http://schemas.openxmlformats.org/officeDocument/2006/relationships">
+<p:sld xmlns:a="http://schemas.openxmlformats.org/drawingml/2006/main" xmlns:r="http://schemas.openxmlformats.org/officeDocument/2006/relationships" xmlns:p="http://schemas.openxmlformats.org/presentationml/2006/main">
   <p:cSld>
     <p:spTree>
       <p:nvGrpSpPr>
@@ -5245,7 +5323,14 @@
         <p:cNvGrpSpPr/>
         <p:nvPr/>
       </p:nvGrpSpPr>
-      <p:grpSpPr/>
+      <p:grpSpPr>
+        <a:xfrm>
+          <a:off x="0" y="0"/>
+          <a:ext cx="0" cy="0"/>
+          <a:chOff x="0" y="0"/>
+          <a:chExt cx="0" cy="0"/>
+        </a:xfrm>
+      </p:grpSpPr>
       <p:sp>
         <p:nvSpPr>
           <p:cNvPr id="2" name="TextBox 1"/>
@@ -5272,7 +5357,9 @@
             <a:spAutoFit/>
           </a:bodyPr>
           <a:lstStyle/>
-          <a:p/>
+          <a:p>
+            <a:endParaRPr/>
+          </a:p>
         </p:txBody>
       </p:sp>
       <p:sp>
@@ -5301,7 +5388,9 @@
             <a:spAutoFit/>
           </a:bodyPr>
           <a:lstStyle/>
-          <a:p/>
+          <a:p>
+            <a:endParaRPr/>
+          </a:p>
         </p:txBody>
       </p:sp>
       <p:sp>
@@ -5330,7 +5419,9 @@
             <a:spAutoFit/>
           </a:bodyPr>
           <a:lstStyle/>
-          <a:p/>
+          <a:p>
+            <a:endParaRPr/>
+          </a:p>
         </p:txBody>
       </p:sp>
       <p:sp>
@@ -5353,7 +5444,7 @@
           </a:ln>
         </p:spPr>
         <p:txBody>
-          <a:bodyPr wrap="square" lIns="50000" rIns="50000" tIns="50000" bIns="50000">
+          <a:bodyPr wrap="square" lIns="50000" tIns="50000" rIns="50000" bIns="50000">
             <a:spAutoFit/>
           </a:bodyPr>
           <a:lstStyle/>
@@ -5391,7 +5482,7 @@
           </a:ln>
         </p:spPr>
         <p:txBody>
-          <a:bodyPr wrap="square" lIns="50000" rIns="50000" tIns="50000" bIns="50000">
+          <a:bodyPr wrap="square" lIns="50000" tIns="50000" rIns="50000" bIns="50000">
             <a:spAutoFit/>
           </a:bodyPr>
           <a:lstStyle/>
@@ -5435,7 +5526,9 @@
             <a:spAutoFit/>
           </a:bodyPr>
           <a:lstStyle/>
-          <a:p/>
+          <a:p>
+            <a:endParaRPr/>
+          </a:p>
         </p:txBody>
       </p:sp>
       <p:sp>
@@ -5464,7 +5557,9 @@
             <a:spAutoFit/>
           </a:bodyPr>
           <a:lstStyle/>
-          <a:p/>
+          <a:p>
+            <a:endParaRPr/>
+          </a:p>
         </p:txBody>
       </p:sp>
       <p:sp>
@@ -5493,7 +5588,9 @@
             <a:spAutoFit/>
           </a:bodyPr>
           <a:lstStyle/>
-          <a:p/>
+          <a:p>
+            <a:endParaRPr/>
+          </a:p>
         </p:txBody>
       </p:sp>
       <p:sp>
@@ -5518,7 +5615,7 @@
           </a:ln>
         </p:spPr>
         <p:txBody>
-          <a:bodyPr wrap="square" lIns="50000" rIns="50000" tIns="50000" bIns="50000" anchor="ctr">
+          <a:bodyPr wrap="square" lIns="50000" tIns="50000" rIns="50000" bIns="50000" anchor="ctr">
             <a:spAutoFit/>
           </a:bodyPr>
           <a:lstStyle/>
@@ -5556,7 +5653,7 @@
           </a:ln>
         </p:spPr>
         <p:txBody>
-          <a:bodyPr wrap="square" lIns="50000" rIns="50000" tIns="50000" bIns="50000">
+          <a:bodyPr wrap="square" lIns="50000" tIns="50000" rIns="50000" bIns="50000">
             <a:spAutoFit/>
           </a:bodyPr>
           <a:lstStyle/>
@@ -5594,7 +5691,7 @@
           </a:ln>
         </p:spPr>
         <p:txBody>
-          <a:bodyPr wrap="square" lIns="50000" rIns="50000" tIns="50000" bIns="50000">
+          <a:bodyPr wrap="square" lIns="50000" tIns="50000" rIns="50000" bIns="50000">
             <a:spAutoFit/>
           </a:bodyPr>
           <a:lstStyle/>
@@ -5638,7 +5735,9 @@
             <a:spAutoFit/>
           </a:bodyPr>
           <a:lstStyle/>
-          <a:p/>
+          <a:p>
+            <a:endParaRPr/>
+          </a:p>
         </p:txBody>
       </p:sp>
       <p:sp>
@@ -5667,7 +5766,9 @@
             <a:spAutoFit/>
           </a:bodyPr>
           <a:lstStyle/>
-          <a:p/>
+          <a:p>
+            <a:endParaRPr/>
+          </a:p>
         </p:txBody>
       </p:sp>
       <p:sp>
@@ -5696,7 +5797,9 @@
             <a:spAutoFit/>
           </a:bodyPr>
           <a:lstStyle/>
-          <a:p/>
+          <a:p>
+            <a:endParaRPr/>
+          </a:p>
         </p:txBody>
       </p:sp>
       <p:sp>
@@ -5721,7 +5824,7 @@
           </a:ln>
         </p:spPr>
         <p:txBody>
-          <a:bodyPr wrap="square" lIns="50000" rIns="50000" tIns="50000" bIns="50000" anchor="ctr">
+          <a:bodyPr wrap="square" lIns="50000" tIns="50000" rIns="50000" bIns="50000" anchor="ctr">
             <a:spAutoFit/>
           </a:bodyPr>
           <a:lstStyle/>
@@ -5759,7 +5862,7 @@
           </a:ln>
         </p:spPr>
         <p:txBody>
-          <a:bodyPr wrap="square" lIns="50000" rIns="50000" tIns="50000" bIns="50000">
+          <a:bodyPr wrap="square" lIns="50000" tIns="50000" rIns="50000" bIns="50000">
             <a:spAutoFit/>
           </a:bodyPr>
           <a:lstStyle/>
@@ -5797,7 +5900,7 @@
           </a:ln>
         </p:spPr>
         <p:txBody>
-          <a:bodyPr wrap="square" lIns="50000" rIns="50000" tIns="50000" bIns="50000">
+          <a:bodyPr wrap="square" lIns="50000" tIns="50000" rIns="50000" bIns="50000">
             <a:spAutoFit/>
           </a:bodyPr>
           <a:lstStyle/>
@@ -5841,7 +5944,9 @@
             <a:spAutoFit/>
           </a:bodyPr>
           <a:lstStyle/>
-          <a:p/>
+          <a:p>
+            <a:endParaRPr/>
+          </a:p>
         </p:txBody>
       </p:sp>
       <p:sp>
@@ -5870,7 +5975,9 @@
             <a:spAutoFit/>
           </a:bodyPr>
           <a:lstStyle/>
-          <a:p/>
+          <a:p>
+            <a:endParaRPr/>
+          </a:p>
         </p:txBody>
       </p:sp>
       <p:sp>
@@ -5899,7 +6006,9 @@
             <a:spAutoFit/>
           </a:bodyPr>
           <a:lstStyle/>
-          <a:p/>
+          <a:p>
+            <a:endParaRPr/>
+          </a:p>
         </p:txBody>
       </p:sp>
       <p:sp>
@@ -5924,7 +6033,7 @@
           </a:ln>
         </p:spPr>
         <p:txBody>
-          <a:bodyPr wrap="square" lIns="50000" rIns="50000" tIns="50000" bIns="50000" anchor="ctr">
+          <a:bodyPr wrap="square" lIns="50000" tIns="50000" rIns="50000" bIns="50000" anchor="ctr">
             <a:spAutoFit/>
           </a:bodyPr>
           <a:lstStyle/>
@@ -5962,7 +6071,7 @@
           </a:ln>
         </p:spPr>
         <p:txBody>
-          <a:bodyPr wrap="square" lIns="50000" rIns="50000" tIns="50000" bIns="50000">
+          <a:bodyPr wrap="square" lIns="50000" tIns="50000" rIns="50000" bIns="50000">
             <a:spAutoFit/>
           </a:bodyPr>
           <a:lstStyle/>
@@ -6000,7 +6109,7 @@
           </a:ln>
         </p:spPr>
         <p:txBody>
-          <a:bodyPr wrap="square" lIns="50000" rIns="50000" tIns="50000" bIns="50000">
+          <a:bodyPr wrap="square" lIns="50000" tIns="50000" rIns="50000" bIns="50000">
             <a:spAutoFit/>
           </a:bodyPr>
           <a:lstStyle/>
@@ -6044,7 +6153,9 @@
             <a:spAutoFit/>
           </a:bodyPr>
           <a:lstStyle/>
-          <a:p/>
+          <a:p>
+            <a:endParaRPr/>
+          </a:p>
         </p:txBody>
       </p:sp>
       <p:sp>
@@ -6073,7 +6184,9 @@
             <a:spAutoFit/>
           </a:bodyPr>
           <a:lstStyle/>
-          <a:p/>
+          <a:p>
+            <a:endParaRPr/>
+          </a:p>
         </p:txBody>
       </p:sp>
       <p:sp>
@@ -6102,7 +6215,9 @@
             <a:spAutoFit/>
           </a:bodyPr>
           <a:lstStyle/>
-          <a:p/>
+          <a:p>
+            <a:endParaRPr/>
+          </a:p>
         </p:txBody>
       </p:sp>
       <p:sp>
@@ -6127,7 +6242,7 @@
           </a:ln>
         </p:spPr>
         <p:txBody>
-          <a:bodyPr wrap="square" lIns="50000" rIns="50000" tIns="50000" bIns="50000" anchor="ctr">
+          <a:bodyPr wrap="square" lIns="50000" tIns="50000" rIns="50000" bIns="50000" anchor="ctr">
             <a:spAutoFit/>
           </a:bodyPr>
           <a:lstStyle/>
@@ -6165,7 +6280,7 @@
           </a:ln>
         </p:spPr>
         <p:txBody>
-          <a:bodyPr wrap="square" lIns="50000" rIns="50000" tIns="50000" bIns="50000">
+          <a:bodyPr wrap="square" lIns="50000" tIns="50000" rIns="50000" bIns="50000">
             <a:spAutoFit/>
           </a:bodyPr>
           <a:lstStyle/>
@@ -6203,7 +6318,7 @@
           </a:ln>
         </p:spPr>
         <p:txBody>
-          <a:bodyPr wrap="square" lIns="50000" rIns="50000" tIns="50000" bIns="50000">
+          <a:bodyPr wrap="square" lIns="50000" tIns="50000" rIns="50000" bIns="50000">
             <a:spAutoFit/>
           </a:bodyPr>
           <a:lstStyle/>
@@ -6230,7 +6345,7 @@
 </file>
 
 <file path=ppt/slides/slide2.xml><?xml version="1.0" encoding="utf-8"?>
-<p:sld xmlns:a="http://schemas.openxmlformats.org/drawingml/2006/main" xmlns:p="http://schemas.openxmlformats.org/presentationml/2006/main" xmlns:r="http://schemas.openxmlformats.org/officeDocument/2006/relationships">
+<p:sld xmlns:a="http://schemas.openxmlformats.org/drawingml/2006/main" xmlns:r="http://schemas.openxmlformats.org/officeDocument/2006/relationships" xmlns:p="http://schemas.openxmlformats.org/presentationml/2006/main">
   <p:cSld>
     <p:spTree>
       <p:nvGrpSpPr>
@@ -6238,7 +6353,14 @@
         <p:cNvGrpSpPr/>
         <p:nvPr/>
       </p:nvGrpSpPr>
-      <p:grpSpPr/>
+      <p:grpSpPr>
+        <a:xfrm>
+          <a:off x="0" y="0"/>
+          <a:ext cx="0" cy="0"/>
+          <a:chOff x="0" y="0"/>
+          <a:chExt cx="0" cy="0"/>
+        </a:xfrm>
+      </p:grpSpPr>
       <p:sp>
         <p:nvSpPr>
           <p:cNvPr id="2" name="TextBox 1"/>
@@ -6265,7 +6387,9 @@
             <a:spAutoFit/>
           </a:bodyPr>
           <a:lstStyle/>
-          <a:p/>
+          <a:p>
+            <a:endParaRPr/>
+          </a:p>
         </p:txBody>
       </p:sp>
       <p:sp>
@@ -6294,7 +6418,9 @@
             <a:spAutoFit/>
           </a:bodyPr>
           <a:lstStyle/>
-          <a:p/>
+          <a:p>
+            <a:endParaRPr/>
+          </a:p>
         </p:txBody>
       </p:sp>
       <p:sp>
@@ -6323,7 +6449,9 @@
             <a:spAutoFit/>
           </a:bodyPr>
           <a:lstStyle/>
-          <a:p/>
+          <a:p>
+            <a:endParaRPr/>
+          </a:p>
         </p:txBody>
       </p:sp>
       <p:sp>
@@ -6346,7 +6474,7 @@
           </a:ln>
         </p:spPr>
         <p:txBody>
-          <a:bodyPr wrap="square" lIns="50000" rIns="50000" tIns="50000" bIns="50000">
+          <a:bodyPr wrap="square" lIns="50000" tIns="50000" rIns="50000" bIns="50000">
             <a:spAutoFit/>
           </a:bodyPr>
           <a:lstStyle/>
@@ -6384,7 +6512,7 @@
           </a:ln>
         </p:spPr>
         <p:txBody>
-          <a:bodyPr wrap="square" lIns="50000" rIns="50000" tIns="50000" bIns="50000">
+          <a:bodyPr wrap="square" lIns="50000" tIns="50000" rIns="50000" bIns="50000">
             <a:spAutoFit/>
           </a:bodyPr>
           <a:lstStyle/>
@@ -6428,7 +6556,9 @@
             <a:spAutoFit/>
           </a:bodyPr>
           <a:lstStyle/>
-          <a:p/>
+          <a:p>
+            <a:endParaRPr/>
+          </a:p>
         </p:txBody>
       </p:sp>
       <p:sp>
@@ -6457,7 +6587,9 @@
             <a:spAutoFit/>
           </a:bodyPr>
           <a:lstStyle/>
-          <a:p/>
+          <a:p>
+            <a:endParaRPr/>
+          </a:p>
         </p:txBody>
       </p:sp>
       <p:sp>
@@ -6482,7 +6614,7 @@
           </a:ln>
         </p:spPr>
         <p:txBody>
-          <a:bodyPr wrap="square" lIns="50000" rIns="50000" tIns="50000" bIns="50000" anchor="ctr">
+          <a:bodyPr wrap="square" lIns="50000" tIns="50000" rIns="50000" bIns="50000" anchor="ctr">
             <a:spAutoFit/>
           </a:bodyPr>
           <a:lstStyle/>
@@ -6520,7 +6652,7 @@
           </a:ln>
         </p:spPr>
         <p:txBody>
-          <a:bodyPr wrap="square" lIns="50000" rIns="50000" tIns="50000" bIns="50000">
+          <a:bodyPr wrap="square" lIns="50000" tIns="50000" rIns="50000" bIns="50000">
             <a:spAutoFit/>
           </a:bodyPr>
           <a:lstStyle/>
@@ -6558,7 +6690,7 @@
           </a:ln>
         </p:spPr>
         <p:txBody>
-          <a:bodyPr wrap="square" lIns="50000" rIns="50000" tIns="50000" bIns="50000">
+          <a:bodyPr wrap="square" lIns="50000" tIns="50000" rIns="50000" bIns="50000">
             <a:spAutoFit/>
           </a:bodyPr>
           <a:lstStyle/>
@@ -6602,7 +6734,9 @@
             <a:spAutoFit/>
           </a:bodyPr>
           <a:lstStyle/>
-          <a:p/>
+          <a:p>
+            <a:endParaRPr/>
+          </a:p>
         </p:txBody>
       </p:sp>
       <p:sp>
@@ -6631,7 +6765,9 @@
             <a:spAutoFit/>
           </a:bodyPr>
           <a:lstStyle/>
-          <a:p/>
+          <a:p>
+            <a:endParaRPr/>
+          </a:p>
         </p:txBody>
       </p:sp>
       <p:sp>
@@ -6656,7 +6792,7 @@
           </a:ln>
         </p:spPr>
         <p:txBody>
-          <a:bodyPr wrap="square" lIns="50000" rIns="50000" tIns="50000" bIns="50000" anchor="ctr">
+          <a:bodyPr wrap="square" lIns="50000" tIns="50000" rIns="50000" bIns="50000" anchor="ctr">
             <a:spAutoFit/>
           </a:bodyPr>
           <a:lstStyle/>
@@ -6694,7 +6830,7 @@
           </a:ln>
         </p:spPr>
         <p:txBody>
-          <a:bodyPr wrap="square" lIns="50000" rIns="50000" tIns="50000" bIns="50000">
+          <a:bodyPr wrap="square" lIns="50000" tIns="50000" rIns="50000" bIns="50000">
             <a:spAutoFit/>
           </a:bodyPr>
           <a:lstStyle/>
@@ -6732,7 +6868,7 @@
           </a:ln>
         </p:spPr>
         <p:txBody>
-          <a:bodyPr wrap="square" lIns="50000" rIns="50000" tIns="50000" bIns="50000">
+          <a:bodyPr wrap="square" lIns="50000" tIns="50000" rIns="50000" bIns="50000">
             <a:spAutoFit/>
           </a:bodyPr>
           <a:lstStyle/>
@@ -6776,7 +6912,9 @@
             <a:spAutoFit/>
           </a:bodyPr>
           <a:lstStyle/>
-          <a:p/>
+          <a:p>
+            <a:endParaRPr/>
+          </a:p>
         </p:txBody>
       </p:sp>
       <p:sp>
@@ -6805,7 +6943,9 @@
             <a:spAutoFit/>
           </a:bodyPr>
           <a:lstStyle/>
-          <a:p/>
+          <a:p>
+            <a:endParaRPr/>
+          </a:p>
         </p:txBody>
       </p:sp>
       <p:sp>
@@ -6830,7 +6970,7 @@
           </a:ln>
         </p:spPr>
         <p:txBody>
-          <a:bodyPr wrap="square" lIns="50000" rIns="50000" tIns="50000" bIns="50000" anchor="ctr">
+          <a:bodyPr wrap="square" lIns="50000" tIns="50000" rIns="50000" bIns="50000" anchor="ctr">
             <a:spAutoFit/>
           </a:bodyPr>
           <a:lstStyle/>
@@ -6868,7 +7008,7 @@
           </a:ln>
         </p:spPr>
         <p:txBody>
-          <a:bodyPr wrap="square" lIns="50000" rIns="50000" tIns="50000" bIns="50000">
+          <a:bodyPr wrap="square" lIns="50000" tIns="50000" rIns="50000" bIns="50000">
             <a:spAutoFit/>
           </a:bodyPr>
           <a:lstStyle/>
@@ -6906,7 +7046,7 @@
           </a:ln>
         </p:spPr>
         <p:txBody>
-          <a:bodyPr wrap="square" lIns="50000" rIns="50000" tIns="50000" bIns="50000">
+          <a:bodyPr wrap="square" lIns="50000" tIns="50000" rIns="50000" bIns="50000">
             <a:spAutoFit/>
           </a:bodyPr>
           <a:lstStyle/>
@@ -6933,7 +7073,7 @@
 </file>
 
 <file path=ppt/slides/slide3.xml><?xml version="1.0" encoding="utf-8"?>
-<p:sld xmlns:a="http://schemas.openxmlformats.org/drawingml/2006/main" xmlns:p="http://schemas.openxmlformats.org/presentationml/2006/main" xmlns:r="http://schemas.openxmlformats.org/officeDocument/2006/relationships">
+<p:sld xmlns:a="http://schemas.openxmlformats.org/drawingml/2006/main" xmlns:r="http://schemas.openxmlformats.org/officeDocument/2006/relationships" xmlns:p="http://schemas.openxmlformats.org/presentationml/2006/main">
   <p:cSld>
     <p:spTree>
       <p:nvGrpSpPr>
@@ -6941,7 +7081,14 @@
         <p:cNvGrpSpPr/>
         <p:nvPr/>
       </p:nvGrpSpPr>
-      <p:grpSpPr/>
+      <p:grpSpPr>
+        <a:xfrm>
+          <a:off x="0" y="0"/>
+          <a:ext cx="0" cy="0"/>
+          <a:chOff x="0" y="0"/>
+          <a:chExt cx="0" cy="0"/>
+        </a:xfrm>
+      </p:grpSpPr>
       <p:sp>
         <p:nvSpPr>
           <p:cNvPr id="2" name="TextBox 1"/>
@@ -6968,7 +7115,9 @@
             <a:spAutoFit/>
           </a:bodyPr>
           <a:lstStyle/>
-          <a:p/>
+          <a:p>
+            <a:endParaRPr/>
+          </a:p>
         </p:txBody>
       </p:sp>
       <p:sp>
@@ -6997,7 +7146,9 @@
             <a:spAutoFit/>
           </a:bodyPr>
           <a:lstStyle/>
-          <a:p/>
+          <a:p>
+            <a:endParaRPr/>
+          </a:p>
         </p:txBody>
       </p:sp>
       <p:sp>
@@ -7026,7 +7177,9 @@
             <a:spAutoFit/>
           </a:bodyPr>
           <a:lstStyle/>
-          <a:p/>
+          <a:p>
+            <a:endParaRPr/>
+          </a:p>
         </p:txBody>
       </p:sp>
       <p:sp>
@@ -7049,7 +7202,7 @@
           </a:ln>
         </p:spPr>
         <p:txBody>
-          <a:bodyPr wrap="square" lIns="50000" rIns="50000" tIns="50000" bIns="50000">
+          <a:bodyPr wrap="square" lIns="50000" tIns="50000" rIns="50000" bIns="50000">
             <a:spAutoFit/>
           </a:bodyPr>
           <a:lstStyle/>
@@ -7087,7 +7240,7 @@
           </a:ln>
         </p:spPr>
         <p:txBody>
-          <a:bodyPr wrap="square" lIns="50000" rIns="50000" tIns="50000" bIns="50000">
+          <a:bodyPr wrap="square" lIns="50000" tIns="50000" rIns="50000" bIns="50000">
             <a:spAutoFit/>
           </a:bodyPr>
           <a:lstStyle/>
@@ -7131,7 +7284,9 @@
             <a:spAutoFit/>
           </a:bodyPr>
           <a:lstStyle/>
-          <a:p/>
+          <a:p>
+            <a:endParaRPr/>
+          </a:p>
         </p:txBody>
       </p:sp>
       <p:sp>
@@ -7160,7 +7315,9 @@
             <a:spAutoFit/>
           </a:bodyPr>
           <a:lstStyle/>
-          <a:p/>
+          <a:p>
+            <a:endParaRPr/>
+          </a:p>
         </p:txBody>
       </p:sp>
       <p:sp>
@@ -7183,7 +7340,7 @@
           </a:ln>
         </p:spPr>
         <p:txBody>
-          <a:bodyPr wrap="square" lIns="50000" rIns="50000" tIns="50000" bIns="50000">
+          <a:bodyPr wrap="square" lIns="50000" tIns="50000" rIns="50000" bIns="50000">
             <a:spAutoFit/>
           </a:bodyPr>
           <a:lstStyle/>
@@ -7221,7 +7378,7 @@
           </a:ln>
         </p:spPr>
         <p:txBody>
-          <a:bodyPr wrap="square" lIns="50000" rIns="50000" tIns="50000" bIns="50000">
+          <a:bodyPr wrap="square" lIns="50000" tIns="50000" rIns="50000" bIns="50000">
             <a:spAutoFit/>
           </a:bodyPr>
           <a:lstStyle/>
@@ -7265,7 +7422,9 @@
             <a:spAutoFit/>
           </a:bodyPr>
           <a:lstStyle/>
-          <a:p/>
+          <a:p>
+            <a:endParaRPr/>
+          </a:p>
         </p:txBody>
       </p:sp>
       <p:sp>
@@ -7288,7 +7447,7 @@
           </a:ln>
         </p:spPr>
         <p:txBody>
-          <a:bodyPr wrap="square" lIns="50000" rIns="50000" tIns="50000" bIns="50000">
+          <a:bodyPr wrap="square" lIns="50000" tIns="50000" rIns="50000" bIns="50000">
             <a:spAutoFit/>
           </a:bodyPr>
           <a:lstStyle/>
@@ -7332,7 +7491,9 @@
             <a:spAutoFit/>
           </a:bodyPr>
           <a:lstStyle/>
-          <a:p/>
+          <a:p>
+            <a:endParaRPr/>
+          </a:p>
         </p:txBody>
       </p:sp>
       <p:sp>
@@ -7355,7 +7516,7 @@
           </a:ln>
         </p:spPr>
         <p:txBody>
-          <a:bodyPr wrap="square" lIns="50000" rIns="50000" tIns="50000" bIns="50000">
+          <a:bodyPr wrap="square" lIns="50000" tIns="50000" rIns="50000" bIns="50000">
             <a:spAutoFit/>
           </a:bodyPr>
           <a:lstStyle/>
@@ -7399,7 +7560,9 @@
             <a:spAutoFit/>
           </a:bodyPr>
           <a:lstStyle/>
-          <a:p/>
+          <a:p>
+            <a:endParaRPr/>
+          </a:p>
         </p:txBody>
       </p:sp>
       <p:sp>
@@ -7422,7 +7585,7 @@
           </a:ln>
         </p:spPr>
         <p:txBody>
-          <a:bodyPr wrap="square" lIns="50000" rIns="50000" tIns="50000" bIns="50000">
+          <a:bodyPr wrap="square" lIns="50000" tIns="50000" rIns="50000" bIns="50000">
             <a:spAutoFit/>
           </a:bodyPr>
           <a:lstStyle/>
@@ -7466,7 +7629,9 @@
             <a:spAutoFit/>
           </a:bodyPr>
           <a:lstStyle/>
-          <a:p/>
+          <a:p>
+            <a:endParaRPr/>
+          </a:p>
         </p:txBody>
       </p:sp>
       <p:sp>
@@ -7489,7 +7654,7 @@
           </a:ln>
         </p:spPr>
         <p:txBody>
-          <a:bodyPr wrap="square" lIns="50000" rIns="50000" tIns="50000" bIns="50000">
+          <a:bodyPr wrap="square" lIns="50000" tIns="50000" rIns="50000" bIns="50000">
             <a:spAutoFit/>
           </a:bodyPr>
           <a:lstStyle/>
@@ -7527,7 +7692,7 @@
           </a:ln>
         </p:spPr>
         <p:txBody>
-          <a:bodyPr wrap="square" lIns="50000" rIns="50000" tIns="50000" bIns="50000" anchor="ctr">
+          <a:bodyPr wrap="square" lIns="50000" tIns="50000" rIns="50000" bIns="50000" anchor="ctr">
             <a:spAutoFit/>
           </a:bodyPr>
           <a:lstStyle/>
@@ -7571,7 +7736,9 @@
             <a:spAutoFit/>
           </a:bodyPr>
           <a:lstStyle/>
-          <a:p/>
+          <a:p>
+            <a:endParaRPr/>
+          </a:p>
         </p:txBody>
       </p:sp>
       <p:sp>
@@ -7600,7 +7767,9 @@
             <a:spAutoFit/>
           </a:bodyPr>
           <a:lstStyle/>
-          <a:p/>
+          <a:p>
+            <a:endParaRPr/>
+          </a:p>
         </p:txBody>
       </p:sp>
       <p:sp>
@@ -7623,7 +7792,7 @@
           </a:ln>
         </p:spPr>
         <p:txBody>
-          <a:bodyPr wrap="square" lIns="50000" rIns="50000" tIns="50000" bIns="50000">
+          <a:bodyPr wrap="square" lIns="50000" tIns="50000" rIns="50000" bIns="50000">
             <a:spAutoFit/>
           </a:bodyPr>
           <a:lstStyle/>
@@ -7667,7 +7836,9 @@
             <a:spAutoFit/>
           </a:bodyPr>
           <a:lstStyle/>
-          <a:p/>
+          <a:p>
+            <a:endParaRPr/>
+          </a:p>
         </p:txBody>
       </p:sp>
       <p:sp>
@@ -7692,7 +7863,7 @@
           </a:ln>
         </p:spPr>
         <p:txBody>
-          <a:bodyPr wrap="square" lIns="50000" rIns="50000" tIns="50000" bIns="50000" anchor="ctr">
+          <a:bodyPr wrap="square" lIns="50000" tIns="50000" rIns="50000" bIns="50000" anchor="ctr">
             <a:spAutoFit/>
           </a:bodyPr>
           <a:lstStyle/>
@@ -7730,7 +7901,7 @@
           </a:ln>
         </p:spPr>
         <p:txBody>
-          <a:bodyPr wrap="square" lIns="50000" rIns="50000" tIns="50000" bIns="50000">
+          <a:bodyPr wrap="square" lIns="50000" tIns="50000" rIns="50000" bIns="50000">
             <a:spAutoFit/>
           </a:bodyPr>
           <a:lstStyle/>
@@ -7768,7 +7939,7 @@
           </a:ln>
         </p:spPr>
         <p:txBody>
-          <a:bodyPr wrap="square" lIns="50000" rIns="50000" tIns="50000" bIns="50000">
+          <a:bodyPr wrap="square" lIns="50000" tIns="50000" rIns="50000" bIns="50000">
             <a:spAutoFit/>
           </a:bodyPr>
           <a:lstStyle/>
@@ -7812,7 +7983,9 @@
             <a:spAutoFit/>
           </a:bodyPr>
           <a:lstStyle/>
-          <a:p/>
+          <a:p>
+            <a:endParaRPr/>
+          </a:p>
         </p:txBody>
       </p:sp>
       <p:sp>
@@ -7837,7 +8010,7 @@
           </a:ln>
         </p:spPr>
         <p:txBody>
-          <a:bodyPr wrap="square" lIns="50000" rIns="50000" tIns="50000" bIns="50000" anchor="ctr">
+          <a:bodyPr wrap="square" lIns="50000" tIns="50000" rIns="50000" bIns="50000" anchor="ctr">
             <a:spAutoFit/>
           </a:bodyPr>
           <a:lstStyle/>
@@ -7875,7 +8048,7 @@
           </a:ln>
         </p:spPr>
         <p:txBody>
-          <a:bodyPr wrap="square" lIns="50000" rIns="50000" tIns="50000" bIns="50000">
+          <a:bodyPr wrap="square" lIns="50000" tIns="50000" rIns="50000" bIns="50000">
             <a:spAutoFit/>
           </a:bodyPr>
           <a:lstStyle/>
@@ -7913,7 +8086,7 @@
           </a:ln>
         </p:spPr>
         <p:txBody>
-          <a:bodyPr wrap="square" lIns="50000" rIns="50000" tIns="50000" bIns="50000">
+          <a:bodyPr wrap="square" lIns="50000" tIns="50000" rIns="50000" bIns="50000">
             <a:spAutoFit/>
           </a:bodyPr>
           <a:lstStyle/>
@@ -7957,7 +8130,9 @@
             <a:spAutoFit/>
           </a:bodyPr>
           <a:lstStyle/>
-          <a:p/>
+          <a:p>
+            <a:endParaRPr/>
+          </a:p>
         </p:txBody>
       </p:sp>
       <p:sp>
@@ -7982,7 +8157,7 @@
           </a:ln>
         </p:spPr>
         <p:txBody>
-          <a:bodyPr wrap="square" lIns="50000" rIns="50000" tIns="50000" bIns="50000" anchor="ctr">
+          <a:bodyPr wrap="square" lIns="50000" tIns="50000" rIns="50000" bIns="50000" anchor="ctr">
             <a:spAutoFit/>
           </a:bodyPr>
           <a:lstStyle/>
@@ -8020,7 +8195,7 @@
           </a:ln>
         </p:spPr>
         <p:txBody>
-          <a:bodyPr wrap="square" lIns="50000" rIns="50000" tIns="50000" bIns="50000">
+          <a:bodyPr wrap="square" lIns="50000" tIns="50000" rIns="50000" bIns="50000">
             <a:spAutoFit/>
           </a:bodyPr>
           <a:lstStyle/>
@@ -8058,7 +8233,7 @@
           </a:ln>
         </p:spPr>
         <p:txBody>
-          <a:bodyPr wrap="square" lIns="50000" rIns="50000" tIns="50000" bIns="50000">
+          <a:bodyPr wrap="square" lIns="50000" tIns="50000" rIns="50000" bIns="50000">
             <a:spAutoFit/>
           </a:bodyPr>
           <a:lstStyle/>
@@ -8102,7 +8277,9 @@
             <a:spAutoFit/>
           </a:bodyPr>
           <a:lstStyle/>
-          <a:p/>
+          <a:p>
+            <a:endParaRPr/>
+          </a:p>
         </p:txBody>
       </p:sp>
       <p:sp>
@@ -8127,7 +8304,7 @@
           </a:ln>
         </p:spPr>
         <p:txBody>
-          <a:bodyPr wrap="square" lIns="50000" rIns="50000" tIns="50000" bIns="50000" anchor="ctr">
+          <a:bodyPr wrap="square" lIns="50000" tIns="50000" rIns="50000" bIns="50000" anchor="ctr">
             <a:spAutoFit/>
           </a:bodyPr>
           <a:lstStyle/>
@@ -8165,7 +8342,7 @@
           </a:ln>
         </p:spPr>
         <p:txBody>
-          <a:bodyPr wrap="square" lIns="50000" rIns="50000" tIns="50000" bIns="50000">
+          <a:bodyPr wrap="square" lIns="50000" tIns="50000" rIns="50000" bIns="50000">
             <a:spAutoFit/>
           </a:bodyPr>
           <a:lstStyle/>
@@ -8203,7 +8380,7 @@
           </a:ln>
         </p:spPr>
         <p:txBody>
-          <a:bodyPr wrap="square" lIns="50000" rIns="50000" tIns="50000" bIns="50000">
+          <a:bodyPr wrap="square" lIns="50000" tIns="50000" rIns="50000" bIns="50000">
             <a:spAutoFit/>
           </a:bodyPr>
           <a:lstStyle/>
@@ -8247,7 +8424,9 @@
             <a:spAutoFit/>
           </a:bodyPr>
           <a:lstStyle/>
-          <a:p/>
+          <a:p>
+            <a:endParaRPr/>
+          </a:p>
         </p:txBody>
       </p:sp>
       <p:sp>
@@ -8272,7 +8451,7 @@
           </a:ln>
         </p:spPr>
         <p:txBody>
-          <a:bodyPr wrap="square" lIns="50000" rIns="50000" tIns="50000" bIns="50000" anchor="ctr">
+          <a:bodyPr wrap="square" lIns="50000" tIns="50000" rIns="50000" bIns="50000" anchor="ctr">
             <a:spAutoFit/>
           </a:bodyPr>
           <a:lstStyle/>
@@ -8310,7 +8489,7 @@
           </a:ln>
         </p:spPr>
         <p:txBody>
-          <a:bodyPr wrap="square" lIns="50000" rIns="50000" tIns="50000" bIns="50000">
+          <a:bodyPr wrap="square" lIns="50000" tIns="50000" rIns="50000" bIns="50000">
             <a:spAutoFit/>
           </a:bodyPr>
           <a:lstStyle/>
@@ -8348,7 +8527,7 @@
           </a:ln>
         </p:spPr>
         <p:txBody>
-          <a:bodyPr wrap="square" lIns="50000" rIns="50000" tIns="50000" bIns="50000">
+          <a:bodyPr wrap="square" lIns="50000" tIns="50000" rIns="50000" bIns="50000">
             <a:spAutoFit/>
           </a:bodyPr>
           <a:lstStyle/>
@@ -8375,7 +8554,7 @@
 </file>
 
 <file path=ppt/slides/slide4.xml><?xml version="1.0" encoding="utf-8"?>
-<p:sld xmlns:a="http://schemas.openxmlformats.org/drawingml/2006/main" xmlns:p="http://schemas.openxmlformats.org/presentationml/2006/main" xmlns:r="http://schemas.openxmlformats.org/officeDocument/2006/relationships">
+<p:sld xmlns:a="http://schemas.openxmlformats.org/drawingml/2006/main" xmlns:r="http://schemas.openxmlformats.org/officeDocument/2006/relationships" xmlns:p="http://schemas.openxmlformats.org/presentationml/2006/main">
   <p:cSld>
     <p:spTree>
       <p:nvGrpSpPr>
@@ -8383,7 +8562,14 @@
         <p:cNvGrpSpPr/>
         <p:nvPr/>
       </p:nvGrpSpPr>
-      <p:grpSpPr/>
+      <p:grpSpPr>
+        <a:xfrm>
+          <a:off x="0" y="0"/>
+          <a:ext cx="0" cy="0"/>
+          <a:chOff x="0" y="0"/>
+          <a:chExt cx="0" cy="0"/>
+        </a:xfrm>
+      </p:grpSpPr>
       <p:sp>
         <p:nvSpPr>
           <p:cNvPr id="2" name="TextBox 1"/>
@@ -8410,7 +8596,9 @@
             <a:spAutoFit/>
           </a:bodyPr>
           <a:lstStyle/>
-          <a:p/>
+          <a:p>
+            <a:endParaRPr/>
+          </a:p>
         </p:txBody>
       </p:sp>
       <p:sp>
@@ -8439,7 +8627,9 @@
             <a:spAutoFit/>
           </a:bodyPr>
           <a:lstStyle/>
-          <a:p/>
+          <a:p>
+            <a:endParaRPr/>
+          </a:p>
         </p:txBody>
       </p:sp>
       <p:sp>
@@ -8468,7 +8658,9 @@
             <a:spAutoFit/>
           </a:bodyPr>
           <a:lstStyle/>
-          <a:p/>
+          <a:p>
+            <a:endParaRPr/>
+          </a:p>
         </p:txBody>
       </p:sp>
       <p:sp>
@@ -8491,7 +8683,7 @@
           </a:ln>
         </p:spPr>
         <p:txBody>
-          <a:bodyPr wrap="square" lIns="50000" rIns="50000" tIns="50000" bIns="50000">
+          <a:bodyPr wrap="square" lIns="50000" tIns="50000" rIns="50000" bIns="50000">
             <a:spAutoFit/>
           </a:bodyPr>
           <a:lstStyle/>
@@ -8529,7 +8721,7 @@
           </a:ln>
         </p:spPr>
         <p:txBody>
-          <a:bodyPr wrap="square" lIns="50000" rIns="50000" tIns="50000" bIns="50000">
+          <a:bodyPr wrap="square" lIns="50000" tIns="50000" rIns="50000" bIns="50000">
             <a:spAutoFit/>
           </a:bodyPr>
           <a:lstStyle/>
@@ -8573,7 +8765,9 @@
             <a:spAutoFit/>
           </a:bodyPr>
           <a:lstStyle/>
-          <a:p/>
+          <a:p>
+            <a:endParaRPr/>
+          </a:p>
         </p:txBody>
       </p:sp>
       <p:sp>
@@ -8602,7 +8796,9 @@
             <a:spAutoFit/>
           </a:bodyPr>
           <a:lstStyle/>
-          <a:p/>
+          <a:p>
+            <a:endParaRPr/>
+          </a:p>
         </p:txBody>
       </p:sp>
       <p:sp>
@@ -8625,7 +8821,7 @@
           </a:ln>
         </p:spPr>
         <p:txBody>
-          <a:bodyPr wrap="square" lIns="50000" rIns="50000" tIns="50000" bIns="50000">
+          <a:bodyPr wrap="square" lIns="50000" tIns="50000" rIns="50000" bIns="50000">
             <a:spAutoFit/>
           </a:bodyPr>
           <a:lstStyle/>
@@ -8663,7 +8859,7 @@
           </a:ln>
         </p:spPr>
         <p:txBody>
-          <a:bodyPr wrap="square" lIns="50000" rIns="50000" tIns="50000" bIns="50000">
+          <a:bodyPr wrap="square" lIns="50000" tIns="50000" rIns="50000" bIns="50000">
             <a:spAutoFit/>
           </a:bodyPr>
           <a:lstStyle/>
@@ -8707,7 +8903,9 @@
             <a:spAutoFit/>
           </a:bodyPr>
           <a:lstStyle/>
-          <a:p/>
+          <a:p>
+            <a:endParaRPr/>
+          </a:p>
         </p:txBody>
       </p:sp>
       <p:sp>
@@ -8730,7 +8928,7 @@
           </a:ln>
         </p:spPr>
         <p:txBody>
-          <a:bodyPr wrap="square" lIns="50000" rIns="50000" tIns="50000" bIns="50000">
+          <a:bodyPr wrap="square" lIns="50000" tIns="50000" rIns="50000" bIns="50000">
             <a:spAutoFit/>
           </a:bodyPr>
           <a:lstStyle/>
@@ -8774,7 +8972,9 @@
             <a:spAutoFit/>
           </a:bodyPr>
           <a:lstStyle/>
-          <a:p/>
+          <a:p>
+            <a:endParaRPr/>
+          </a:p>
         </p:txBody>
       </p:sp>
       <p:sp>
@@ -8797,7 +8997,7 @@
           </a:ln>
         </p:spPr>
         <p:txBody>
-          <a:bodyPr wrap="square" lIns="50000" rIns="50000" tIns="50000" bIns="50000">
+          <a:bodyPr wrap="square" lIns="50000" tIns="50000" rIns="50000" bIns="50000">
             <a:spAutoFit/>
           </a:bodyPr>
           <a:lstStyle/>
@@ -8841,7 +9041,9 @@
             <a:spAutoFit/>
           </a:bodyPr>
           <a:lstStyle/>
-          <a:p/>
+          <a:p>
+            <a:endParaRPr/>
+          </a:p>
         </p:txBody>
       </p:sp>
       <p:sp>
@@ -8864,7 +9066,7 @@
           </a:ln>
         </p:spPr>
         <p:txBody>
-          <a:bodyPr wrap="square" lIns="50000" rIns="50000" tIns="50000" bIns="50000">
+          <a:bodyPr wrap="square" lIns="50000" tIns="50000" rIns="50000" bIns="50000">
             <a:spAutoFit/>
           </a:bodyPr>
           <a:lstStyle/>
@@ -8902,7 +9104,7 @@
           </a:ln>
         </p:spPr>
         <p:txBody>
-          <a:bodyPr wrap="square" lIns="50000" rIns="50000" tIns="50000" bIns="50000" anchor="ctr">
+          <a:bodyPr wrap="square" lIns="50000" tIns="50000" rIns="50000" bIns="50000" anchor="ctr">
             <a:spAutoFit/>
           </a:bodyPr>
           <a:lstStyle/>
@@ -8946,7 +9148,9 @@
             <a:spAutoFit/>
           </a:bodyPr>
           <a:lstStyle/>
-          <a:p/>
+          <a:p>
+            <a:endParaRPr/>
+          </a:p>
         </p:txBody>
       </p:sp>
       <p:sp>
@@ -8975,7 +9179,9 @@
             <a:spAutoFit/>
           </a:bodyPr>
           <a:lstStyle/>
-          <a:p/>
+          <a:p>
+            <a:endParaRPr/>
+          </a:p>
         </p:txBody>
       </p:sp>
       <p:sp>
@@ -8998,7 +9204,7 @@
           </a:ln>
         </p:spPr>
         <p:txBody>
-          <a:bodyPr wrap="square" lIns="50000" rIns="50000" tIns="50000" bIns="50000">
+          <a:bodyPr wrap="square" lIns="50000" tIns="50000" rIns="50000" bIns="50000">
             <a:spAutoFit/>
           </a:bodyPr>
           <a:lstStyle/>
@@ -9036,7 +9242,7 @@
           </a:ln>
         </p:spPr>
         <p:txBody>
-          <a:bodyPr wrap="square" lIns="50000" rIns="50000" tIns="50000" bIns="50000">
+          <a:bodyPr wrap="square" lIns="50000" tIns="50000" rIns="50000" bIns="50000">
             <a:spAutoFit/>
           </a:bodyPr>
           <a:lstStyle/>
@@ -9080,7 +9286,9 @@
             <a:spAutoFit/>
           </a:bodyPr>
           <a:lstStyle/>
-          <a:p/>
+          <a:p>
+            <a:endParaRPr/>
+          </a:p>
         </p:txBody>
       </p:sp>
       <p:sp>
@@ -9092,32 +9300,47 @@
         <p:spPr>
           <a:xfrm>
             <a:off x="3771900" y="2148840"/>
-            <a:ext cx="2057400" cy="384048"/>
-          </a:xfrm>
-          <a:prstGeom prst="rect">
-            <a:avLst/>
-          </a:prstGeom>
-          <a:noFill/>
-          <a:ln>
-            <a:noFill/>
-          </a:ln>
-        </p:spPr>
-        <p:txBody>
-          <a:bodyPr wrap="square" lIns="50000" rIns="50000" tIns="50000" bIns="50000">
+            <a:ext cx="2057400" cy="262559"/>
+          </a:xfrm>
+          <a:prstGeom prst="rect">
+            <a:avLst/>
+          </a:prstGeom>
+          <a:noFill/>
+          <a:ln>
+            <a:noFill/>
+          </a:ln>
+        </p:spPr>
+        <p:txBody>
+          <a:bodyPr wrap="square" lIns="50000" tIns="50000" rIns="50000" bIns="50000">
             <a:spAutoFit/>
           </a:bodyPr>
           <a:lstStyle/>
           <a:p>
             <a:pPr algn="l"/>
             <a:r>
-              <a:rPr sz="1050" b="0" i="0">
+              <a:rPr sz="1050" b="0" i="0" dirty="0">
                 <a:solidFill>
                   <a:srgbClr val="2D2D2D"/>
                 </a:solidFill>
                 <a:latin typeface="Calibri"/>
               </a:rPr>
-              <a:t>run_classifier.ps1</a:t>
-            </a:r>
+              <a:t>run_classifier</a:t>
+            </a:r>
+            <a:r>
+              <a:rPr lang="en-US" altLang="zh-TW" sz="1050" dirty="0">
+                <a:solidFill>
+                  <a:srgbClr val="2D2D2D"/>
+                </a:solidFill>
+                <a:latin typeface="Calibri"/>
+              </a:rPr>
+              <a:t>_and_symbols.bat</a:t>
+            </a:r>
+            <a:endParaRPr sz="1050" b="0" i="0" dirty="0">
+              <a:solidFill>
+                <a:srgbClr val="2D2D2D"/>
+              </a:solidFill>
+              <a:latin typeface="Calibri"/>
+            </a:endParaRPr>
           </a:p>
         </p:txBody>
       </p:sp>
@@ -9147,7 +9370,9 @@
             <a:spAutoFit/>
           </a:bodyPr>
           <a:lstStyle/>
-          <a:p/>
+          <a:p>
+            <a:endParaRPr/>
+          </a:p>
         </p:txBody>
       </p:sp>
       <p:sp>
@@ -9170,7 +9395,7 @@
           </a:ln>
         </p:spPr>
         <p:txBody>
-          <a:bodyPr wrap="square" lIns="50000" rIns="50000" tIns="50000" bIns="50000">
+          <a:bodyPr wrap="square" lIns="50000" tIns="50000" rIns="50000" bIns="50000">
             <a:spAutoFit/>
           </a:bodyPr>
           <a:lstStyle/>
@@ -9214,7 +9439,9 @@
             <a:spAutoFit/>
           </a:bodyPr>
           <a:lstStyle/>
-          <a:p/>
+          <a:p>
+            <a:endParaRPr/>
+          </a:p>
         </p:txBody>
       </p:sp>
       <p:sp>
@@ -9237,7 +9464,7 @@
           </a:ln>
         </p:spPr>
         <p:txBody>
-          <a:bodyPr wrap="square" lIns="50000" rIns="50000" tIns="50000" bIns="50000">
+          <a:bodyPr wrap="square" lIns="50000" tIns="50000" rIns="50000" bIns="50000">
             <a:spAutoFit/>
           </a:bodyPr>
           <a:lstStyle/>
@@ -9275,7 +9502,7 @@
           </a:ln>
         </p:spPr>
         <p:txBody>
-          <a:bodyPr wrap="square" lIns="50000" rIns="50000" tIns="50000" bIns="50000" anchor="ctr">
+          <a:bodyPr wrap="square" lIns="50000" tIns="50000" rIns="50000" bIns="50000" anchor="ctr">
             <a:spAutoFit/>
           </a:bodyPr>
           <a:lstStyle/>
@@ -9319,7 +9546,9 @@
             <a:spAutoFit/>
           </a:bodyPr>
           <a:lstStyle/>
-          <a:p/>
+          <a:p>
+            <a:endParaRPr/>
+          </a:p>
         </p:txBody>
       </p:sp>
       <p:sp>
@@ -9348,7 +9577,9 @@
             <a:spAutoFit/>
           </a:bodyPr>
           <a:lstStyle/>
-          <a:p/>
+          <a:p>
+            <a:endParaRPr/>
+          </a:p>
         </p:txBody>
       </p:sp>
       <p:sp>
@@ -9371,7 +9602,7 @@
           </a:ln>
         </p:spPr>
         <p:txBody>
-          <a:bodyPr wrap="square" lIns="50000" rIns="50000" tIns="50000" bIns="50000">
+          <a:bodyPr wrap="square" lIns="50000" tIns="50000" rIns="50000" bIns="50000">
             <a:spAutoFit/>
           </a:bodyPr>
           <a:lstStyle/>
@@ -9409,7 +9640,7 @@
           </a:ln>
         </p:spPr>
         <p:txBody>
-          <a:bodyPr wrap="square" lIns="50000" rIns="50000" tIns="50000" bIns="50000">
+          <a:bodyPr wrap="square" lIns="50000" tIns="50000" rIns="50000" bIns="50000">
             <a:spAutoFit/>
           </a:bodyPr>
           <a:lstStyle/>
@@ -9453,7 +9684,9 @@
             <a:spAutoFit/>
           </a:bodyPr>
           <a:lstStyle/>
-          <a:p/>
+          <a:p>
+            <a:endParaRPr/>
+          </a:p>
         </p:txBody>
       </p:sp>
       <p:sp>
@@ -9476,7 +9709,7 @@
           </a:ln>
         </p:spPr>
         <p:txBody>
-          <a:bodyPr wrap="square" lIns="50000" rIns="50000" tIns="50000" bIns="50000">
+          <a:bodyPr wrap="square" lIns="50000" tIns="50000" rIns="50000" bIns="50000">
             <a:spAutoFit/>
           </a:bodyPr>
           <a:lstStyle/>
@@ -9520,7 +9753,9 @@
             <a:spAutoFit/>
           </a:bodyPr>
           <a:lstStyle/>
-          <a:p/>
+          <a:p>
+            <a:endParaRPr/>
+          </a:p>
         </p:txBody>
       </p:sp>
       <p:sp>
@@ -9543,7 +9778,7 @@
           </a:ln>
         </p:spPr>
         <p:txBody>
-          <a:bodyPr wrap="square" lIns="50000" rIns="50000" tIns="50000" bIns="50000">
+          <a:bodyPr wrap="square" lIns="50000" tIns="50000" rIns="50000" bIns="50000">
             <a:spAutoFit/>
           </a:bodyPr>
           <a:lstStyle/>
@@ -9587,7 +9822,9 @@
             <a:spAutoFit/>
           </a:bodyPr>
           <a:lstStyle/>
-          <a:p/>
+          <a:p>
+            <a:endParaRPr/>
+          </a:p>
         </p:txBody>
       </p:sp>
       <p:sp>
@@ -9610,7 +9847,7 @@
           </a:ln>
         </p:spPr>
         <p:txBody>
-          <a:bodyPr wrap="square" lIns="50000" rIns="50000" tIns="50000" bIns="50000">
+          <a:bodyPr wrap="square" lIns="50000" tIns="50000" rIns="50000" bIns="50000">
             <a:spAutoFit/>
           </a:bodyPr>
           <a:lstStyle/>
@@ -9648,7 +9885,7 @@
           </a:ln>
         </p:spPr>
         <p:txBody>
-          <a:bodyPr wrap="square" lIns="50000" rIns="50000" tIns="50000" bIns="50000" anchor="ctr">
+          <a:bodyPr wrap="square" lIns="50000" tIns="50000" rIns="50000" bIns="50000" anchor="ctr">
             <a:spAutoFit/>
           </a:bodyPr>
           <a:lstStyle/>
@@ -9692,7 +9929,9 @@
             <a:spAutoFit/>
           </a:bodyPr>
           <a:lstStyle/>
-          <a:p/>
+          <a:p>
+            <a:endParaRPr/>
+          </a:p>
         </p:txBody>
       </p:sp>
       <p:sp>
@@ -9721,7 +9960,9 @@
             <a:spAutoFit/>
           </a:bodyPr>
           <a:lstStyle/>
-          <a:p/>
+          <a:p>
+            <a:endParaRPr/>
+          </a:p>
         </p:txBody>
       </p:sp>
       <p:sp>
@@ -9744,7 +9985,7 @@
           </a:ln>
         </p:spPr>
         <p:txBody>
-          <a:bodyPr wrap="square" lIns="50000" rIns="50000" tIns="50000" bIns="50000">
+          <a:bodyPr wrap="square" lIns="50000" tIns="50000" rIns="50000" bIns="50000">
             <a:spAutoFit/>
           </a:bodyPr>
           <a:lstStyle/>
@@ -9782,7 +10023,7 @@
           </a:ln>
         </p:spPr>
         <p:txBody>
-          <a:bodyPr wrap="square" lIns="50000" rIns="50000" tIns="50000" bIns="50000">
+          <a:bodyPr wrap="square" lIns="50000" tIns="50000" rIns="50000" bIns="50000">
             <a:spAutoFit/>
           </a:bodyPr>
           <a:lstStyle/>
@@ -9826,7 +10067,9 @@
             <a:spAutoFit/>
           </a:bodyPr>
           <a:lstStyle/>
-          <a:p/>
+          <a:p>
+            <a:endParaRPr/>
+          </a:p>
         </p:txBody>
       </p:sp>
       <p:sp>
@@ -9849,14 +10092,14 @@
           </a:ln>
         </p:spPr>
         <p:txBody>
-          <a:bodyPr wrap="square" lIns="50000" rIns="50000" tIns="50000" bIns="50000">
+          <a:bodyPr wrap="square" lIns="50000" tIns="50000" rIns="50000" bIns="50000">
             <a:spAutoFit/>
           </a:bodyPr>
           <a:lstStyle/>
           <a:p>
             <a:pPr algn="l"/>
             <a:r>
-              <a:rPr sz="1050" b="0" i="0">
+              <a:rPr sz="1050" b="0" i="0" dirty="0" err="1">
                 <a:solidFill>
                   <a:srgbClr val="2D2D2D"/>
                 </a:solidFill>
@@ -9864,6 +10107,12 @@
               </a:rPr>
               <a:t>archive_to_fileserver</a:t>
             </a:r>
+            <a:endParaRPr sz="1050" b="0" i="0" dirty="0">
+              <a:solidFill>
+                <a:srgbClr val="2D2D2D"/>
+              </a:solidFill>
+              <a:latin typeface="Calibri"/>
+            </a:endParaRPr>
           </a:p>
         </p:txBody>
       </p:sp>
@@ -9893,7 +10142,9 @@
             <a:spAutoFit/>
           </a:bodyPr>
           <a:lstStyle/>
-          <a:p/>
+          <a:p>
+            <a:endParaRPr/>
+          </a:p>
         </p:txBody>
       </p:sp>
       <p:sp>
@@ -9916,7 +10167,7 @@
           </a:ln>
         </p:spPr>
         <p:txBody>
-          <a:bodyPr wrap="square" lIns="50000" rIns="50000" tIns="50000" bIns="50000">
+          <a:bodyPr wrap="square" lIns="50000" tIns="50000" rIns="50000" bIns="50000">
             <a:spAutoFit/>
           </a:bodyPr>
           <a:lstStyle/>
@@ -9960,7 +10211,9 @@
             <a:spAutoFit/>
           </a:bodyPr>
           <a:lstStyle/>
-          <a:p/>
+          <a:p>
+            <a:endParaRPr/>
+          </a:p>
         </p:txBody>
       </p:sp>
       <p:sp>
@@ -9983,7 +10236,7 @@
           </a:ln>
         </p:spPr>
         <p:txBody>
-          <a:bodyPr wrap="square" lIns="50000" rIns="50000" tIns="50000" bIns="50000">
+          <a:bodyPr wrap="square" lIns="50000" tIns="50000" rIns="50000" bIns="50000">
             <a:spAutoFit/>
           </a:bodyPr>
           <a:lstStyle/>
@@ -10027,7 +10280,9 @@
             <a:spAutoFit/>
           </a:bodyPr>
           <a:lstStyle/>
-          <a:p/>
+          <a:p>
+            <a:endParaRPr/>
+          </a:p>
         </p:txBody>
       </p:sp>
       <p:sp>
@@ -10050,7 +10305,7 @@
           </a:ln>
         </p:spPr>
         <p:txBody>
-          <a:bodyPr wrap="square" lIns="50000" rIns="50000" tIns="50000" bIns="50000">
+          <a:bodyPr wrap="square" lIns="50000" tIns="50000" rIns="50000" bIns="50000">
             <a:spAutoFit/>
           </a:bodyPr>
           <a:lstStyle/>
@@ -10077,7 +10332,7 @@
 </file>
 
 <file path=ppt/slides/slide5.xml><?xml version="1.0" encoding="utf-8"?>
-<p:sld xmlns:a="http://schemas.openxmlformats.org/drawingml/2006/main" xmlns:p="http://schemas.openxmlformats.org/presentationml/2006/main" xmlns:r="http://schemas.openxmlformats.org/officeDocument/2006/relationships">
+<p:sld xmlns:a="http://schemas.openxmlformats.org/drawingml/2006/main" xmlns:r="http://schemas.openxmlformats.org/officeDocument/2006/relationships" xmlns:p="http://schemas.openxmlformats.org/presentationml/2006/main">
   <p:cSld>
     <p:spTree>
       <p:nvGrpSpPr>
@@ -10085,7 +10340,14 @@
         <p:cNvGrpSpPr/>
         <p:nvPr/>
       </p:nvGrpSpPr>
-      <p:grpSpPr/>
+      <p:grpSpPr>
+        <a:xfrm>
+          <a:off x="0" y="0"/>
+          <a:ext cx="0" cy="0"/>
+          <a:chOff x="0" y="0"/>
+          <a:chExt cx="0" cy="0"/>
+        </a:xfrm>
+      </p:grpSpPr>
       <p:sp>
         <p:nvSpPr>
           <p:cNvPr id="2" name="TextBox 1"/>
@@ -10112,7 +10374,9 @@
             <a:spAutoFit/>
           </a:bodyPr>
           <a:lstStyle/>
-          <a:p/>
+          <a:p>
+            <a:endParaRPr/>
+          </a:p>
         </p:txBody>
       </p:sp>
       <p:sp>
@@ -10141,7 +10405,9 @@
             <a:spAutoFit/>
           </a:bodyPr>
           <a:lstStyle/>
-          <a:p/>
+          <a:p>
+            <a:endParaRPr/>
+          </a:p>
         </p:txBody>
       </p:sp>
       <p:sp>
@@ -10164,7 +10430,7 @@
           </a:ln>
         </p:spPr>
         <p:txBody>
-          <a:bodyPr wrap="square" lIns="50000" rIns="50000" tIns="50000" bIns="50000">
+          <a:bodyPr wrap="square" lIns="50000" tIns="50000" rIns="50000" bIns="50000">
             <a:spAutoFit/>
           </a:bodyPr>
           <a:lstStyle/>
@@ -10202,7 +10468,7 @@
           </a:ln>
         </p:spPr>
         <p:txBody>
-          <a:bodyPr wrap="square" lIns="50000" rIns="50000" tIns="50000" bIns="50000">
+          <a:bodyPr wrap="square" lIns="50000" tIns="50000" rIns="50000" bIns="50000">
             <a:spAutoFit/>
           </a:bodyPr>
           <a:lstStyle/>
@@ -10240,7 +10506,7 @@
           </a:ln>
         </p:spPr>
         <p:txBody>
-          <a:bodyPr wrap="square" lIns="50000" rIns="50000" tIns="50000" bIns="50000">
+          <a:bodyPr wrap="square" lIns="50000" tIns="50000" rIns="50000" bIns="50000">
             <a:spAutoFit/>
           </a:bodyPr>
           <a:lstStyle/>
@@ -10284,7 +10550,9 @@
             <a:spAutoFit/>
           </a:bodyPr>
           <a:lstStyle/>
-          <a:p/>
+          <a:p>
+            <a:endParaRPr/>
+          </a:p>
         </p:txBody>
       </p:sp>
       <p:sp>
@@ -10309,7 +10577,7 @@
           </a:ln>
         </p:spPr>
         <p:txBody>
-          <a:bodyPr wrap="square" lIns="50000" rIns="50000" tIns="50000" bIns="50000" anchor="ctr">
+          <a:bodyPr wrap="square" lIns="50000" tIns="50000" rIns="50000" bIns="50000" anchor="ctr">
             <a:spAutoFit/>
           </a:bodyPr>
           <a:lstStyle/>
@@ -10347,7 +10615,7 @@
           </a:ln>
         </p:spPr>
         <p:txBody>
-          <a:bodyPr wrap="square" lIns="50000" rIns="50000" tIns="50000" bIns="50000">
+          <a:bodyPr wrap="square" lIns="50000" tIns="50000" rIns="50000" bIns="50000">
             <a:spAutoFit/>
           </a:bodyPr>
           <a:lstStyle/>
@@ -10391,7 +10659,9 @@
             <a:spAutoFit/>
           </a:bodyPr>
           <a:lstStyle/>
-          <a:p/>
+          <a:p>
+            <a:endParaRPr/>
+          </a:p>
         </p:txBody>
       </p:sp>
       <p:sp>
@@ -10416,7 +10686,7 @@
           </a:ln>
         </p:spPr>
         <p:txBody>
-          <a:bodyPr wrap="square" lIns="50000" rIns="50000" tIns="50000" bIns="50000" anchor="ctr">
+          <a:bodyPr wrap="square" lIns="50000" tIns="50000" rIns="50000" bIns="50000" anchor="ctr">
             <a:spAutoFit/>
           </a:bodyPr>
           <a:lstStyle/>
@@ -10454,7 +10724,7 @@
           </a:ln>
         </p:spPr>
         <p:txBody>
-          <a:bodyPr wrap="square" lIns="50000" rIns="50000" tIns="50000" bIns="50000">
+          <a:bodyPr wrap="square" lIns="50000" tIns="50000" rIns="50000" bIns="50000">
             <a:spAutoFit/>
           </a:bodyPr>
           <a:lstStyle/>
@@ -10498,7 +10768,9 @@
             <a:spAutoFit/>
           </a:bodyPr>
           <a:lstStyle/>
-          <a:p/>
+          <a:p>
+            <a:endParaRPr/>
+          </a:p>
         </p:txBody>
       </p:sp>
       <p:sp>
@@ -10523,7 +10795,7 @@
           </a:ln>
         </p:spPr>
         <p:txBody>
-          <a:bodyPr wrap="square" lIns="50000" rIns="50000" tIns="50000" bIns="50000" anchor="ctr">
+          <a:bodyPr wrap="square" lIns="50000" tIns="50000" rIns="50000" bIns="50000" anchor="ctr">
             <a:spAutoFit/>
           </a:bodyPr>
           <a:lstStyle/>
@@ -10561,7 +10833,7 @@
           </a:ln>
         </p:spPr>
         <p:txBody>
-          <a:bodyPr wrap="square" lIns="50000" rIns="50000" tIns="50000" bIns="50000">
+          <a:bodyPr wrap="square" lIns="50000" tIns="50000" rIns="50000" bIns="50000">
             <a:spAutoFit/>
           </a:bodyPr>
           <a:lstStyle/>
@@ -10605,7 +10877,9 @@
             <a:spAutoFit/>
           </a:bodyPr>
           <a:lstStyle/>
-          <a:p/>
+          <a:p>
+            <a:endParaRPr/>
+          </a:p>
         </p:txBody>
       </p:sp>
       <p:sp>
@@ -10630,7 +10904,7 @@
           </a:ln>
         </p:spPr>
         <p:txBody>
-          <a:bodyPr wrap="square" lIns="50000" rIns="50000" tIns="50000" bIns="50000" anchor="ctr">
+          <a:bodyPr wrap="square" lIns="50000" tIns="50000" rIns="50000" bIns="50000" anchor="ctr">
             <a:spAutoFit/>
           </a:bodyPr>
           <a:lstStyle/>
@@ -10668,7 +10942,7 @@
           </a:ln>
         </p:spPr>
         <p:txBody>
-          <a:bodyPr wrap="square" lIns="50000" rIns="50000" tIns="50000" bIns="50000">
+          <a:bodyPr wrap="square" lIns="50000" tIns="50000" rIns="50000" bIns="50000">
             <a:spAutoFit/>
           </a:bodyPr>
           <a:lstStyle/>
@@ -10712,7 +10986,9 @@
             <a:spAutoFit/>
           </a:bodyPr>
           <a:lstStyle/>
-          <a:p/>
+          <a:p>
+            <a:endParaRPr/>
+          </a:p>
         </p:txBody>
       </p:sp>
       <p:sp>
@@ -10737,7 +11013,7 @@
           </a:ln>
         </p:spPr>
         <p:txBody>
-          <a:bodyPr wrap="square" lIns="50000" rIns="50000" tIns="50000" bIns="50000" anchor="ctr">
+          <a:bodyPr wrap="square" lIns="50000" tIns="50000" rIns="50000" bIns="50000" anchor="ctr">
             <a:spAutoFit/>
           </a:bodyPr>
           <a:lstStyle/>
@@ -10775,7 +11051,7 @@
           </a:ln>
         </p:spPr>
         <p:txBody>
-          <a:bodyPr wrap="square" lIns="50000" rIns="50000" tIns="50000" bIns="50000">
+          <a:bodyPr wrap="square" lIns="50000" tIns="50000" rIns="50000" bIns="50000">
             <a:spAutoFit/>
           </a:bodyPr>
           <a:lstStyle/>
@@ -10802,7 +11078,7 @@
 </file>
 
 <file path=ppt/slides/slide6.xml><?xml version="1.0" encoding="utf-8"?>
-<p:sld xmlns:a="http://schemas.openxmlformats.org/drawingml/2006/main" xmlns:p="http://schemas.openxmlformats.org/presentationml/2006/main" xmlns:r="http://schemas.openxmlformats.org/officeDocument/2006/relationships">
+<p:sld xmlns:a="http://schemas.openxmlformats.org/drawingml/2006/main" xmlns:r="http://schemas.openxmlformats.org/officeDocument/2006/relationships" xmlns:p="http://schemas.openxmlformats.org/presentationml/2006/main">
   <p:cSld>
     <p:spTree>
       <p:nvGrpSpPr>
@@ -10810,7 +11086,14 @@
         <p:cNvGrpSpPr/>
         <p:nvPr/>
       </p:nvGrpSpPr>
-      <p:grpSpPr/>
+      <p:grpSpPr>
+        <a:xfrm>
+          <a:off x="0" y="0"/>
+          <a:ext cx="0" cy="0"/>
+          <a:chOff x="0" y="0"/>
+          <a:chExt cx="0" cy="0"/>
+        </a:xfrm>
+      </p:grpSpPr>
       <p:sp>
         <p:nvSpPr>
           <p:cNvPr id="2" name="TextBox 1"/>
@@ -10837,7 +11120,9 @@
             <a:spAutoFit/>
           </a:bodyPr>
           <a:lstStyle/>
-          <a:p/>
+          <a:p>
+            <a:endParaRPr/>
+          </a:p>
         </p:txBody>
       </p:sp>
       <p:sp>
@@ -10866,7 +11151,9 @@
             <a:spAutoFit/>
           </a:bodyPr>
           <a:lstStyle/>
-          <a:p/>
+          <a:p>
+            <a:endParaRPr/>
+          </a:p>
         </p:txBody>
       </p:sp>
       <p:sp>
@@ -10895,7 +11182,9 @@
             <a:spAutoFit/>
           </a:bodyPr>
           <a:lstStyle/>
-          <a:p/>
+          <a:p>
+            <a:endParaRPr/>
+          </a:p>
         </p:txBody>
       </p:sp>
       <p:sp>
@@ -10918,7 +11207,7 @@
           </a:ln>
         </p:spPr>
         <p:txBody>
-          <a:bodyPr wrap="square" lIns="50000" rIns="50000" tIns="50000" bIns="50000">
+          <a:bodyPr wrap="square" lIns="50000" tIns="50000" rIns="50000" bIns="50000">
             <a:spAutoFit/>
           </a:bodyPr>
           <a:lstStyle/>
@@ -10956,7 +11245,7 @@
           </a:ln>
         </p:spPr>
         <p:txBody>
-          <a:bodyPr wrap="square" lIns="50000" rIns="50000" tIns="50000" bIns="50000">
+          <a:bodyPr wrap="square" lIns="50000" tIns="50000" rIns="50000" bIns="50000">
             <a:spAutoFit/>
           </a:bodyPr>
           <a:lstStyle/>
@@ -11002,7 +11291,9 @@
             <a:spAutoFit/>
           </a:bodyPr>
           <a:lstStyle/>
-          <a:p/>
+          <a:p>
+            <a:endParaRPr/>
+          </a:p>
         </p:txBody>
       </p:sp>
       <p:sp>
@@ -11025,7 +11316,7 @@
           </a:ln>
         </p:spPr>
         <p:txBody>
-          <a:bodyPr wrap="square" lIns="50000" rIns="50000" tIns="50000" bIns="50000" anchor="ctr">
+          <a:bodyPr wrap="square" lIns="50000" tIns="50000" rIns="50000" bIns="50000" anchor="ctr">
             <a:spAutoFit/>
           </a:bodyPr>
           <a:lstStyle/>
@@ -11065,7 +11356,7 @@
           </a:ln>
         </p:spPr>
         <p:txBody>
-          <a:bodyPr wrap="square" lIns="50000" rIns="50000" tIns="50000" bIns="50000" anchor="ctr">
+          <a:bodyPr wrap="square" lIns="50000" tIns="50000" rIns="50000" bIns="50000" anchor="ctr">
             <a:spAutoFit/>
           </a:bodyPr>
           <a:lstStyle/>
@@ -11103,7 +11394,7 @@
           </a:ln>
         </p:spPr>
         <p:txBody>
-          <a:bodyPr wrap="square" lIns="50000" rIns="50000" tIns="50000" bIns="50000">
+          <a:bodyPr wrap="square" lIns="50000" tIns="50000" rIns="50000" bIns="50000">
             <a:spAutoFit/>
           </a:bodyPr>
           <a:lstStyle/>
@@ -11141,7 +11432,7 @@
           </a:ln>
         </p:spPr>
         <p:txBody>
-          <a:bodyPr wrap="square" lIns="50000" rIns="50000" tIns="50000" bIns="50000">
+          <a:bodyPr wrap="square" lIns="50000" tIns="50000" rIns="50000" bIns="50000">
             <a:spAutoFit/>
           </a:bodyPr>
           <a:lstStyle/>
@@ -11187,7 +11478,9 @@
             <a:spAutoFit/>
           </a:bodyPr>
           <a:lstStyle/>
-          <a:p/>
+          <a:p>
+            <a:endParaRPr/>
+          </a:p>
         </p:txBody>
       </p:sp>
       <p:sp>
@@ -11210,7 +11503,7 @@
           </a:ln>
         </p:spPr>
         <p:txBody>
-          <a:bodyPr wrap="square" lIns="50000" rIns="50000" tIns="50000" bIns="50000">
+          <a:bodyPr wrap="square" lIns="50000" tIns="50000" rIns="50000" bIns="50000">
             <a:spAutoFit/>
           </a:bodyPr>
           <a:lstStyle/>
@@ -11254,7 +11547,9 @@
             <a:spAutoFit/>
           </a:bodyPr>
           <a:lstStyle/>
-          <a:p/>
+          <a:p>
+            <a:endParaRPr/>
+          </a:p>
         </p:txBody>
       </p:sp>
       <p:sp>
@@ -11279,7 +11574,7 @@
           </a:ln>
         </p:spPr>
         <p:txBody>
-          <a:bodyPr wrap="square" lIns="50000" rIns="50000" tIns="50000" bIns="50000" anchor="ctr">
+          <a:bodyPr wrap="square" lIns="50000" tIns="50000" rIns="50000" bIns="50000" anchor="ctr">
             <a:spAutoFit/>
           </a:bodyPr>
           <a:lstStyle/>
@@ -11317,7 +11612,7 @@
           </a:ln>
         </p:spPr>
         <p:txBody>
-          <a:bodyPr wrap="square" lIns="50000" rIns="50000" tIns="50000" bIns="50000">
+          <a:bodyPr wrap="square" lIns="50000" tIns="50000" rIns="50000" bIns="50000">
             <a:spAutoFit/>
           </a:bodyPr>
           <a:lstStyle/>
@@ -11355,7 +11650,7 @@
           </a:ln>
         </p:spPr>
         <p:txBody>
-          <a:bodyPr wrap="square" lIns="50000" rIns="50000" tIns="50000" bIns="50000">
+          <a:bodyPr wrap="square" lIns="50000" tIns="50000" rIns="50000" bIns="50000">
             <a:spAutoFit/>
           </a:bodyPr>
           <a:lstStyle/>
@@ -11401,7 +11696,9 @@
             <a:spAutoFit/>
           </a:bodyPr>
           <a:lstStyle/>
-          <a:p/>
+          <a:p>
+            <a:endParaRPr/>
+          </a:p>
         </p:txBody>
       </p:sp>
       <p:sp>
@@ -11424,7 +11721,7 @@
           </a:ln>
         </p:spPr>
         <p:txBody>
-          <a:bodyPr wrap="square" lIns="50000" rIns="50000" tIns="50000" bIns="50000">
+          <a:bodyPr wrap="square" lIns="50000" tIns="50000" rIns="50000" bIns="50000">
             <a:spAutoFit/>
           </a:bodyPr>
           <a:lstStyle/>
@@ -11468,7 +11765,9 @@
             <a:spAutoFit/>
           </a:bodyPr>
           <a:lstStyle/>
-          <a:p/>
+          <a:p>
+            <a:endParaRPr/>
+          </a:p>
         </p:txBody>
       </p:sp>
       <p:sp>
@@ -11493,7 +11792,7 @@
           </a:ln>
         </p:spPr>
         <p:txBody>
-          <a:bodyPr wrap="square" lIns="50000" rIns="50000" tIns="50000" bIns="50000" anchor="ctr">
+          <a:bodyPr wrap="square" lIns="50000" tIns="50000" rIns="50000" bIns="50000" anchor="ctr">
             <a:spAutoFit/>
           </a:bodyPr>
           <a:lstStyle/>
@@ -11531,7 +11830,7 @@
           </a:ln>
         </p:spPr>
         <p:txBody>
-          <a:bodyPr wrap="square" lIns="50000" rIns="50000" tIns="50000" bIns="50000">
+          <a:bodyPr wrap="square" lIns="50000" tIns="50000" rIns="50000" bIns="50000">
             <a:spAutoFit/>
           </a:bodyPr>
           <a:lstStyle/>
@@ -11569,7 +11868,7 @@
           </a:ln>
         </p:spPr>
         <p:txBody>
-          <a:bodyPr wrap="square" lIns="50000" rIns="50000" tIns="50000" bIns="50000">
+          <a:bodyPr wrap="square" lIns="50000" tIns="50000" rIns="50000" bIns="50000">
             <a:spAutoFit/>
           </a:bodyPr>
           <a:lstStyle/>
@@ -11613,7 +11912,9 @@
             <a:spAutoFit/>
           </a:bodyPr>
           <a:lstStyle/>
-          <a:p/>
+          <a:p>
+            <a:endParaRPr/>
+          </a:p>
         </p:txBody>
       </p:sp>
       <p:sp>
@@ -11636,7 +11937,7 @@
           </a:ln>
         </p:spPr>
         <p:txBody>
-          <a:bodyPr wrap="square" lIns="50000" rIns="50000" tIns="50000" bIns="50000">
+          <a:bodyPr wrap="square" lIns="50000" tIns="50000" rIns="50000" bIns="50000">
             <a:spAutoFit/>
           </a:bodyPr>
           <a:lstStyle/>
@@ -11674,7 +11975,7 @@
           </a:ln>
         </p:spPr>
         <p:txBody>
-          <a:bodyPr wrap="square" lIns="50000" rIns="50000" tIns="50000" bIns="50000">
+          <a:bodyPr wrap="square" lIns="50000" tIns="50000" rIns="50000" bIns="50000">
             <a:spAutoFit/>
           </a:bodyPr>
           <a:lstStyle/>
@@ -11712,7 +12013,7 @@
           </a:ln>
         </p:spPr>
         <p:txBody>
-          <a:bodyPr wrap="square" lIns="50000" rIns="50000" tIns="50000" bIns="50000">
+          <a:bodyPr wrap="square" lIns="50000" tIns="50000" rIns="50000" bIns="50000">
             <a:spAutoFit/>
           </a:bodyPr>
           <a:lstStyle/>
@@ -11750,7 +12051,7 @@
           </a:ln>
         </p:spPr>
         <p:txBody>
-          <a:bodyPr wrap="square" lIns="50000" rIns="50000" tIns="50000" bIns="50000">
+          <a:bodyPr wrap="square" lIns="50000" tIns="50000" rIns="50000" bIns="50000">
             <a:spAutoFit/>
           </a:bodyPr>
           <a:lstStyle/>
@@ -11788,7 +12089,7 @@
           </a:ln>
         </p:spPr>
         <p:txBody>
-          <a:bodyPr wrap="square" lIns="50000" rIns="50000" tIns="50000" bIns="50000">
+          <a:bodyPr wrap="square" lIns="50000" tIns="50000" rIns="50000" bIns="50000">
             <a:spAutoFit/>
           </a:bodyPr>
           <a:lstStyle/>
@@ -11815,7 +12116,7 @@
 </file>
 
 <file path=ppt/slides/slide7.xml><?xml version="1.0" encoding="utf-8"?>
-<p:sld xmlns:a="http://schemas.openxmlformats.org/drawingml/2006/main" xmlns:p="http://schemas.openxmlformats.org/presentationml/2006/main" xmlns:r="http://schemas.openxmlformats.org/officeDocument/2006/relationships">
+<p:sld xmlns:a="http://schemas.openxmlformats.org/drawingml/2006/main" xmlns:r="http://schemas.openxmlformats.org/officeDocument/2006/relationships" xmlns:p="http://schemas.openxmlformats.org/presentationml/2006/main">
   <p:cSld>
     <p:spTree>
       <p:nvGrpSpPr>
@@ -11823,7 +12124,14 @@
         <p:cNvGrpSpPr/>
         <p:nvPr/>
       </p:nvGrpSpPr>
-      <p:grpSpPr/>
+      <p:grpSpPr>
+        <a:xfrm>
+          <a:off x="0" y="0"/>
+          <a:ext cx="0" cy="0"/>
+          <a:chOff x="0" y="0"/>
+          <a:chExt cx="0" cy="0"/>
+        </a:xfrm>
+      </p:grpSpPr>
       <p:sp>
         <p:nvSpPr>
           <p:cNvPr id="2" name="TextBox 1"/>
@@ -11850,7 +12158,9 @@
             <a:spAutoFit/>
           </a:bodyPr>
           <a:lstStyle/>
-          <a:p/>
+          <a:p>
+            <a:endParaRPr/>
+          </a:p>
         </p:txBody>
       </p:sp>
       <p:sp>
@@ -11879,7 +12189,9 @@
             <a:spAutoFit/>
           </a:bodyPr>
           <a:lstStyle/>
-          <a:p/>
+          <a:p>
+            <a:endParaRPr/>
+          </a:p>
         </p:txBody>
       </p:sp>
       <p:sp>
@@ -11908,7 +12220,9 @@
             <a:spAutoFit/>
           </a:bodyPr>
           <a:lstStyle/>
-          <a:p/>
+          <a:p>
+            <a:endParaRPr/>
+          </a:p>
         </p:txBody>
       </p:sp>
       <p:sp>
@@ -11931,7 +12245,7 @@
           </a:ln>
         </p:spPr>
         <p:txBody>
-          <a:bodyPr wrap="square" lIns="50000" rIns="50000" tIns="50000" bIns="50000">
+          <a:bodyPr wrap="square" lIns="50000" tIns="50000" rIns="50000" bIns="50000">
             <a:spAutoFit/>
           </a:bodyPr>
           <a:lstStyle/>
@@ -11969,7 +12283,7 @@
           </a:ln>
         </p:spPr>
         <p:txBody>
-          <a:bodyPr wrap="square" lIns="50000" rIns="50000" tIns="50000" bIns="50000">
+          <a:bodyPr wrap="square" lIns="50000" tIns="50000" rIns="50000" bIns="50000">
             <a:spAutoFit/>
           </a:bodyPr>
           <a:lstStyle/>
@@ -12015,7 +12329,9 @@
             <a:spAutoFit/>
           </a:bodyPr>
           <a:lstStyle/>
-          <a:p/>
+          <a:p>
+            <a:endParaRPr/>
+          </a:p>
         </p:txBody>
       </p:sp>
       <p:sp>
@@ -12038,7 +12354,7 @@
           </a:ln>
         </p:spPr>
         <p:txBody>
-          <a:bodyPr wrap="square" lIns="50000" rIns="50000" tIns="50000" bIns="50000" anchor="ctr">
+          <a:bodyPr wrap="square" lIns="50000" tIns="50000" rIns="50000" bIns="50000" anchor="ctr">
             <a:spAutoFit/>
           </a:bodyPr>
           <a:lstStyle/>
@@ -12078,7 +12394,7 @@
           </a:ln>
         </p:spPr>
         <p:txBody>
-          <a:bodyPr wrap="square" lIns="50000" rIns="50000" tIns="50000" bIns="50000" anchor="ctr">
+          <a:bodyPr wrap="square" lIns="50000" tIns="50000" rIns="50000" bIns="50000" anchor="ctr">
             <a:spAutoFit/>
           </a:bodyPr>
           <a:lstStyle/>
@@ -12116,7 +12432,7 @@
           </a:ln>
         </p:spPr>
         <p:txBody>
-          <a:bodyPr wrap="square" lIns="50000" rIns="50000" tIns="50000" bIns="50000">
+          <a:bodyPr wrap="square" lIns="50000" tIns="50000" rIns="50000" bIns="50000">
             <a:spAutoFit/>
           </a:bodyPr>
           <a:lstStyle/>
@@ -12154,7 +12470,7 @@
           </a:ln>
         </p:spPr>
         <p:txBody>
-          <a:bodyPr wrap="square" lIns="50000" rIns="50000" tIns="50000" bIns="50000">
+          <a:bodyPr wrap="square" lIns="50000" tIns="50000" rIns="50000" bIns="50000">
             <a:spAutoFit/>
           </a:bodyPr>
           <a:lstStyle/>
@@ -12200,7 +12516,9 @@
             <a:spAutoFit/>
           </a:bodyPr>
           <a:lstStyle/>
-          <a:p/>
+          <a:p>
+            <a:endParaRPr/>
+          </a:p>
         </p:txBody>
       </p:sp>
       <p:sp>
@@ -12223,7 +12541,7 @@
           </a:ln>
         </p:spPr>
         <p:txBody>
-          <a:bodyPr wrap="square" lIns="50000" rIns="50000" tIns="50000" bIns="50000">
+          <a:bodyPr wrap="square" lIns="50000" tIns="50000" rIns="50000" bIns="50000">
             <a:spAutoFit/>
           </a:bodyPr>
           <a:lstStyle/>
@@ -12267,7 +12585,9 @@
             <a:spAutoFit/>
           </a:bodyPr>
           <a:lstStyle/>
-          <a:p/>
+          <a:p>
+            <a:endParaRPr/>
+          </a:p>
         </p:txBody>
       </p:sp>
       <p:sp>
@@ -12292,7 +12612,7 @@
           </a:ln>
         </p:spPr>
         <p:txBody>
-          <a:bodyPr wrap="square" lIns="50000" rIns="50000" tIns="50000" bIns="50000" anchor="ctr">
+          <a:bodyPr wrap="square" lIns="50000" tIns="50000" rIns="50000" bIns="50000" anchor="ctr">
             <a:spAutoFit/>
           </a:bodyPr>
           <a:lstStyle/>
@@ -12330,7 +12650,7 @@
           </a:ln>
         </p:spPr>
         <p:txBody>
-          <a:bodyPr wrap="square" lIns="50000" rIns="50000" tIns="50000" bIns="50000">
+          <a:bodyPr wrap="square" lIns="50000" tIns="50000" rIns="50000" bIns="50000">
             <a:spAutoFit/>
           </a:bodyPr>
           <a:lstStyle/>
@@ -12368,7 +12688,7 @@
           </a:ln>
         </p:spPr>
         <p:txBody>
-          <a:bodyPr wrap="square" lIns="50000" rIns="50000" tIns="50000" bIns="50000">
+          <a:bodyPr wrap="square" lIns="50000" tIns="50000" rIns="50000" bIns="50000">
             <a:spAutoFit/>
           </a:bodyPr>
           <a:lstStyle/>
@@ -12414,7 +12734,9 @@
             <a:spAutoFit/>
           </a:bodyPr>
           <a:lstStyle/>
-          <a:p/>
+          <a:p>
+            <a:endParaRPr/>
+          </a:p>
         </p:txBody>
       </p:sp>
       <p:sp>
@@ -12437,7 +12759,7 @@
           </a:ln>
         </p:spPr>
         <p:txBody>
-          <a:bodyPr wrap="square" lIns="50000" rIns="50000" tIns="50000" bIns="50000">
+          <a:bodyPr wrap="square" lIns="50000" tIns="50000" rIns="50000" bIns="50000">
             <a:spAutoFit/>
           </a:bodyPr>
           <a:lstStyle/>
@@ -12481,7 +12803,9 @@
             <a:spAutoFit/>
           </a:bodyPr>
           <a:lstStyle/>
-          <a:p/>
+          <a:p>
+            <a:endParaRPr/>
+          </a:p>
         </p:txBody>
       </p:sp>
       <p:sp>
@@ -12506,7 +12830,7 @@
           </a:ln>
         </p:spPr>
         <p:txBody>
-          <a:bodyPr wrap="square" lIns="50000" rIns="50000" tIns="50000" bIns="50000" anchor="ctr">
+          <a:bodyPr wrap="square" lIns="50000" tIns="50000" rIns="50000" bIns="50000" anchor="ctr">
             <a:spAutoFit/>
           </a:bodyPr>
           <a:lstStyle/>
@@ -12544,7 +12868,7 @@
           </a:ln>
         </p:spPr>
         <p:txBody>
-          <a:bodyPr wrap="square" lIns="50000" rIns="50000" tIns="50000" bIns="50000">
+          <a:bodyPr wrap="square" lIns="50000" tIns="50000" rIns="50000" bIns="50000">
             <a:spAutoFit/>
           </a:bodyPr>
           <a:lstStyle/>
@@ -12582,7 +12906,7 @@
           </a:ln>
         </p:spPr>
         <p:txBody>
-          <a:bodyPr wrap="square" lIns="50000" rIns="50000" tIns="50000" bIns="50000">
+          <a:bodyPr wrap="square" lIns="50000" tIns="50000" rIns="50000" bIns="50000">
             <a:spAutoFit/>
           </a:bodyPr>
           <a:lstStyle/>
@@ -12628,7 +12952,9 @@
             <a:spAutoFit/>
           </a:bodyPr>
           <a:lstStyle/>
-          <a:p/>
+          <a:p>
+            <a:endParaRPr/>
+          </a:p>
         </p:txBody>
       </p:sp>
       <p:sp>
@@ -12651,7 +12977,7 @@
           </a:ln>
         </p:spPr>
         <p:txBody>
-          <a:bodyPr wrap="square" lIns="50000" rIns="50000" tIns="50000" bIns="50000">
+          <a:bodyPr wrap="square" lIns="50000" tIns="50000" rIns="50000" bIns="50000">
             <a:spAutoFit/>
           </a:bodyPr>
           <a:lstStyle/>
@@ -12695,7 +13021,9 @@
             <a:spAutoFit/>
           </a:bodyPr>
           <a:lstStyle/>
-          <a:p/>
+          <a:p>
+            <a:endParaRPr/>
+          </a:p>
         </p:txBody>
       </p:sp>
       <p:sp>
@@ -12718,7 +13046,7 @@
           </a:ln>
         </p:spPr>
         <p:txBody>
-          <a:bodyPr wrap="square" lIns="50000" rIns="50000" tIns="50000" bIns="50000">
+          <a:bodyPr wrap="square" lIns="50000" tIns="50000" rIns="50000" bIns="50000">
             <a:spAutoFit/>
           </a:bodyPr>
           <a:lstStyle/>
@@ -12756,7 +13084,7 @@
           </a:ln>
         </p:spPr>
         <p:txBody>
-          <a:bodyPr wrap="square" lIns="50000" rIns="50000" tIns="50000" bIns="50000">
+          <a:bodyPr wrap="square" lIns="50000" tIns="50000" rIns="50000" bIns="50000">
             <a:spAutoFit/>
           </a:bodyPr>
           <a:lstStyle/>
@@ -12794,7 +13122,7 @@
           </a:ln>
         </p:spPr>
         <p:txBody>
-          <a:bodyPr wrap="square" lIns="50000" rIns="50000" tIns="50000" bIns="50000">
+          <a:bodyPr wrap="square" lIns="50000" tIns="50000" rIns="50000" bIns="50000">
             <a:spAutoFit/>
           </a:bodyPr>
           <a:lstStyle/>
@@ -12832,7 +13160,7 @@
           </a:ln>
         </p:spPr>
         <p:txBody>
-          <a:bodyPr wrap="square" lIns="50000" rIns="50000" tIns="50000" bIns="50000">
+          <a:bodyPr wrap="square" lIns="50000" tIns="50000" rIns="50000" bIns="50000">
             <a:spAutoFit/>
           </a:bodyPr>
           <a:lstStyle/>
@@ -12870,7 +13198,7 @@
           </a:ln>
         </p:spPr>
         <p:txBody>
-          <a:bodyPr wrap="square" lIns="50000" rIns="50000" tIns="50000" bIns="50000">
+          <a:bodyPr wrap="square" lIns="50000" tIns="50000" rIns="50000" bIns="50000">
             <a:spAutoFit/>
           </a:bodyPr>
           <a:lstStyle/>
@@ -12908,7 +13236,7 @@
           </a:ln>
         </p:spPr>
         <p:txBody>
-          <a:bodyPr wrap="square" lIns="50000" rIns="50000" tIns="50000" bIns="50000">
+          <a:bodyPr wrap="square" lIns="50000" tIns="50000" rIns="50000" bIns="50000">
             <a:spAutoFit/>
           </a:bodyPr>
           <a:lstStyle/>
@@ -12946,7 +13274,7 @@
           </a:ln>
         </p:spPr>
         <p:txBody>
-          <a:bodyPr wrap="square" lIns="50000" rIns="50000" tIns="50000" bIns="50000">
+          <a:bodyPr wrap="square" lIns="50000" tIns="50000" rIns="50000" bIns="50000">
             <a:spAutoFit/>
           </a:bodyPr>
           <a:lstStyle/>
@@ -12984,7 +13312,7 @@
           </a:ln>
         </p:spPr>
         <p:txBody>
-          <a:bodyPr wrap="square" lIns="50000" rIns="50000" tIns="50000" bIns="50000">
+          <a:bodyPr wrap="square" lIns="50000" tIns="50000" rIns="50000" bIns="50000">
             <a:spAutoFit/>
           </a:bodyPr>
           <a:lstStyle/>
@@ -13022,7 +13350,7 @@
           </a:ln>
         </p:spPr>
         <p:txBody>
-          <a:bodyPr wrap="square" lIns="50000" rIns="50000" tIns="50000" bIns="50000">
+          <a:bodyPr wrap="square" lIns="50000" tIns="50000" rIns="50000" bIns="50000">
             <a:spAutoFit/>
           </a:bodyPr>
           <a:lstStyle/>
@@ -13060,7 +13388,7 @@
           </a:ln>
         </p:spPr>
         <p:txBody>
-          <a:bodyPr wrap="square" lIns="50000" rIns="50000" tIns="50000" bIns="50000">
+          <a:bodyPr wrap="square" lIns="50000" tIns="50000" rIns="50000" bIns="50000">
             <a:spAutoFit/>
           </a:bodyPr>
           <a:lstStyle/>
@@ -13098,7 +13426,7 @@
           </a:ln>
         </p:spPr>
         <p:txBody>
-          <a:bodyPr wrap="square" lIns="50000" rIns="50000" tIns="50000" bIns="50000">
+          <a:bodyPr wrap="square" lIns="50000" tIns="50000" rIns="50000" bIns="50000">
             <a:spAutoFit/>
           </a:bodyPr>
           <a:lstStyle/>
@@ -13125,7 +13453,7 @@
 </file>
 
 <file path=ppt/slides/slide8.xml><?xml version="1.0" encoding="utf-8"?>
-<p:sld xmlns:a="http://schemas.openxmlformats.org/drawingml/2006/main" xmlns:p="http://schemas.openxmlformats.org/presentationml/2006/main" xmlns:r="http://schemas.openxmlformats.org/officeDocument/2006/relationships">
+<p:sld xmlns:a="http://schemas.openxmlformats.org/drawingml/2006/main" xmlns:r="http://schemas.openxmlformats.org/officeDocument/2006/relationships" xmlns:p="http://schemas.openxmlformats.org/presentationml/2006/main">
   <p:cSld>
     <p:spTree>
       <p:nvGrpSpPr>
@@ -13133,7 +13461,14 @@
         <p:cNvGrpSpPr/>
         <p:nvPr/>
       </p:nvGrpSpPr>
-      <p:grpSpPr/>
+      <p:grpSpPr>
+        <a:xfrm>
+          <a:off x="0" y="0"/>
+          <a:ext cx="0" cy="0"/>
+          <a:chOff x="0" y="0"/>
+          <a:chExt cx="0" cy="0"/>
+        </a:xfrm>
+      </p:grpSpPr>
       <p:sp>
         <p:nvSpPr>
           <p:cNvPr id="2" name="TextBox 1"/>
@@ -13160,7 +13495,9 @@
             <a:spAutoFit/>
           </a:bodyPr>
           <a:lstStyle/>
-          <a:p/>
+          <a:p>
+            <a:endParaRPr/>
+          </a:p>
         </p:txBody>
       </p:sp>
       <p:sp>
@@ -13189,7 +13526,9 @@
             <a:spAutoFit/>
           </a:bodyPr>
           <a:lstStyle/>
-          <a:p/>
+          <a:p>
+            <a:endParaRPr/>
+          </a:p>
         </p:txBody>
       </p:sp>
       <p:sp>
@@ -13218,7 +13557,9 @@
             <a:spAutoFit/>
           </a:bodyPr>
           <a:lstStyle/>
-          <a:p/>
+          <a:p>
+            <a:endParaRPr/>
+          </a:p>
         </p:txBody>
       </p:sp>
       <p:sp>
@@ -13241,7 +13582,7 @@
           </a:ln>
         </p:spPr>
         <p:txBody>
-          <a:bodyPr wrap="square" lIns="50000" rIns="50000" tIns="50000" bIns="50000">
+          <a:bodyPr wrap="square" lIns="50000" tIns="50000" rIns="50000" bIns="50000">
             <a:spAutoFit/>
           </a:bodyPr>
           <a:lstStyle/>
@@ -13279,7 +13620,7 @@
           </a:ln>
         </p:spPr>
         <p:txBody>
-          <a:bodyPr wrap="square" lIns="50000" rIns="50000" tIns="50000" bIns="50000">
+          <a:bodyPr wrap="square" lIns="50000" tIns="50000" rIns="50000" bIns="50000">
             <a:spAutoFit/>
           </a:bodyPr>
           <a:lstStyle/>
@@ -13325,7 +13666,9 @@
             <a:spAutoFit/>
           </a:bodyPr>
           <a:lstStyle/>
-          <a:p/>
+          <a:p>
+            <a:endParaRPr/>
+          </a:p>
         </p:txBody>
       </p:sp>
       <p:sp>
@@ -13348,7 +13691,7 @@
           </a:ln>
         </p:spPr>
         <p:txBody>
-          <a:bodyPr wrap="square" lIns="50000" rIns="50000" tIns="50000" bIns="50000" anchor="ctr">
+          <a:bodyPr wrap="square" lIns="50000" tIns="50000" rIns="50000" bIns="50000" anchor="ctr">
             <a:spAutoFit/>
           </a:bodyPr>
           <a:lstStyle/>
@@ -13392,7 +13735,9 @@
             <a:spAutoFit/>
           </a:bodyPr>
           <a:lstStyle/>
-          <a:p/>
+          <a:p>
+            <a:endParaRPr/>
+          </a:p>
         </p:txBody>
       </p:sp>
       <p:sp>
@@ -13421,7 +13766,9 @@
             <a:spAutoFit/>
           </a:bodyPr>
           <a:lstStyle/>
-          <a:p/>
+          <a:p>
+            <a:endParaRPr/>
+          </a:p>
         </p:txBody>
       </p:sp>
       <p:sp>
@@ -13444,7 +13791,7 @@
           </a:ln>
         </p:spPr>
         <p:txBody>
-          <a:bodyPr wrap="square" lIns="50000" rIns="50000" tIns="50000" bIns="50000">
+          <a:bodyPr wrap="square" lIns="50000" tIns="50000" rIns="50000" bIns="50000">
             <a:spAutoFit/>
           </a:bodyPr>
           <a:lstStyle/>
@@ -13488,7 +13835,9 @@
             <a:spAutoFit/>
           </a:bodyPr>
           <a:lstStyle/>
-          <a:p/>
+          <a:p>
+            <a:endParaRPr/>
+          </a:p>
         </p:txBody>
       </p:sp>
       <p:sp>
@@ -13513,7 +13862,7 @@
           </a:ln>
         </p:spPr>
         <p:txBody>
-          <a:bodyPr wrap="square" lIns="50000" rIns="50000" tIns="50000" bIns="50000" anchor="ctr">
+          <a:bodyPr wrap="square" lIns="50000" tIns="50000" rIns="50000" bIns="50000" anchor="ctr">
             <a:spAutoFit/>
           </a:bodyPr>
           <a:lstStyle/>
@@ -13551,7 +13900,7 @@
           </a:ln>
         </p:spPr>
         <p:txBody>
-          <a:bodyPr wrap="square" lIns="50000" rIns="50000" tIns="50000" bIns="50000">
+          <a:bodyPr wrap="square" lIns="50000" tIns="50000" rIns="50000" bIns="50000">
             <a:spAutoFit/>
           </a:bodyPr>
           <a:lstStyle/>
@@ -13589,7 +13938,7 @@
           </a:ln>
         </p:spPr>
         <p:txBody>
-          <a:bodyPr wrap="square" lIns="50000" rIns="50000" tIns="50000" bIns="50000">
+          <a:bodyPr wrap="square" lIns="50000" tIns="50000" rIns="50000" bIns="50000">
             <a:spAutoFit/>
           </a:bodyPr>
           <a:lstStyle/>
@@ -13633,7 +13982,9 @@
             <a:spAutoFit/>
           </a:bodyPr>
           <a:lstStyle/>
-          <a:p/>
+          <a:p>
+            <a:endParaRPr/>
+          </a:p>
         </p:txBody>
       </p:sp>
       <p:sp>
@@ -13658,7 +14009,7 @@
           </a:ln>
         </p:spPr>
         <p:txBody>
-          <a:bodyPr wrap="square" lIns="50000" rIns="50000" tIns="50000" bIns="50000" anchor="ctr">
+          <a:bodyPr wrap="square" lIns="50000" tIns="50000" rIns="50000" bIns="50000" anchor="ctr">
             <a:spAutoFit/>
           </a:bodyPr>
           <a:lstStyle/>
@@ -13696,7 +14047,7 @@
           </a:ln>
         </p:spPr>
         <p:txBody>
-          <a:bodyPr wrap="square" lIns="50000" rIns="50000" tIns="50000" bIns="50000">
+          <a:bodyPr wrap="square" lIns="50000" tIns="50000" rIns="50000" bIns="50000">
             <a:spAutoFit/>
           </a:bodyPr>
           <a:lstStyle/>
@@ -13734,7 +14085,7 @@
           </a:ln>
         </p:spPr>
         <p:txBody>
-          <a:bodyPr wrap="square" lIns="50000" rIns="50000" tIns="50000" bIns="50000">
+          <a:bodyPr wrap="square" lIns="50000" tIns="50000" rIns="50000" bIns="50000">
             <a:spAutoFit/>
           </a:bodyPr>
           <a:lstStyle/>
@@ -13778,7 +14129,9 @@
             <a:spAutoFit/>
           </a:bodyPr>
           <a:lstStyle/>
-          <a:p/>
+          <a:p>
+            <a:endParaRPr/>
+          </a:p>
         </p:txBody>
       </p:sp>
       <p:sp>
@@ -13803,7 +14156,7 @@
           </a:ln>
         </p:spPr>
         <p:txBody>
-          <a:bodyPr wrap="square" lIns="50000" rIns="50000" tIns="50000" bIns="50000" anchor="ctr">
+          <a:bodyPr wrap="square" lIns="50000" tIns="50000" rIns="50000" bIns="50000" anchor="ctr">
             <a:spAutoFit/>
           </a:bodyPr>
           <a:lstStyle/>
@@ -13841,7 +14194,7 @@
           </a:ln>
         </p:spPr>
         <p:txBody>
-          <a:bodyPr wrap="square" lIns="50000" rIns="50000" tIns="50000" bIns="50000">
+          <a:bodyPr wrap="square" lIns="50000" tIns="50000" rIns="50000" bIns="50000">
             <a:spAutoFit/>
           </a:bodyPr>
           <a:lstStyle/>
@@ -13879,7 +14232,7 @@
           </a:ln>
         </p:spPr>
         <p:txBody>
-          <a:bodyPr wrap="square" lIns="50000" rIns="50000" tIns="50000" bIns="50000">
+          <a:bodyPr wrap="square" lIns="50000" tIns="50000" rIns="50000" bIns="50000">
             <a:spAutoFit/>
           </a:bodyPr>
           <a:lstStyle/>
@@ -13923,7 +14276,9 @@
             <a:spAutoFit/>
           </a:bodyPr>
           <a:lstStyle/>
-          <a:p/>
+          <a:p>
+            <a:endParaRPr/>
+          </a:p>
         </p:txBody>
       </p:sp>
       <p:sp>
@@ -13948,7 +14303,7 @@
           </a:ln>
         </p:spPr>
         <p:txBody>
-          <a:bodyPr wrap="square" lIns="50000" rIns="50000" tIns="50000" bIns="50000" anchor="ctr">
+          <a:bodyPr wrap="square" lIns="50000" tIns="50000" rIns="50000" bIns="50000" anchor="ctr">
             <a:spAutoFit/>
           </a:bodyPr>
           <a:lstStyle/>
@@ -13986,7 +14341,7 @@
           </a:ln>
         </p:spPr>
         <p:txBody>
-          <a:bodyPr wrap="square" lIns="50000" rIns="50000" tIns="50000" bIns="50000">
+          <a:bodyPr wrap="square" lIns="50000" tIns="50000" rIns="50000" bIns="50000">
             <a:spAutoFit/>
           </a:bodyPr>
           <a:lstStyle/>
@@ -14024,7 +14379,7 @@
           </a:ln>
         </p:spPr>
         <p:txBody>
-          <a:bodyPr wrap="square" lIns="50000" rIns="50000" tIns="50000" bIns="50000">
+          <a:bodyPr wrap="square" lIns="50000" tIns="50000" rIns="50000" bIns="50000">
             <a:spAutoFit/>
           </a:bodyPr>
           <a:lstStyle/>
@@ -14068,7 +14423,9 @@
             <a:spAutoFit/>
           </a:bodyPr>
           <a:lstStyle/>
-          <a:p/>
+          <a:p>
+            <a:endParaRPr/>
+          </a:p>
         </p:txBody>
       </p:sp>
       <p:sp>
@@ -14097,7 +14454,9 @@
             <a:spAutoFit/>
           </a:bodyPr>
           <a:lstStyle/>
-          <a:p/>
+          <a:p>
+            <a:endParaRPr/>
+          </a:p>
         </p:txBody>
       </p:sp>
       <p:sp>
@@ -14120,7 +14479,7 @@
           </a:ln>
         </p:spPr>
         <p:txBody>
-          <a:bodyPr wrap="square" lIns="50000" rIns="50000" tIns="50000" bIns="50000">
+          <a:bodyPr wrap="square" lIns="50000" tIns="50000" rIns="50000" bIns="50000">
             <a:spAutoFit/>
           </a:bodyPr>
           <a:lstStyle/>
@@ -14158,7 +14517,7 @@
           </a:ln>
         </p:spPr>
         <p:txBody>
-          <a:bodyPr wrap="square" lIns="50000" rIns="50000" tIns="50000" bIns="50000">
+          <a:bodyPr wrap="square" lIns="50000" tIns="50000" rIns="50000" bIns="50000">
             <a:spAutoFit/>
           </a:bodyPr>
           <a:lstStyle/>
@@ -14204,7 +14563,9 @@
             <a:spAutoFit/>
           </a:bodyPr>
           <a:lstStyle/>
-          <a:p/>
+          <a:p>
+            <a:endParaRPr/>
+          </a:p>
         </p:txBody>
       </p:sp>
       <p:sp>
@@ -14227,7 +14588,7 @@
           </a:ln>
         </p:spPr>
         <p:txBody>
-          <a:bodyPr wrap="square" lIns="50000" rIns="50000" tIns="50000" bIns="50000">
+          <a:bodyPr wrap="square" lIns="50000" tIns="50000" rIns="50000" bIns="50000">
             <a:spAutoFit/>
           </a:bodyPr>
           <a:lstStyle/>
@@ -14265,7 +14626,7 @@
           </a:ln>
         </p:spPr>
         <p:txBody>
-          <a:bodyPr wrap="square" lIns="50000" rIns="50000" tIns="50000" bIns="50000">
+          <a:bodyPr wrap="square" lIns="50000" tIns="50000" rIns="50000" bIns="50000">
             <a:spAutoFit/>
           </a:bodyPr>
           <a:lstStyle/>
@@ -14309,7 +14670,9 @@
             <a:spAutoFit/>
           </a:bodyPr>
           <a:lstStyle/>
-          <a:p/>
+          <a:p>
+            <a:endParaRPr/>
+          </a:p>
         </p:txBody>
       </p:sp>
       <p:sp>
@@ -14334,7 +14697,7 @@
           </a:ln>
         </p:spPr>
         <p:txBody>
-          <a:bodyPr wrap="square" lIns="50000" rIns="50000" tIns="50000" bIns="50000" anchor="ctr">
+          <a:bodyPr wrap="square" lIns="50000" tIns="50000" rIns="50000" bIns="50000" anchor="ctr">
             <a:spAutoFit/>
           </a:bodyPr>
           <a:lstStyle/>
@@ -14372,7 +14735,7 @@
           </a:ln>
         </p:spPr>
         <p:txBody>
-          <a:bodyPr wrap="square" lIns="50000" rIns="50000" tIns="50000" bIns="50000">
+          <a:bodyPr wrap="square" lIns="50000" tIns="50000" rIns="50000" bIns="50000">
             <a:spAutoFit/>
           </a:bodyPr>
           <a:lstStyle/>
@@ -14410,7 +14773,7 @@
           </a:ln>
         </p:spPr>
         <p:txBody>
-          <a:bodyPr wrap="square" lIns="50000" rIns="50000" tIns="50000" bIns="50000">
+          <a:bodyPr wrap="square" lIns="50000" tIns="50000" rIns="50000" bIns="50000">
             <a:spAutoFit/>
           </a:bodyPr>
           <a:lstStyle/>
@@ -14454,7 +14817,9 @@
             <a:spAutoFit/>
           </a:bodyPr>
           <a:lstStyle/>
-          <a:p/>
+          <a:p>
+            <a:endParaRPr/>
+          </a:p>
         </p:txBody>
       </p:sp>
       <p:sp>
@@ -14479,7 +14844,7 @@
           </a:ln>
         </p:spPr>
         <p:txBody>
-          <a:bodyPr wrap="square" lIns="50000" rIns="50000" tIns="50000" bIns="50000" anchor="ctr">
+          <a:bodyPr wrap="square" lIns="50000" tIns="50000" rIns="50000" bIns="50000" anchor="ctr">
             <a:spAutoFit/>
           </a:bodyPr>
           <a:lstStyle/>
@@ -14517,7 +14882,7 @@
           </a:ln>
         </p:spPr>
         <p:txBody>
-          <a:bodyPr wrap="square" lIns="50000" rIns="50000" tIns="50000" bIns="50000">
+          <a:bodyPr wrap="square" lIns="50000" tIns="50000" rIns="50000" bIns="50000">
             <a:spAutoFit/>
           </a:bodyPr>
           <a:lstStyle/>
@@ -14555,7 +14920,7 @@
           </a:ln>
         </p:spPr>
         <p:txBody>
-          <a:bodyPr wrap="square" lIns="50000" rIns="50000" tIns="50000" bIns="50000">
+          <a:bodyPr wrap="square" lIns="50000" tIns="50000" rIns="50000" bIns="50000">
             <a:spAutoFit/>
           </a:bodyPr>
           <a:lstStyle/>
@@ -14599,7 +14964,9 @@
             <a:spAutoFit/>
           </a:bodyPr>
           <a:lstStyle/>
-          <a:p/>
+          <a:p>
+            <a:endParaRPr/>
+          </a:p>
         </p:txBody>
       </p:sp>
       <p:sp>
@@ -14624,7 +14991,7 @@
           </a:ln>
         </p:spPr>
         <p:txBody>
-          <a:bodyPr wrap="square" lIns="50000" rIns="50000" tIns="50000" bIns="50000" anchor="ctr">
+          <a:bodyPr wrap="square" lIns="50000" tIns="50000" rIns="50000" bIns="50000" anchor="ctr">
             <a:spAutoFit/>
           </a:bodyPr>
           <a:lstStyle/>
@@ -14662,7 +15029,7 @@
           </a:ln>
         </p:spPr>
         <p:txBody>
-          <a:bodyPr wrap="square" lIns="50000" rIns="50000" tIns="50000" bIns="50000">
+          <a:bodyPr wrap="square" lIns="50000" tIns="50000" rIns="50000" bIns="50000">
             <a:spAutoFit/>
           </a:bodyPr>
           <a:lstStyle/>
@@ -14700,7 +15067,7 @@
           </a:ln>
         </p:spPr>
         <p:txBody>
-          <a:bodyPr wrap="square" lIns="50000" rIns="50000" tIns="50000" bIns="50000">
+          <a:bodyPr wrap="square" lIns="50000" tIns="50000" rIns="50000" bIns="50000">
             <a:spAutoFit/>
           </a:bodyPr>
           <a:lstStyle/>
@@ -14727,7 +15094,7 @@
 </file>
 
 <file path=ppt/slides/slide9.xml><?xml version="1.0" encoding="utf-8"?>
-<p:sld xmlns:a="http://schemas.openxmlformats.org/drawingml/2006/main" xmlns:p="http://schemas.openxmlformats.org/presentationml/2006/main" xmlns:r="http://schemas.openxmlformats.org/officeDocument/2006/relationships">
+<p:sld xmlns:a="http://schemas.openxmlformats.org/drawingml/2006/main" xmlns:r="http://schemas.openxmlformats.org/officeDocument/2006/relationships" xmlns:p="http://schemas.openxmlformats.org/presentationml/2006/main">
   <p:cSld>
     <p:spTree>
       <p:nvGrpSpPr>
@@ -14735,7 +15102,14 @@
         <p:cNvGrpSpPr/>
         <p:nvPr/>
       </p:nvGrpSpPr>
-      <p:grpSpPr/>
+      <p:grpSpPr>
+        <a:xfrm>
+          <a:off x="0" y="0"/>
+          <a:ext cx="0" cy="0"/>
+          <a:chOff x="0" y="0"/>
+          <a:chExt cx="0" cy="0"/>
+        </a:xfrm>
+      </p:grpSpPr>
       <p:sp>
         <p:nvSpPr>
           <p:cNvPr id="2" name="TextBox 1"/>
@@ -14762,7 +15136,9 @@
             <a:spAutoFit/>
           </a:bodyPr>
           <a:lstStyle/>
-          <a:p/>
+          <a:p>
+            <a:endParaRPr/>
+          </a:p>
         </p:txBody>
       </p:sp>
       <p:sp>
@@ -14791,7 +15167,9 @@
             <a:spAutoFit/>
           </a:bodyPr>
           <a:lstStyle/>
-          <a:p/>
+          <a:p>
+            <a:endParaRPr/>
+          </a:p>
         </p:txBody>
       </p:sp>
       <p:sp>
@@ -14820,7 +15198,9 @@
             <a:spAutoFit/>
           </a:bodyPr>
           <a:lstStyle/>
-          <a:p/>
+          <a:p>
+            <a:endParaRPr/>
+          </a:p>
         </p:txBody>
       </p:sp>
       <p:sp>
@@ -14843,7 +15223,7 @@
           </a:ln>
         </p:spPr>
         <p:txBody>
-          <a:bodyPr wrap="square" lIns="50000" rIns="50000" tIns="50000" bIns="50000">
+          <a:bodyPr wrap="square" lIns="50000" tIns="50000" rIns="50000" bIns="50000">
             <a:spAutoFit/>
           </a:bodyPr>
           <a:lstStyle/>
@@ -14881,7 +15261,7 @@
           </a:ln>
         </p:spPr>
         <p:txBody>
-          <a:bodyPr wrap="square" lIns="50000" rIns="50000" tIns="50000" bIns="50000">
+          <a:bodyPr wrap="square" lIns="50000" tIns="50000" rIns="50000" bIns="50000">
             <a:spAutoFit/>
           </a:bodyPr>
           <a:lstStyle/>
@@ -14927,7 +15307,9 @@
             <a:spAutoFit/>
           </a:bodyPr>
           <a:lstStyle/>
-          <a:p/>
+          <a:p>
+            <a:endParaRPr/>
+          </a:p>
         </p:txBody>
       </p:sp>
       <p:sp>
@@ -14950,7 +15332,7 @@
           </a:ln>
         </p:spPr>
         <p:txBody>
-          <a:bodyPr wrap="square" lIns="50000" rIns="50000" tIns="50000" bIns="50000" anchor="ctr">
+          <a:bodyPr wrap="square" lIns="50000" tIns="50000" rIns="50000" bIns="50000" anchor="ctr">
             <a:spAutoFit/>
           </a:bodyPr>
           <a:lstStyle/>
@@ -14990,7 +15372,7 @@
           </a:ln>
         </p:spPr>
         <p:txBody>
-          <a:bodyPr wrap="square" lIns="50000" rIns="50000" tIns="50000" bIns="50000" anchor="ctr">
+          <a:bodyPr wrap="square" lIns="50000" tIns="50000" rIns="50000" bIns="50000" anchor="ctr">
             <a:spAutoFit/>
           </a:bodyPr>
           <a:lstStyle/>
@@ -15028,7 +15410,7 @@
           </a:ln>
         </p:spPr>
         <p:txBody>
-          <a:bodyPr wrap="square" lIns="50000" rIns="50000" tIns="50000" bIns="50000">
+          <a:bodyPr wrap="square" lIns="50000" tIns="50000" rIns="50000" bIns="50000">
             <a:spAutoFit/>
           </a:bodyPr>
           <a:lstStyle/>
@@ -15066,7 +15448,7 @@
           </a:ln>
         </p:spPr>
         <p:txBody>
-          <a:bodyPr wrap="square" lIns="50000" rIns="50000" tIns="50000" bIns="50000">
+          <a:bodyPr wrap="square" lIns="50000" tIns="50000" rIns="50000" bIns="50000">
             <a:spAutoFit/>
           </a:bodyPr>
           <a:lstStyle/>
@@ -15112,7 +15494,9 @@
             <a:spAutoFit/>
           </a:bodyPr>
           <a:lstStyle/>
-          <a:p/>
+          <a:p>
+            <a:endParaRPr/>
+          </a:p>
         </p:txBody>
       </p:sp>
       <p:sp>
@@ -15135,7 +15519,7 @@
           </a:ln>
         </p:spPr>
         <p:txBody>
-          <a:bodyPr wrap="square" lIns="50000" rIns="50000" tIns="50000" bIns="50000">
+          <a:bodyPr wrap="square" lIns="50000" tIns="50000" rIns="50000" bIns="50000">
             <a:spAutoFit/>
           </a:bodyPr>
           <a:lstStyle/>
@@ -15179,7 +15563,9 @@
             <a:spAutoFit/>
           </a:bodyPr>
           <a:lstStyle/>
-          <a:p/>
+          <a:p>
+            <a:endParaRPr/>
+          </a:p>
         </p:txBody>
       </p:sp>
       <p:sp>
@@ -15204,7 +15590,7 @@
           </a:ln>
         </p:spPr>
         <p:txBody>
-          <a:bodyPr wrap="square" lIns="50000" rIns="50000" tIns="50000" bIns="50000" anchor="ctr">
+          <a:bodyPr wrap="square" lIns="50000" tIns="50000" rIns="50000" bIns="50000" anchor="ctr">
             <a:spAutoFit/>
           </a:bodyPr>
           <a:lstStyle/>
@@ -15242,7 +15628,7 @@
           </a:ln>
         </p:spPr>
         <p:txBody>
-          <a:bodyPr wrap="square" lIns="50000" rIns="50000" tIns="50000" bIns="50000">
+          <a:bodyPr wrap="square" lIns="50000" tIns="50000" rIns="50000" bIns="50000">
             <a:spAutoFit/>
           </a:bodyPr>
           <a:lstStyle/>
@@ -15280,7 +15666,7 @@
           </a:ln>
         </p:spPr>
         <p:txBody>
-          <a:bodyPr wrap="square" lIns="50000" rIns="50000" tIns="50000" bIns="50000">
+          <a:bodyPr wrap="square" lIns="50000" tIns="50000" rIns="50000" bIns="50000">
             <a:spAutoFit/>
           </a:bodyPr>
           <a:lstStyle/>
@@ -15326,7 +15712,9 @@
             <a:spAutoFit/>
           </a:bodyPr>
           <a:lstStyle/>
-          <a:p/>
+          <a:p>
+            <a:endParaRPr/>
+          </a:p>
         </p:txBody>
       </p:sp>
       <p:sp>
@@ -15349,7 +15737,7 @@
           </a:ln>
         </p:spPr>
         <p:txBody>
-          <a:bodyPr wrap="square" lIns="50000" rIns="50000" tIns="50000" bIns="50000">
+          <a:bodyPr wrap="square" lIns="50000" tIns="50000" rIns="50000" bIns="50000">
             <a:spAutoFit/>
           </a:bodyPr>
           <a:lstStyle/>
@@ -15393,7 +15781,9 @@
             <a:spAutoFit/>
           </a:bodyPr>
           <a:lstStyle/>
-          <a:p/>
+          <a:p>
+            <a:endParaRPr/>
+          </a:p>
         </p:txBody>
       </p:sp>
       <p:sp>
@@ -15418,7 +15808,7 @@
           </a:ln>
         </p:spPr>
         <p:txBody>
-          <a:bodyPr wrap="square" lIns="50000" rIns="50000" tIns="50000" bIns="50000" anchor="ctr">
+          <a:bodyPr wrap="square" lIns="50000" tIns="50000" rIns="50000" bIns="50000" anchor="ctr">
             <a:spAutoFit/>
           </a:bodyPr>
           <a:lstStyle/>
@@ -15456,7 +15846,7 @@
           </a:ln>
         </p:spPr>
         <p:txBody>
-          <a:bodyPr wrap="square" lIns="50000" rIns="50000" tIns="50000" bIns="50000">
+          <a:bodyPr wrap="square" lIns="50000" tIns="50000" rIns="50000" bIns="50000">
             <a:spAutoFit/>
           </a:bodyPr>
           <a:lstStyle/>
@@ -15494,7 +15884,7 @@
           </a:ln>
         </p:spPr>
         <p:txBody>
-          <a:bodyPr wrap="square" lIns="50000" rIns="50000" tIns="50000" bIns="50000">
+          <a:bodyPr wrap="square" lIns="50000" tIns="50000" rIns="50000" bIns="50000">
             <a:spAutoFit/>
           </a:bodyPr>
           <a:lstStyle/>
@@ -15538,7 +15928,9 @@
             <a:spAutoFit/>
           </a:bodyPr>
           <a:lstStyle/>
-          <a:p/>
+          <a:p>
+            <a:endParaRPr/>
+          </a:p>
         </p:txBody>
       </p:sp>
       <p:sp>
@@ -15563,7 +15955,7 @@
           </a:ln>
         </p:spPr>
         <p:txBody>
-          <a:bodyPr wrap="square" lIns="50000" rIns="50000" tIns="50000" bIns="50000" anchor="ctr">
+          <a:bodyPr wrap="square" lIns="50000" tIns="50000" rIns="50000" bIns="50000" anchor="ctr">
             <a:spAutoFit/>
           </a:bodyPr>
           <a:lstStyle/>
@@ -15601,7 +15993,7 @@
           </a:ln>
         </p:spPr>
         <p:txBody>
-          <a:bodyPr wrap="square" lIns="50000" rIns="50000" tIns="50000" bIns="50000">
+          <a:bodyPr wrap="square" lIns="50000" tIns="50000" rIns="50000" bIns="50000">
             <a:spAutoFit/>
           </a:bodyPr>
           <a:lstStyle/>
@@ -15639,7 +16031,7 @@
           </a:ln>
         </p:spPr>
         <p:txBody>
-          <a:bodyPr wrap="square" lIns="50000" rIns="50000" tIns="50000" bIns="50000">
+          <a:bodyPr wrap="square" lIns="50000" tIns="50000" rIns="50000" bIns="50000">
             <a:spAutoFit/>
           </a:bodyPr>
           <a:lstStyle/>

--- a/docs/slot_classifier_share.pptx
+++ b/docs/slot_classifier_share.pptx
@@ -802,7 +802,7 @@
   <p:cSld>
     <p:spTree>
       <p:nvGrpSpPr>
-        <p:cNvPr id="438" name="Shape 438"/>
+        <p:cNvPr id="440" name="Shape 440"/>
         <p:cNvGrpSpPr/>
         <p:nvPr/>
       </p:nvGrpSpPr>
@@ -816,7 +816,7 @@
       </p:grpSpPr>
       <p:sp>
         <p:nvSpPr>
-          <p:cNvPr id="439" name="Google Shape;439;g3e32c70432f_2_379:notes"/>
+          <p:cNvPr id="441" name="Google Shape;441;g3e32c70432f_2_379:notes"/>
           <p:cNvSpPr txBox="1"/>
           <p:nvPr>
             <p:ph idx="1" type="body"/>
@@ -855,7 +855,7 @@
       </p:sp>
       <p:sp>
         <p:nvSpPr>
-          <p:cNvPr id="440" name="Google Shape;440;g3e32c70432f_2_379:notes"/>
+          <p:cNvPr id="442" name="Google Shape;442;g3e32c70432f_2_379:notes"/>
           <p:cNvSpPr/>
           <p:nvPr>
             <p:ph idx="2" type="sldImg"/>
@@ -901,7 +901,7 @@
   <p:cSld>
     <p:spTree>
       <p:nvGrpSpPr>
-        <p:cNvPr id="476" name="Shape 476"/>
+        <p:cNvPr id="479" name="Shape 479"/>
         <p:cNvGrpSpPr/>
         <p:nvPr/>
       </p:nvGrpSpPr>
@@ -915,7 +915,7 @@
       </p:grpSpPr>
       <p:sp>
         <p:nvSpPr>
-          <p:cNvPr id="477" name="Google Shape;477;g3e32c70432f_2_415:notes"/>
+          <p:cNvPr id="480" name="Google Shape;480;g3e32c70432f_2_415:notes"/>
           <p:cNvSpPr txBox="1"/>
           <p:nvPr>
             <p:ph idx="1" type="body"/>
@@ -954,7 +954,7 @@
       </p:sp>
       <p:sp>
         <p:nvSpPr>
-          <p:cNvPr id="478" name="Google Shape;478;g3e32c70432f_2_415:notes"/>
+          <p:cNvPr id="481" name="Google Shape;481;g3e32c70432f_2_415:notes"/>
           <p:cNvSpPr/>
           <p:nvPr>
             <p:ph idx="2" type="sldImg"/>
@@ -1000,7 +1000,7 @@
   <p:cSld>
     <p:spTree>
       <p:nvGrpSpPr>
-        <p:cNvPr id="499" name="Shape 499"/>
+        <p:cNvPr id="502" name="Shape 502"/>
         <p:cNvGrpSpPr/>
         <p:nvPr/>
       </p:nvGrpSpPr>
@@ -1014,7 +1014,7 @@
       </p:grpSpPr>
       <p:sp>
         <p:nvSpPr>
-          <p:cNvPr id="500" name="Google Shape;500;g3e32c70432f_2_437:notes"/>
+          <p:cNvPr id="503" name="Google Shape;503;g3e32c70432f_2_437:notes"/>
           <p:cNvSpPr txBox="1"/>
           <p:nvPr>
             <p:ph idx="1" type="body"/>
@@ -1053,7 +1053,7 @@
       </p:sp>
       <p:sp>
         <p:nvSpPr>
-          <p:cNvPr id="501" name="Google Shape;501;g3e32c70432f_2_437:notes"/>
+          <p:cNvPr id="504" name="Google Shape;504;g3e32c70432f_2_437:notes"/>
           <p:cNvSpPr/>
           <p:nvPr>
             <p:ph idx="2" type="sldImg"/>
@@ -1594,7 +1594,7 @@
   <p:cSld>
     <p:spTree>
       <p:nvGrpSpPr>
-        <p:cNvPr id="318" name="Shape 318"/>
+        <p:cNvPr id="319" name="Shape 319"/>
         <p:cNvGrpSpPr/>
         <p:nvPr/>
       </p:nvGrpSpPr>
@@ -1608,7 +1608,7 @@
       </p:grpSpPr>
       <p:sp>
         <p:nvSpPr>
-          <p:cNvPr id="319" name="Google Shape;319;g3e32c70432f_4_0:notes"/>
+          <p:cNvPr id="320" name="Google Shape;320;g3e32c70432f_4_0:notes"/>
           <p:cNvSpPr txBox="1"/>
           <p:nvPr>
             <p:ph idx="1" type="body"/>
@@ -1647,7 +1647,7 @@
       </p:sp>
       <p:sp>
         <p:nvSpPr>
-          <p:cNvPr id="320" name="Google Shape;320;g3e32c70432f_4_0:notes"/>
+          <p:cNvPr id="321" name="Google Shape;321;g3e32c70432f_4_0:notes"/>
           <p:cNvSpPr/>
           <p:nvPr>
             <p:ph idx="2" type="sldImg"/>
@@ -1693,7 +1693,7 @@
   <p:cSld>
     <p:spTree>
       <p:nvGrpSpPr>
-        <p:cNvPr id="358" name="Shape 358"/>
+        <p:cNvPr id="360" name="Shape 360"/>
         <p:cNvGrpSpPr/>
         <p:nvPr/>
       </p:nvGrpSpPr>
@@ -1707,7 +1707,7 @@
       </p:grpSpPr>
       <p:sp>
         <p:nvSpPr>
-          <p:cNvPr id="359" name="Google Shape;359;g3e32c70432f_2_302:notes"/>
+          <p:cNvPr id="361" name="Google Shape;361;g3e32c70432f_2_302:notes"/>
           <p:cNvSpPr txBox="1"/>
           <p:nvPr>
             <p:ph idx="1" type="body"/>
@@ -1746,7 +1746,7 @@
       </p:sp>
       <p:sp>
         <p:nvSpPr>
-          <p:cNvPr id="360" name="Google Shape;360;g3e32c70432f_2_302:notes"/>
+          <p:cNvPr id="362" name="Google Shape;362;g3e32c70432f_2_302:notes"/>
           <p:cNvSpPr/>
           <p:nvPr>
             <p:ph idx="2" type="sldImg"/>
@@ -1792,7 +1792,7 @@
   <p:cSld>
     <p:spTree>
       <p:nvGrpSpPr>
-        <p:cNvPr id="407" name="Shape 407"/>
+        <p:cNvPr id="409" name="Shape 409"/>
         <p:cNvGrpSpPr/>
         <p:nvPr/>
       </p:nvGrpSpPr>
@@ -1806,7 +1806,7 @@
       </p:grpSpPr>
       <p:sp>
         <p:nvSpPr>
-          <p:cNvPr id="408" name="Google Shape;408;g3e32c70432f_2_350:notes"/>
+          <p:cNvPr id="410" name="Google Shape;410;g3e32c70432f_2_350:notes"/>
           <p:cNvSpPr txBox="1"/>
           <p:nvPr>
             <p:ph idx="1" type="body"/>
@@ -1845,7 +1845,7 @@
       </p:sp>
       <p:sp>
         <p:nvSpPr>
-          <p:cNvPr id="409" name="Google Shape;409;g3e32c70432f_2_350:notes"/>
+          <p:cNvPr id="411" name="Google Shape;411;g3e32c70432f_2_350:notes"/>
           <p:cNvSpPr/>
           <p:nvPr>
             <p:ph idx="2" type="sldImg"/>
@@ -16668,7 +16668,7 @@
   <p:cSld>
     <p:spTree>
       <p:nvGrpSpPr>
-        <p:cNvPr id="441" name="Shape 441"/>
+        <p:cNvPr id="443" name="Shape 443"/>
         <p:cNvGrpSpPr/>
         <p:nvPr/>
       </p:nvGrpSpPr>
@@ -16682,7 +16682,7 @@
       </p:grpSpPr>
       <p:sp>
         <p:nvSpPr>
-          <p:cNvPr id="442" name="Google Shape;442;p34"/>
+          <p:cNvPr id="444" name="Google Shape;444;p34"/>
           <p:cNvSpPr txBox="1"/>
           <p:nvPr/>
         </p:nvSpPr>
@@ -16733,7 +16733,7 @@
       </p:sp>
       <p:sp>
         <p:nvSpPr>
-          <p:cNvPr id="443" name="Google Shape;443;p34"/>
+          <p:cNvPr id="445" name="Google Shape;445;p34"/>
           <p:cNvSpPr txBox="1"/>
           <p:nvPr/>
         </p:nvSpPr>
@@ -16784,7 +16784,7 @@
       </p:sp>
       <p:sp>
         <p:nvSpPr>
-          <p:cNvPr id="444" name="Google Shape;444;p34"/>
+          <p:cNvPr id="446" name="Google Shape;446;p34"/>
           <p:cNvSpPr txBox="1"/>
           <p:nvPr/>
         </p:nvSpPr>
@@ -16835,7 +16835,7 @@
       </p:sp>
       <p:sp>
         <p:nvSpPr>
-          <p:cNvPr id="445" name="Google Shape;445;p34"/>
+          <p:cNvPr id="447" name="Google Shape;447;p34"/>
           <p:cNvSpPr txBox="1"/>
           <p:nvPr/>
         </p:nvSpPr>
@@ -16885,7 +16885,7 @@
       </p:sp>
       <p:sp>
         <p:nvSpPr>
-          <p:cNvPr id="446" name="Google Shape;446;p34"/>
+          <p:cNvPr id="448" name="Google Shape;448;p34"/>
           <p:cNvSpPr txBox="1"/>
           <p:nvPr/>
         </p:nvSpPr>
@@ -16935,7 +16935,7 @@
       </p:sp>
       <p:sp>
         <p:nvSpPr>
-          <p:cNvPr id="447" name="Google Shape;447;p34"/>
+          <p:cNvPr id="449" name="Google Shape;449;p34"/>
           <p:cNvSpPr txBox="1"/>
           <p:nvPr/>
         </p:nvSpPr>
@@ -16992,7 +16992,7 @@
       </p:sp>
       <p:sp>
         <p:nvSpPr>
-          <p:cNvPr id="448" name="Google Shape;448;p34"/>
+          <p:cNvPr id="450" name="Google Shape;450;p34"/>
           <p:cNvSpPr txBox="1"/>
           <p:nvPr/>
         </p:nvSpPr>
@@ -17042,7 +17042,7 @@
       </p:sp>
       <p:sp>
         <p:nvSpPr>
-          <p:cNvPr id="449" name="Google Shape;449;p34"/>
+          <p:cNvPr id="451" name="Google Shape;451;p34"/>
           <p:cNvSpPr txBox="1"/>
           <p:nvPr/>
         </p:nvSpPr>
@@ -17092,7 +17092,7 @@
       </p:sp>
       <p:sp>
         <p:nvSpPr>
-          <p:cNvPr id="450" name="Google Shape;450;p34"/>
+          <p:cNvPr id="452" name="Google Shape;452;p34"/>
           <p:cNvSpPr txBox="1"/>
           <p:nvPr/>
         </p:nvSpPr>
@@ -17149,7 +17149,7 @@
       </p:sp>
       <p:sp>
         <p:nvSpPr>
-          <p:cNvPr id="451" name="Google Shape;451;p34"/>
+          <p:cNvPr id="453" name="Google Shape;453;p34"/>
           <p:cNvSpPr txBox="1"/>
           <p:nvPr/>
         </p:nvSpPr>
@@ -17199,7 +17199,7 @@
       </p:sp>
       <p:sp>
         <p:nvSpPr>
-          <p:cNvPr id="452" name="Google Shape;452;p34"/>
+          <p:cNvPr id="454" name="Google Shape;454;p34"/>
           <p:cNvSpPr txBox="1"/>
           <p:nvPr/>
         </p:nvSpPr>
@@ -17249,7 +17249,7 @@
       </p:sp>
       <p:sp>
         <p:nvSpPr>
-          <p:cNvPr id="453" name="Google Shape;453;p34"/>
+          <p:cNvPr id="455" name="Google Shape;455;p34"/>
           <p:cNvSpPr txBox="1"/>
           <p:nvPr/>
         </p:nvSpPr>
@@ -17300,7 +17300,7 @@
       </p:sp>
       <p:sp>
         <p:nvSpPr>
-          <p:cNvPr id="454" name="Google Shape;454;p34"/>
+          <p:cNvPr id="456" name="Google Shape;456;p34"/>
           <p:cNvSpPr txBox="1"/>
           <p:nvPr/>
         </p:nvSpPr>
@@ -17352,7 +17352,7 @@
       </p:sp>
       <p:sp>
         <p:nvSpPr>
-          <p:cNvPr id="455" name="Google Shape;455;p34"/>
+          <p:cNvPr id="457" name="Google Shape;457;p34"/>
           <p:cNvSpPr txBox="1"/>
           <p:nvPr/>
         </p:nvSpPr>
@@ -17403,7 +17403,7 @@
       </p:sp>
       <p:sp>
         <p:nvSpPr>
-          <p:cNvPr id="456" name="Google Shape;456;p34"/>
+          <p:cNvPr id="458" name="Google Shape;458;p34"/>
           <p:cNvSpPr txBox="1"/>
           <p:nvPr/>
         </p:nvSpPr>
@@ -17453,7 +17453,7 @@
       </p:sp>
       <p:sp>
         <p:nvSpPr>
-          <p:cNvPr id="457" name="Google Shape;457;p34"/>
+          <p:cNvPr id="459" name="Google Shape;459;p34"/>
           <p:cNvSpPr txBox="1"/>
           <p:nvPr/>
         </p:nvSpPr>
@@ -17504,7 +17504,7 @@
       </p:sp>
       <p:sp>
         <p:nvSpPr>
-          <p:cNvPr id="458" name="Google Shape;458;p34"/>
+          <p:cNvPr id="460" name="Google Shape;460;p34"/>
           <p:cNvSpPr txBox="1"/>
           <p:nvPr/>
         </p:nvSpPr>
@@ -17556,7 +17556,7 @@
       </p:sp>
       <p:sp>
         <p:nvSpPr>
-          <p:cNvPr id="459" name="Google Shape;459;p34"/>
+          <p:cNvPr id="461" name="Google Shape;461;p34"/>
           <p:cNvSpPr txBox="1"/>
           <p:nvPr/>
         </p:nvSpPr>
@@ -17607,7 +17607,7 @@
       </p:sp>
       <p:sp>
         <p:nvSpPr>
-          <p:cNvPr id="460" name="Google Shape;460;p34"/>
+          <p:cNvPr id="462" name="Google Shape;462;p34"/>
           <p:cNvSpPr txBox="1"/>
           <p:nvPr/>
         </p:nvSpPr>
@@ -17657,7 +17657,7 @@
       </p:sp>
       <p:sp>
         <p:nvSpPr>
-          <p:cNvPr id="461" name="Google Shape;461;p34"/>
+          <p:cNvPr id="463" name="Google Shape;463;p34"/>
           <p:cNvSpPr txBox="1"/>
           <p:nvPr/>
         </p:nvSpPr>
@@ -17708,7 +17708,7 @@
       </p:sp>
       <p:sp>
         <p:nvSpPr>
-          <p:cNvPr id="462" name="Google Shape;462;p34"/>
+          <p:cNvPr id="464" name="Google Shape;464;p34"/>
           <p:cNvSpPr txBox="1"/>
           <p:nvPr/>
         </p:nvSpPr>
@@ -17760,7 +17760,7 @@
       </p:sp>
       <p:sp>
         <p:nvSpPr>
-          <p:cNvPr id="463" name="Google Shape;463;p34"/>
+          <p:cNvPr id="465" name="Google Shape;465;p34"/>
           <p:cNvSpPr txBox="1"/>
           <p:nvPr/>
         </p:nvSpPr>
@@ -17811,7 +17811,7 @@
       </p:sp>
       <p:sp>
         <p:nvSpPr>
-          <p:cNvPr id="464" name="Google Shape;464;p34"/>
+          <p:cNvPr id="466" name="Google Shape;466;p34"/>
           <p:cNvSpPr txBox="1"/>
           <p:nvPr/>
         </p:nvSpPr>
@@ -17861,7 +17861,7 @@
       </p:sp>
       <p:sp>
         <p:nvSpPr>
-          <p:cNvPr id="465" name="Google Shape;465;p34"/>
+          <p:cNvPr id="467" name="Google Shape;467;p34"/>
           <p:cNvSpPr txBox="1"/>
           <p:nvPr/>
         </p:nvSpPr>
@@ -17912,7 +17912,7 @@
       </p:sp>
       <p:sp>
         <p:nvSpPr>
-          <p:cNvPr id="466" name="Google Shape;466;p34"/>
+          <p:cNvPr id="468" name="Google Shape;468;p34"/>
           <p:cNvSpPr txBox="1"/>
           <p:nvPr/>
         </p:nvSpPr>
@@ -17964,7 +17964,7 @@
       </p:sp>
       <p:sp>
         <p:nvSpPr>
-          <p:cNvPr id="467" name="Google Shape;467;p34"/>
+          <p:cNvPr id="469" name="Google Shape;469;p34"/>
           <p:cNvSpPr txBox="1"/>
           <p:nvPr/>
         </p:nvSpPr>
@@ -18015,7 +18015,7 @@
       </p:sp>
       <p:sp>
         <p:nvSpPr>
-          <p:cNvPr id="468" name="Google Shape;468;p34"/>
+          <p:cNvPr id="470" name="Google Shape;470;p34"/>
           <p:cNvSpPr txBox="1"/>
           <p:nvPr/>
         </p:nvSpPr>
@@ -18065,7 +18065,7 @@
       </p:sp>
       <p:sp>
         <p:nvSpPr>
-          <p:cNvPr id="469" name="Google Shape;469;p34"/>
+          <p:cNvPr id="471" name="Google Shape;471;p34"/>
           <p:cNvSpPr txBox="1"/>
           <p:nvPr/>
         </p:nvSpPr>
@@ -18116,7 +18116,7 @@
       </p:sp>
       <p:sp>
         <p:nvSpPr>
-          <p:cNvPr id="470" name="Google Shape;470;p34"/>
+          <p:cNvPr id="472" name="Google Shape;472;p34"/>
           <p:cNvSpPr txBox="1"/>
           <p:nvPr/>
         </p:nvSpPr>
@@ -18168,7 +18168,7 @@
       </p:sp>
       <p:sp>
         <p:nvSpPr>
-          <p:cNvPr id="471" name="Google Shape;471;p34"/>
+          <p:cNvPr id="473" name="Google Shape;473;p34"/>
           <p:cNvSpPr txBox="1"/>
           <p:nvPr/>
         </p:nvSpPr>
@@ -18219,7 +18219,7 @@
       </p:sp>
       <p:sp>
         <p:nvSpPr>
-          <p:cNvPr id="472" name="Google Shape;472;p34"/>
+          <p:cNvPr id="474" name="Google Shape;474;p34"/>
           <p:cNvSpPr txBox="1"/>
           <p:nvPr/>
         </p:nvSpPr>
@@ -18269,7 +18269,7 @@
       </p:sp>
       <p:sp>
         <p:nvSpPr>
-          <p:cNvPr id="473" name="Google Shape;473;p34"/>
+          <p:cNvPr id="475" name="Google Shape;475;p34"/>
           <p:cNvSpPr txBox="1"/>
           <p:nvPr/>
         </p:nvSpPr>
@@ -18320,7 +18320,7 @@
       </p:sp>
       <p:sp>
         <p:nvSpPr>
-          <p:cNvPr id="474" name="Google Shape;474;p34"/>
+          <p:cNvPr id="476" name="Google Shape;476;p34"/>
           <p:cNvSpPr txBox="1"/>
           <p:nvPr/>
         </p:nvSpPr>
@@ -18370,7 +18370,7 @@
       </p:sp>
       <p:sp>
         <p:nvSpPr>
-          <p:cNvPr id="475" name="Google Shape;475;p34"/>
+          <p:cNvPr id="477" name="Google Shape;477;p34"/>
           <p:cNvSpPr txBox="1"/>
           <p:nvPr/>
         </p:nvSpPr>
@@ -18452,6 +18452,62 @@
               <a:solidFill>
                 <a:schemeClr val="dk1"/>
               </a:solidFill>
+              <a:latin typeface="Calibri"/>
+              <a:ea typeface="Calibri"/>
+              <a:cs typeface="Calibri"/>
+              <a:sym typeface="Calibri"/>
+            </a:endParaRPr>
+          </a:p>
+        </p:txBody>
+      </p:sp>
+      <p:sp>
+        <p:nvSpPr>
+          <p:cNvPr id="478" name="Google Shape;478;p34"/>
+          <p:cNvSpPr/>
+          <p:nvPr/>
+        </p:nvSpPr>
+        <p:spPr>
+          <a:xfrm>
+            <a:off x="3752350" y="2647204"/>
+            <a:ext cx="1721700" cy="1681500"/>
+          </a:xfrm>
+          <a:prstGeom prst="mathMultiply">
+            <a:avLst>
+              <a:gd fmla="val 23520" name="adj1"/>
+            </a:avLst>
+          </a:prstGeom>
+          <a:solidFill>
+            <a:schemeClr val="accent4"/>
+          </a:solidFill>
+          <a:ln cap="flat" cmpd="sng" w="9525">
+            <a:solidFill>
+              <a:schemeClr val="lt1"/>
+            </a:solidFill>
+            <a:prstDash val="solid"/>
+            <a:round/>
+            <a:headEnd len="sm" w="sm" type="none"/>
+            <a:tailEnd len="sm" w="sm" type="none"/>
+          </a:ln>
+        </p:spPr>
+        <p:txBody>
+          <a:bodyPr anchorCtr="0" anchor="ctr" bIns="91425" lIns="91425" spcFirstLastPara="1" rIns="91425" wrap="square" tIns="91425">
+            <a:noAutofit/>
+          </a:bodyPr>
+          <a:lstStyle/>
+          <a:p>
+            <a:pPr indent="0" lvl="0" marL="0" rtl="0" algn="ctr">
+              <a:spcBef>
+                <a:spcPts val="0"/>
+              </a:spcBef>
+              <a:spcAft>
+                <a:spcPts val="0"/>
+              </a:spcAft>
+              <a:buNone/>
+            </a:pPr>
+            <a:r>
+              <a:t/>
+            </a:r>
+            <a:endParaRPr>
               <a:latin typeface="Calibri"/>
               <a:ea typeface="Calibri"/>
               <a:cs typeface="Calibri"/>
@@ -18473,7 +18529,7 @@
   <p:cSld>
     <p:spTree>
       <p:nvGrpSpPr>
-        <p:cNvPr id="479" name="Shape 479"/>
+        <p:cNvPr id="482" name="Shape 482"/>
         <p:cNvGrpSpPr/>
         <p:nvPr/>
       </p:nvGrpSpPr>
@@ -18487,7 +18543,7 @@
       </p:grpSpPr>
       <p:sp>
         <p:nvSpPr>
-          <p:cNvPr id="480" name="Google Shape;480;p35"/>
+          <p:cNvPr id="483" name="Google Shape;483;p35"/>
           <p:cNvSpPr txBox="1"/>
           <p:nvPr/>
         </p:nvSpPr>
@@ -18538,7 +18594,7 @@
       </p:sp>
       <p:sp>
         <p:nvSpPr>
-          <p:cNvPr id="481" name="Google Shape;481;p35"/>
+          <p:cNvPr id="484" name="Google Shape;484;p35"/>
           <p:cNvSpPr txBox="1"/>
           <p:nvPr/>
         </p:nvSpPr>
@@ -18589,7 +18645,7 @@
       </p:sp>
       <p:sp>
         <p:nvSpPr>
-          <p:cNvPr id="482" name="Google Shape;482;p35"/>
+          <p:cNvPr id="485" name="Google Shape;485;p35"/>
           <p:cNvSpPr txBox="1"/>
           <p:nvPr/>
         </p:nvSpPr>
@@ -18640,7 +18696,7 @@
       </p:sp>
       <p:sp>
         <p:nvSpPr>
-          <p:cNvPr id="483" name="Google Shape;483;p35"/>
+          <p:cNvPr id="486" name="Google Shape;486;p35"/>
           <p:cNvSpPr txBox="1"/>
           <p:nvPr/>
         </p:nvSpPr>
@@ -18690,7 +18746,7 @@
       </p:sp>
       <p:sp>
         <p:nvSpPr>
-          <p:cNvPr id="484" name="Google Shape;484;p35"/>
+          <p:cNvPr id="487" name="Google Shape;487;p35"/>
           <p:cNvSpPr txBox="1"/>
           <p:nvPr/>
         </p:nvSpPr>
@@ -18741,7 +18797,7 @@
       </p:sp>
       <p:sp>
         <p:nvSpPr>
-          <p:cNvPr id="485" name="Google Shape;485;p35"/>
+          <p:cNvPr id="488" name="Google Shape;488;p35"/>
           <p:cNvSpPr txBox="1"/>
           <p:nvPr/>
         </p:nvSpPr>
@@ -18791,7 +18847,7 @@
       </p:sp>
       <p:sp>
         <p:nvSpPr>
-          <p:cNvPr id="486" name="Google Shape;486;p35"/>
+          <p:cNvPr id="489" name="Google Shape;489;p35"/>
           <p:cNvSpPr txBox="1"/>
           <p:nvPr/>
         </p:nvSpPr>
@@ -18842,7 +18898,7 @@
       </p:sp>
       <p:sp>
         <p:nvSpPr>
-          <p:cNvPr id="487" name="Google Shape;487;p35"/>
+          <p:cNvPr id="490" name="Google Shape;490;p35"/>
           <p:cNvSpPr txBox="1"/>
           <p:nvPr/>
         </p:nvSpPr>
@@ -18892,7 +18948,7 @@
       </p:sp>
       <p:sp>
         <p:nvSpPr>
-          <p:cNvPr id="488" name="Google Shape;488;p35"/>
+          <p:cNvPr id="491" name="Google Shape;491;p35"/>
           <p:cNvSpPr txBox="1"/>
           <p:nvPr/>
         </p:nvSpPr>
@@ -18942,7 +18998,7 @@
       </p:sp>
       <p:sp>
         <p:nvSpPr>
-          <p:cNvPr id="489" name="Google Shape;489;p35"/>
+          <p:cNvPr id="492" name="Google Shape;492;p35"/>
           <p:cNvSpPr txBox="1"/>
           <p:nvPr/>
         </p:nvSpPr>
@@ -18993,7 +19049,7 @@
       </p:sp>
       <p:sp>
         <p:nvSpPr>
-          <p:cNvPr id="490" name="Google Shape;490;p35"/>
+          <p:cNvPr id="493" name="Google Shape;493;p35"/>
           <p:cNvSpPr txBox="1"/>
           <p:nvPr/>
         </p:nvSpPr>
@@ -19043,7 +19099,7 @@
       </p:sp>
       <p:sp>
         <p:nvSpPr>
-          <p:cNvPr id="491" name="Google Shape;491;p35"/>
+          <p:cNvPr id="494" name="Google Shape;494;p35"/>
           <p:cNvSpPr txBox="1"/>
           <p:nvPr/>
         </p:nvSpPr>
@@ -19094,7 +19150,7 @@
       </p:sp>
       <p:sp>
         <p:nvSpPr>
-          <p:cNvPr id="492" name="Google Shape;492;p35"/>
+          <p:cNvPr id="495" name="Google Shape;495;p35"/>
           <p:cNvSpPr txBox="1"/>
           <p:nvPr/>
         </p:nvSpPr>
@@ -19144,7 +19200,7 @@
       </p:sp>
       <p:sp>
         <p:nvSpPr>
-          <p:cNvPr id="493" name="Google Shape;493;p35"/>
+          <p:cNvPr id="496" name="Google Shape;496;p35"/>
           <p:cNvSpPr txBox="1"/>
           <p:nvPr/>
         </p:nvSpPr>
@@ -19195,7 +19251,7 @@
       </p:sp>
       <p:sp>
         <p:nvSpPr>
-          <p:cNvPr id="494" name="Google Shape;494;p35"/>
+          <p:cNvPr id="497" name="Google Shape;497;p35"/>
           <p:cNvSpPr txBox="1"/>
           <p:nvPr/>
         </p:nvSpPr>
@@ -19245,7 +19301,7 @@
       </p:sp>
       <p:sp>
         <p:nvSpPr>
-          <p:cNvPr id="495" name="Google Shape;495;p35"/>
+          <p:cNvPr id="498" name="Google Shape;498;p35"/>
           <p:cNvSpPr txBox="1"/>
           <p:nvPr/>
         </p:nvSpPr>
@@ -19296,7 +19352,7 @@
       </p:sp>
       <p:sp>
         <p:nvSpPr>
-          <p:cNvPr id="496" name="Google Shape;496;p35"/>
+          <p:cNvPr id="499" name="Google Shape;499;p35"/>
           <p:cNvSpPr txBox="1"/>
           <p:nvPr/>
         </p:nvSpPr>
@@ -19346,7 +19402,7 @@
       </p:sp>
       <p:sp>
         <p:nvSpPr>
-          <p:cNvPr id="497" name="Google Shape;497;p35"/>
+          <p:cNvPr id="500" name="Google Shape;500;p35"/>
           <p:cNvSpPr txBox="1"/>
           <p:nvPr/>
         </p:nvSpPr>
@@ -19397,7 +19453,7 @@
       </p:sp>
       <p:sp>
         <p:nvSpPr>
-          <p:cNvPr id="498" name="Google Shape;498;p35"/>
+          <p:cNvPr id="501" name="Google Shape;501;p35"/>
           <p:cNvSpPr txBox="1"/>
           <p:nvPr/>
         </p:nvSpPr>
@@ -19458,7 +19514,7 @@
   <p:cSld>
     <p:spTree>
       <p:nvGrpSpPr>
-        <p:cNvPr id="502" name="Shape 502"/>
+        <p:cNvPr id="505" name="Shape 505"/>
         <p:cNvGrpSpPr/>
         <p:nvPr/>
       </p:nvGrpSpPr>
@@ -19472,7 +19528,7 @@
       </p:grpSpPr>
       <p:sp>
         <p:nvSpPr>
-          <p:cNvPr id="503" name="Google Shape;503;p36"/>
+          <p:cNvPr id="506" name="Google Shape;506;p36"/>
           <p:cNvSpPr txBox="1"/>
           <p:nvPr/>
         </p:nvSpPr>
@@ -19523,7 +19579,7 @@
       </p:sp>
       <p:sp>
         <p:nvSpPr>
-          <p:cNvPr id="504" name="Google Shape;504;p36"/>
+          <p:cNvPr id="507" name="Google Shape;507;p36"/>
           <p:cNvSpPr txBox="1"/>
           <p:nvPr/>
         </p:nvSpPr>
@@ -19574,7 +19630,7 @@
       </p:sp>
       <p:sp>
         <p:nvSpPr>
-          <p:cNvPr id="505" name="Google Shape;505;p36"/>
+          <p:cNvPr id="508" name="Google Shape;508;p36"/>
           <p:cNvSpPr txBox="1"/>
           <p:nvPr/>
         </p:nvSpPr>
@@ -19625,7 +19681,7 @@
       </p:sp>
       <p:sp>
         <p:nvSpPr>
-          <p:cNvPr id="506" name="Google Shape;506;p36"/>
+          <p:cNvPr id="509" name="Google Shape;509;p36"/>
           <p:cNvSpPr txBox="1"/>
           <p:nvPr/>
         </p:nvSpPr>
@@ -19675,7 +19731,7 @@
       </p:sp>
       <p:sp>
         <p:nvSpPr>
-          <p:cNvPr id="507" name="Google Shape;507;p36"/>
+          <p:cNvPr id="510" name="Google Shape;510;p36"/>
           <p:cNvSpPr txBox="1"/>
           <p:nvPr/>
         </p:nvSpPr>
@@ -19725,7 +19781,7 @@
       </p:sp>
       <p:sp>
         <p:nvSpPr>
-          <p:cNvPr id="508" name="Google Shape;508;p36"/>
+          <p:cNvPr id="511" name="Google Shape;511;p36"/>
           <p:cNvSpPr txBox="1"/>
           <p:nvPr/>
         </p:nvSpPr>
@@ -19776,7 +19832,7 @@
       </p:sp>
       <p:sp>
         <p:nvSpPr>
-          <p:cNvPr id="509" name="Google Shape;509;p36"/>
+          <p:cNvPr id="512" name="Google Shape;512;p36"/>
           <p:cNvSpPr txBox="1"/>
           <p:nvPr/>
         </p:nvSpPr>
@@ -19827,7 +19883,7 @@
       </p:sp>
       <p:sp>
         <p:nvSpPr>
-          <p:cNvPr id="510" name="Google Shape;510;p36"/>
+          <p:cNvPr id="513" name="Google Shape;513;p36"/>
           <p:cNvSpPr txBox="1"/>
           <p:nvPr/>
         </p:nvSpPr>
@@ -19878,7 +19934,7 @@
       </p:sp>
       <p:sp>
         <p:nvSpPr>
-          <p:cNvPr id="511" name="Google Shape;511;p36"/>
+          <p:cNvPr id="514" name="Google Shape;514;p36"/>
           <p:cNvSpPr txBox="1"/>
           <p:nvPr/>
         </p:nvSpPr>
@@ -19930,7 +19986,7 @@
       </p:sp>
       <p:sp>
         <p:nvSpPr>
-          <p:cNvPr id="512" name="Google Shape;512;p36"/>
+          <p:cNvPr id="515" name="Google Shape;515;p36"/>
           <p:cNvSpPr txBox="1"/>
           <p:nvPr/>
         </p:nvSpPr>
@@ -19980,7 +20036,7 @@
       </p:sp>
       <p:sp>
         <p:nvSpPr>
-          <p:cNvPr id="513" name="Google Shape;513;p36"/>
+          <p:cNvPr id="516" name="Google Shape;516;p36"/>
           <p:cNvSpPr txBox="1"/>
           <p:nvPr/>
         </p:nvSpPr>
@@ -20030,7 +20086,7 @@
       </p:sp>
       <p:sp>
         <p:nvSpPr>
-          <p:cNvPr id="514" name="Google Shape;514;p36"/>
+          <p:cNvPr id="517" name="Google Shape;517;p36"/>
           <p:cNvSpPr txBox="1"/>
           <p:nvPr/>
         </p:nvSpPr>
@@ -20081,7 +20137,7 @@
       </p:sp>
       <p:sp>
         <p:nvSpPr>
-          <p:cNvPr id="515" name="Google Shape;515;p36"/>
+          <p:cNvPr id="518" name="Google Shape;518;p36"/>
           <p:cNvSpPr txBox="1"/>
           <p:nvPr/>
         </p:nvSpPr>
@@ -20132,7 +20188,7 @@
       </p:sp>
       <p:sp>
         <p:nvSpPr>
-          <p:cNvPr id="516" name="Google Shape;516;p36"/>
+          <p:cNvPr id="519" name="Google Shape;519;p36"/>
           <p:cNvSpPr txBox="1"/>
           <p:nvPr/>
         </p:nvSpPr>
@@ -20183,7 +20239,7 @@
       </p:sp>
       <p:sp>
         <p:nvSpPr>
-          <p:cNvPr id="517" name="Google Shape;517;p36"/>
+          <p:cNvPr id="520" name="Google Shape;520;p36"/>
           <p:cNvSpPr txBox="1"/>
           <p:nvPr/>
         </p:nvSpPr>
@@ -20235,7 +20291,7 @@
       </p:sp>
       <p:sp>
         <p:nvSpPr>
-          <p:cNvPr id="518" name="Google Shape;518;p36"/>
+          <p:cNvPr id="521" name="Google Shape;521;p36"/>
           <p:cNvSpPr txBox="1"/>
           <p:nvPr/>
         </p:nvSpPr>
@@ -20285,7 +20341,7 @@
       </p:sp>
       <p:sp>
         <p:nvSpPr>
-          <p:cNvPr id="519" name="Google Shape;519;p36"/>
+          <p:cNvPr id="522" name="Google Shape;522;p36"/>
           <p:cNvSpPr txBox="1"/>
           <p:nvPr/>
         </p:nvSpPr>
@@ -20335,7 +20391,7 @@
       </p:sp>
       <p:sp>
         <p:nvSpPr>
-          <p:cNvPr id="520" name="Google Shape;520;p36"/>
+          <p:cNvPr id="523" name="Google Shape;523;p36"/>
           <p:cNvSpPr txBox="1"/>
           <p:nvPr/>
         </p:nvSpPr>
@@ -20386,7 +20442,7 @@
       </p:sp>
       <p:sp>
         <p:nvSpPr>
-          <p:cNvPr id="521" name="Google Shape;521;p36"/>
+          <p:cNvPr id="524" name="Google Shape;524;p36"/>
           <p:cNvSpPr txBox="1"/>
           <p:nvPr/>
         </p:nvSpPr>
@@ -20437,7 +20493,7 @@
       </p:sp>
       <p:sp>
         <p:nvSpPr>
-          <p:cNvPr id="522" name="Google Shape;522;p36"/>
+          <p:cNvPr id="525" name="Google Shape;525;p36"/>
           <p:cNvSpPr txBox="1"/>
           <p:nvPr/>
         </p:nvSpPr>
@@ -20488,7 +20544,7 @@
       </p:sp>
       <p:sp>
         <p:nvSpPr>
-          <p:cNvPr id="523" name="Google Shape;523;p36"/>
+          <p:cNvPr id="526" name="Google Shape;526;p36"/>
           <p:cNvSpPr txBox="1"/>
           <p:nvPr/>
         </p:nvSpPr>
@@ -20540,7 +20596,7 @@
       </p:sp>
       <p:sp>
         <p:nvSpPr>
-          <p:cNvPr id="524" name="Google Shape;524;p36"/>
+          <p:cNvPr id="527" name="Google Shape;527;p36"/>
           <p:cNvSpPr txBox="1"/>
           <p:nvPr/>
         </p:nvSpPr>
@@ -20590,7 +20646,7 @@
       </p:sp>
       <p:sp>
         <p:nvSpPr>
-          <p:cNvPr id="525" name="Google Shape;525;p36"/>
+          <p:cNvPr id="528" name="Google Shape;528;p36"/>
           <p:cNvSpPr txBox="1"/>
           <p:nvPr/>
         </p:nvSpPr>
@@ -20640,7 +20696,7 @@
       </p:sp>
       <p:sp>
         <p:nvSpPr>
-          <p:cNvPr id="526" name="Google Shape;526;p36"/>
+          <p:cNvPr id="529" name="Google Shape;529;p36"/>
           <p:cNvSpPr txBox="1"/>
           <p:nvPr/>
         </p:nvSpPr>
@@ -20691,7 +20747,7 @@
       </p:sp>
       <p:sp>
         <p:nvSpPr>
-          <p:cNvPr id="527" name="Google Shape;527;p36"/>
+          <p:cNvPr id="530" name="Google Shape;530;p36"/>
           <p:cNvSpPr txBox="1"/>
           <p:nvPr/>
         </p:nvSpPr>
@@ -20742,7 +20798,7 @@
       </p:sp>
       <p:sp>
         <p:nvSpPr>
-          <p:cNvPr id="528" name="Google Shape;528;p36"/>
+          <p:cNvPr id="531" name="Google Shape;531;p36"/>
           <p:cNvSpPr txBox="1"/>
           <p:nvPr/>
         </p:nvSpPr>
@@ -20793,7 +20849,7 @@
       </p:sp>
       <p:sp>
         <p:nvSpPr>
-          <p:cNvPr id="529" name="Google Shape;529;p36"/>
+          <p:cNvPr id="532" name="Google Shape;532;p36"/>
           <p:cNvSpPr txBox="1"/>
           <p:nvPr/>
         </p:nvSpPr>
@@ -20845,7 +20901,7 @@
       </p:sp>
       <p:sp>
         <p:nvSpPr>
-          <p:cNvPr id="530" name="Google Shape;530;p36"/>
+          <p:cNvPr id="533" name="Google Shape;533;p36"/>
           <p:cNvSpPr txBox="1"/>
           <p:nvPr/>
         </p:nvSpPr>
@@ -20895,7 +20951,7 @@
       </p:sp>
       <p:sp>
         <p:nvSpPr>
-          <p:cNvPr id="531" name="Google Shape;531;p36"/>
+          <p:cNvPr id="534" name="Google Shape;534;p36"/>
           <p:cNvSpPr txBox="1"/>
           <p:nvPr/>
         </p:nvSpPr>
@@ -27737,7 +27793,7 @@
         <p:spPr>
           <a:xfrm>
             <a:off x="0" y="0"/>
-            <a:ext cx="9144095" cy="5143500"/>
+            <a:ext cx="9144000" cy="284700"/>
           </a:xfrm>
           <a:prstGeom prst="rect">
             <a:avLst/>
@@ -27765,7 +27821,16 @@
               <a:buNone/>
             </a:pPr>
             <a:r>
-              <a:t/>
+              <a:rPr lang="zh-TW">
+                <a:solidFill>
+                  <a:schemeClr val="dk1"/>
+                </a:solidFill>
+                <a:latin typeface="Calibri"/>
+                <a:ea typeface="Calibri"/>
+                <a:cs typeface="Calibri"/>
+                <a:sym typeface="Calibri"/>
+              </a:rPr>
+              <a:t>Perfect Strike</a:t>
             </a:r>
             <a:endParaRPr sz="1400">
               <a:solidFill>
@@ -28868,8 +28933,8 @@
         </p:nvSpPr>
         <p:spPr>
           <a:xfrm>
-            <a:off x="6516797" y="1988820"/>
-            <a:ext cx="2263730" cy="2400300"/>
+            <a:off x="6516800" y="1702374"/>
+            <a:ext cx="2263800" cy="1656600"/>
           </a:xfrm>
           <a:prstGeom prst="rect">
             <a:avLst/>
@@ -28883,7 +28948,7 @@
         </p:spPr>
         <p:txBody>
           <a:bodyPr anchorCtr="0" anchor="t" bIns="34275" lIns="68575" spcFirstLastPara="1" rIns="68575" wrap="square" tIns="34275">
-            <a:spAutoFit/>
+            <a:noAutofit/>
           </a:bodyPr>
           <a:lstStyle/>
           <a:p>
@@ -28919,8 +28984,8 @@
         </p:nvSpPr>
         <p:spPr>
           <a:xfrm>
-            <a:off x="6585395" y="2057400"/>
-            <a:ext cx="2126534" cy="240030"/>
+            <a:off x="6585395" y="1770876"/>
+            <a:ext cx="2126400" cy="198900"/>
           </a:xfrm>
           <a:prstGeom prst="rect">
             <a:avLst/>
@@ -28969,8 +29034,8 @@
         </p:nvSpPr>
         <p:spPr>
           <a:xfrm>
-            <a:off x="6619694" y="2345436"/>
-            <a:ext cx="2057936" cy="274320"/>
+            <a:off x="6619694" y="2058912"/>
+            <a:ext cx="2058000" cy="183600"/>
           </a:xfrm>
           <a:prstGeom prst="rect">
             <a:avLst/>
@@ -29019,8 +29084,8 @@
         </p:nvSpPr>
         <p:spPr>
           <a:xfrm>
-            <a:off x="6619694" y="2702052"/>
-            <a:ext cx="2057936" cy="274320"/>
+            <a:off x="6619694" y="2415528"/>
+            <a:ext cx="2058000" cy="183600"/>
           </a:xfrm>
           <a:prstGeom prst="rect">
             <a:avLst/>
@@ -29069,8 +29134,8 @@
         </p:nvSpPr>
         <p:spPr>
           <a:xfrm>
-            <a:off x="6619694" y="3058668"/>
-            <a:ext cx="2057936" cy="274320"/>
+            <a:off x="6619694" y="2772144"/>
+            <a:ext cx="2058000" cy="183600"/>
           </a:xfrm>
           <a:prstGeom prst="rect">
             <a:avLst/>
@@ -29119,8 +29184,8 @@
         </p:nvSpPr>
         <p:spPr>
           <a:xfrm>
-            <a:off x="6619694" y="3415284"/>
-            <a:ext cx="2057936" cy="274320"/>
+            <a:off x="6619694" y="3128760"/>
+            <a:ext cx="2058000" cy="183600"/>
           </a:xfrm>
           <a:prstGeom prst="rect">
             <a:avLst/>
@@ -29158,6 +29223,98 @@
               <a:t>paddleocr==2.7.3</a:t>
             </a:r>
             <a:endParaRPr sz="1100"/>
+          </a:p>
+        </p:txBody>
+      </p:sp>
+      <p:sp>
+        <p:nvSpPr>
+          <p:cNvPr id="318" name="Google Shape;318;p30"/>
+          <p:cNvSpPr txBox="1"/>
+          <p:nvPr/>
+        </p:nvSpPr>
+        <p:spPr>
+          <a:xfrm>
+            <a:off x="5619050" y="923088"/>
+            <a:ext cx="3283500" cy="431100"/>
+          </a:xfrm>
+          <a:prstGeom prst="rect">
+            <a:avLst/>
+          </a:prstGeom>
+          <a:solidFill>
+            <a:srgbClr val="DDDDEE"/>
+          </a:solidFill>
+          <a:ln>
+            <a:noFill/>
+          </a:ln>
+        </p:spPr>
+        <p:txBody>
+          <a:bodyPr anchorCtr="0" anchor="t" bIns="91425" lIns="91425" spcFirstLastPara="1" rIns="91425" wrap="square" tIns="91425">
+            <a:spAutoFit/>
+          </a:bodyPr>
+          <a:lstStyle/>
+          <a:p>
+            <a:pPr indent="0" lvl="0" marL="0" rtl="0" algn="l">
+              <a:spcBef>
+                <a:spcPts val="0"/>
+              </a:spcBef>
+              <a:spcAft>
+                <a:spcPts val="0"/>
+              </a:spcAft>
+              <a:buNone/>
+            </a:pPr>
+            <a:r>
+              <a:rPr lang="zh-TW" sz="800">
+                <a:solidFill>
+                  <a:schemeClr val="dk1"/>
+                </a:solidFill>
+                <a:latin typeface="Calibri"/>
+                <a:ea typeface="Calibri"/>
+                <a:cs typeface="Calibri"/>
+                <a:sym typeface="Calibri"/>
+              </a:rPr>
+              <a:t>更詳細的架設環境說明</a:t>
+            </a:r>
+            <a:endParaRPr sz="800">
+              <a:solidFill>
+                <a:schemeClr val="dk1"/>
+              </a:solidFill>
+              <a:latin typeface="Calibri"/>
+              <a:ea typeface="Calibri"/>
+              <a:cs typeface="Calibri"/>
+              <a:sym typeface="Calibri"/>
+            </a:endParaRPr>
+          </a:p>
+          <a:p>
+            <a:pPr indent="0" lvl="0" marL="0" rtl="0" algn="l">
+              <a:spcBef>
+                <a:spcPts val="0"/>
+              </a:spcBef>
+              <a:spcAft>
+                <a:spcPts val="0"/>
+              </a:spcAft>
+              <a:buNone/>
+            </a:pPr>
+            <a:r>
+              <a:rPr lang="zh-TW" sz="800">
+                <a:solidFill>
+                  <a:schemeClr val="dk1"/>
+                </a:solidFill>
+                <a:latin typeface="Calibri"/>
+                <a:ea typeface="Calibri"/>
+                <a:cs typeface="Calibri"/>
+                <a:sym typeface="Calibri"/>
+              </a:rPr>
+              <a:t>check ：slot-classifier\docs\python_environment_install_guide.html</a:t>
+            </a:r>
+            <a:endParaRPr sz="800">
+              <a:solidFill>
+                <a:schemeClr val="dk1"/>
+              </a:solidFill>
+              <a:latin typeface="Calibri"/>
+              <a:ea typeface="Calibri"/>
+              <a:cs typeface="Calibri"/>
+              <a:sym typeface="Calibri"/>
+            </a:endParaRPr>
           </a:p>
         </p:txBody>
       </p:sp>
@@ -29174,7 +29331,7 @@
   <p:cSld>
     <p:spTree>
       <p:nvGrpSpPr>
-        <p:cNvPr id="321" name="Shape 321"/>
+        <p:cNvPr id="322" name="Shape 322"/>
         <p:cNvGrpSpPr/>
         <p:nvPr/>
       </p:nvGrpSpPr>
@@ -29188,7 +29345,7 @@
       </p:grpSpPr>
       <p:sp>
         <p:nvSpPr>
-          <p:cNvPr id="322" name="Google Shape;322;p31"/>
+          <p:cNvPr id="323" name="Google Shape;323;p31"/>
           <p:cNvSpPr txBox="1"/>
           <p:nvPr/>
         </p:nvSpPr>
@@ -29239,7 +29396,7 @@
       </p:sp>
       <p:sp>
         <p:nvSpPr>
-          <p:cNvPr id="323" name="Google Shape;323;p31"/>
+          <p:cNvPr id="324" name="Google Shape;324;p31"/>
           <p:cNvSpPr txBox="1"/>
           <p:nvPr/>
         </p:nvSpPr>
@@ -29290,7 +29447,7 @@
       </p:sp>
       <p:sp>
         <p:nvSpPr>
-          <p:cNvPr id="324" name="Google Shape;324;p31"/>
+          <p:cNvPr id="325" name="Google Shape;325;p31"/>
           <p:cNvSpPr txBox="1"/>
           <p:nvPr/>
         </p:nvSpPr>
@@ -29341,7 +29498,7 @@
       </p:sp>
       <p:sp>
         <p:nvSpPr>
-          <p:cNvPr id="325" name="Google Shape;325;p31"/>
+          <p:cNvPr id="326" name="Google Shape;326;p31"/>
           <p:cNvSpPr txBox="1"/>
           <p:nvPr/>
         </p:nvSpPr>
@@ -29391,7 +29548,7 @@
       </p:sp>
       <p:sp>
         <p:nvSpPr>
-          <p:cNvPr id="326" name="Google Shape;326;p31"/>
+          <p:cNvPr id="327" name="Google Shape;327;p31"/>
           <p:cNvSpPr txBox="1"/>
           <p:nvPr/>
         </p:nvSpPr>
@@ -29441,7 +29598,7 @@
       </p:sp>
       <p:sp>
         <p:nvSpPr>
-          <p:cNvPr id="327" name="Google Shape;327;p31"/>
+          <p:cNvPr id="328" name="Google Shape;328;p31"/>
           <p:cNvSpPr txBox="1"/>
           <p:nvPr/>
         </p:nvSpPr>
@@ -29498,7 +29655,7 @@
       </p:sp>
       <p:sp>
         <p:nvSpPr>
-          <p:cNvPr id="328" name="Google Shape;328;p31"/>
+          <p:cNvPr id="329" name="Google Shape;329;p31"/>
           <p:cNvSpPr txBox="1"/>
           <p:nvPr/>
         </p:nvSpPr>
@@ -29548,7 +29705,7 @@
       </p:sp>
       <p:sp>
         <p:nvSpPr>
-          <p:cNvPr id="329" name="Google Shape;329;p31"/>
+          <p:cNvPr id="330" name="Google Shape;330;p31"/>
           <p:cNvSpPr txBox="1"/>
           <p:nvPr/>
         </p:nvSpPr>
@@ -29600,7 +29757,7 @@
       </p:sp>
       <p:sp>
         <p:nvSpPr>
-          <p:cNvPr id="330" name="Google Shape;330;p31"/>
+          <p:cNvPr id="331" name="Google Shape;331;p31"/>
           <p:cNvSpPr txBox="1"/>
           <p:nvPr/>
         </p:nvSpPr>
@@ -29650,14 +29807,14 @@
       </p:sp>
       <p:sp>
         <p:nvSpPr>
-          <p:cNvPr id="331" name="Google Shape;331;p31"/>
+          <p:cNvPr id="332" name="Google Shape;332;p31"/>
           <p:cNvSpPr txBox="1"/>
           <p:nvPr/>
         </p:nvSpPr>
         <p:spPr>
           <a:xfrm>
-            <a:off x="836894" y="1378457"/>
-            <a:ext cx="5830818" cy="260604"/>
+            <a:off x="836894" y="1347482"/>
+            <a:ext cx="5830800" cy="352800"/>
           </a:xfrm>
           <a:prstGeom prst="rect">
             <a:avLst/>
@@ -29694,13 +29851,53 @@
               </a:rPr>
               <a:t>將競品遊戲影片（.mp4）放入以下資料夾，支援多個影片一次處理</a:t>
             </a:r>
-            <a:endParaRPr sz="1100"/>
-          </a:p>
-        </p:txBody>
-      </p:sp>
-      <p:sp>
-        <p:nvSpPr>
-          <p:cNvPr id="332" name="Google Shape;332;p31"/>
+            <a:endParaRPr sz="900">
+              <a:solidFill>
+                <a:srgbClr val="2D2D2D"/>
+              </a:solidFill>
+              <a:latin typeface="Calibri"/>
+              <a:ea typeface="Calibri"/>
+              <a:cs typeface="Calibri"/>
+              <a:sym typeface="Calibri"/>
+            </a:endParaRPr>
+          </a:p>
+          <a:p>
+            <a:pPr indent="0" lvl="0" marL="0" marR="0" rtl="0" algn="l">
+              <a:spcBef>
+                <a:spcPts val="0"/>
+              </a:spcBef>
+              <a:spcAft>
+                <a:spcPts val="0"/>
+              </a:spcAft>
+              <a:buNone/>
+            </a:pPr>
+            <a:r>
+              <a:rPr lang="zh-TW" sz="900">
+                <a:solidFill>
+                  <a:srgbClr val="2D2D2D"/>
+                </a:solidFill>
+                <a:latin typeface="Calibri"/>
+                <a:ea typeface="Calibri"/>
+                <a:cs typeface="Calibri"/>
+                <a:sym typeface="Calibri"/>
+              </a:rPr>
+              <a:t>請確保影片錄製完整，包含競品分析所需資料</a:t>
+            </a:r>
+            <a:endParaRPr sz="900">
+              <a:solidFill>
+                <a:srgbClr val="2D2D2D"/>
+              </a:solidFill>
+              <a:latin typeface="Calibri"/>
+              <a:ea typeface="Calibri"/>
+              <a:cs typeface="Calibri"/>
+              <a:sym typeface="Calibri"/>
+            </a:endParaRPr>
+          </a:p>
+        </p:txBody>
+      </p:sp>
+      <p:sp>
+        <p:nvSpPr>
+          <p:cNvPr id="333" name="Google Shape;333;p31"/>
           <p:cNvSpPr txBox="1"/>
           <p:nvPr/>
         </p:nvSpPr>
@@ -29757,7 +29954,7 @@
       </p:sp>
       <p:sp>
         <p:nvSpPr>
-          <p:cNvPr id="333" name="Google Shape;333;p31"/>
+          <p:cNvPr id="334" name="Google Shape;334;p31"/>
           <p:cNvSpPr txBox="1"/>
           <p:nvPr/>
         </p:nvSpPr>
@@ -29807,7 +30004,7 @@
       </p:sp>
       <p:sp>
         <p:nvSpPr>
-          <p:cNvPr id="334" name="Google Shape;334;p31"/>
+          <p:cNvPr id="335" name="Google Shape;335;p31"/>
           <p:cNvSpPr txBox="1"/>
           <p:nvPr/>
         </p:nvSpPr>
@@ -29858,7 +30055,7 @@
       </p:sp>
       <p:sp>
         <p:nvSpPr>
-          <p:cNvPr id="335" name="Google Shape;335;p31"/>
+          <p:cNvPr id="336" name="Google Shape;336;p31"/>
           <p:cNvSpPr txBox="1"/>
           <p:nvPr/>
         </p:nvSpPr>
@@ -29910,7 +30107,7 @@
       </p:sp>
       <p:sp>
         <p:nvSpPr>
-          <p:cNvPr id="336" name="Google Shape;336;p31"/>
+          <p:cNvPr id="337" name="Google Shape;337;p31"/>
           <p:cNvSpPr txBox="1"/>
           <p:nvPr/>
         </p:nvSpPr>
@@ -29960,7 +30157,7 @@
       </p:sp>
       <p:sp>
         <p:nvSpPr>
-          <p:cNvPr id="337" name="Google Shape;337;p31"/>
+          <p:cNvPr id="338" name="Google Shape;338;p31"/>
           <p:cNvSpPr txBox="1"/>
           <p:nvPr/>
         </p:nvSpPr>
@@ -30010,7 +30207,7 @@
       </p:sp>
       <p:sp>
         <p:nvSpPr>
-          <p:cNvPr id="338" name="Google Shape;338;p31"/>
+          <p:cNvPr id="339" name="Google Shape;339;p31"/>
           <p:cNvSpPr txBox="1"/>
           <p:nvPr/>
         </p:nvSpPr>
@@ -30067,14 +30264,14 @@
       </p:sp>
       <p:sp>
         <p:nvSpPr>
-          <p:cNvPr id="339" name="Google Shape;339;p31"/>
+          <p:cNvPr id="340" name="Google Shape;340;p31"/>
           <p:cNvSpPr txBox="1"/>
           <p:nvPr/>
         </p:nvSpPr>
         <p:spPr>
           <a:xfrm>
             <a:off x="960370" y="2962656"/>
-            <a:ext cx="4554898" cy="534924"/>
+            <a:ext cx="4554900" cy="321900"/>
           </a:xfrm>
           <a:prstGeom prst="rect">
             <a:avLst/>
@@ -30109,7 +30306,7 @@
                 <a:cs typeface="Consolas"/>
                 <a:sym typeface="Consolas"/>
               </a:rPr>
-              <a:t>.\\run_classifier.ps1</a:t>
+              <a:t>.\run_classifier.ps1</a:t>
             </a:r>
             <a:endParaRPr sz="1100"/>
           </a:p>
@@ -30133,7 +30330,55 @@
                 <a:cs typeface="Consolas"/>
                 <a:sym typeface="Consolas"/>
               </a:rPr>
-              <a:t>run_classify_and_symbols.bat  GameName</a:t>
+              <a:t>run_classify_and_symbols.bat</a:t>
+            </a:r>
+            <a:r>
+              <a:rPr lang="zh-TW" sz="800">
+                <a:solidFill>
+                  <a:srgbClr val="0E3A6E"/>
+                </a:solidFill>
+                <a:latin typeface="Consolas"/>
+                <a:ea typeface="Consolas"/>
+                <a:cs typeface="Consolas"/>
+                <a:sym typeface="Consolas"/>
+              </a:rPr>
+              <a:t> </a:t>
+            </a:r>
+            <a:r>
+              <a:rPr lang="zh-TW" sz="800">
+                <a:solidFill>
+                  <a:srgbClr val="0E3A6E"/>
+                </a:solidFill>
+                <a:latin typeface="Consolas"/>
+                <a:ea typeface="Consolas"/>
+                <a:cs typeface="Consolas"/>
+                <a:sym typeface="Consolas"/>
+              </a:rPr>
+              <a:t>"</a:t>
+            </a:r>
+            <a:r>
+              <a:rPr lang="zh-TW" sz="800">
+                <a:solidFill>
+                  <a:srgbClr val="0E3A6E"/>
+                </a:solidFill>
+                <a:latin typeface="Consolas"/>
+                <a:ea typeface="Consolas"/>
+                <a:cs typeface="Consolas"/>
+                <a:sym typeface="Consolas"/>
+              </a:rPr>
+              <a:t>GameName</a:t>
+            </a:r>
+            <a:r>
+              <a:rPr lang="zh-TW" sz="800">
+                <a:solidFill>
+                  <a:srgbClr val="0E3A6E"/>
+                </a:solidFill>
+                <a:latin typeface="Consolas"/>
+                <a:ea typeface="Consolas"/>
+                <a:cs typeface="Consolas"/>
+                <a:sym typeface="Consolas"/>
+              </a:rPr>
+              <a:t>"</a:t>
             </a:r>
             <a:endParaRPr sz="1100"/>
           </a:p>
@@ -30141,7 +30386,7 @@
       </p:sp>
       <p:sp>
         <p:nvSpPr>
-          <p:cNvPr id="340" name="Google Shape;340;p31"/>
+          <p:cNvPr id="341" name="Google Shape;341;p31"/>
           <p:cNvSpPr txBox="1"/>
           <p:nvPr/>
         </p:nvSpPr>
@@ -30192,7 +30437,7 @@
       </p:sp>
       <p:sp>
         <p:nvSpPr>
-          <p:cNvPr id="341" name="Google Shape;341;p31"/>
+          <p:cNvPr id="342" name="Google Shape;342;p31"/>
           <p:cNvSpPr txBox="1"/>
           <p:nvPr/>
         </p:nvSpPr>
@@ -30244,7 +30489,7 @@
       </p:sp>
       <p:sp>
         <p:nvSpPr>
-          <p:cNvPr id="342" name="Google Shape;342;p31"/>
+          <p:cNvPr id="343" name="Google Shape;343;p31"/>
           <p:cNvSpPr txBox="1"/>
           <p:nvPr/>
         </p:nvSpPr>
@@ -30294,7 +30539,7 @@
       </p:sp>
       <p:sp>
         <p:nvSpPr>
-          <p:cNvPr id="343" name="Google Shape;343;p31"/>
+          <p:cNvPr id="344" name="Google Shape;344;p31"/>
           <p:cNvSpPr txBox="1"/>
           <p:nvPr/>
         </p:nvSpPr>
@@ -30344,7 +30589,7 @@
       </p:sp>
       <p:sp>
         <p:nvSpPr>
-          <p:cNvPr id="344" name="Google Shape;344;p31"/>
+          <p:cNvPr id="345" name="Google Shape;345;p31"/>
           <p:cNvSpPr txBox="1"/>
           <p:nvPr/>
         </p:nvSpPr>
@@ -30401,7 +30646,7 @@
       </p:sp>
       <p:sp>
         <p:nvSpPr>
-          <p:cNvPr id="345" name="Google Shape;345;p31"/>
+          <p:cNvPr id="346" name="Google Shape;346;p31"/>
           <p:cNvSpPr txBox="1"/>
           <p:nvPr/>
         </p:nvSpPr>
@@ -30451,7 +30696,7 @@
       </p:sp>
       <p:sp>
         <p:nvSpPr>
-          <p:cNvPr id="346" name="Google Shape;346;p31"/>
+          <p:cNvPr id="347" name="Google Shape;347;p31"/>
           <p:cNvSpPr txBox="1"/>
           <p:nvPr/>
         </p:nvSpPr>
@@ -30502,7 +30747,7 @@
       </p:sp>
       <p:sp>
         <p:nvSpPr>
-          <p:cNvPr id="347" name="Google Shape;347;p31"/>
+          <p:cNvPr id="348" name="Google Shape;348;p31"/>
           <p:cNvSpPr txBox="1"/>
           <p:nvPr/>
         </p:nvSpPr>
@@ -30552,7 +30797,7 @@
       </p:sp>
       <p:sp>
         <p:nvSpPr>
-          <p:cNvPr id="348" name="Google Shape;348;p31"/>
+          <p:cNvPr id="349" name="Google Shape;349;p31"/>
           <p:cNvSpPr txBox="1"/>
           <p:nvPr/>
         </p:nvSpPr>
@@ -30602,7 +30847,7 @@
       </p:sp>
       <p:sp>
         <p:nvSpPr>
-          <p:cNvPr id="349" name="Google Shape;349;p31"/>
+          <p:cNvPr id="350" name="Google Shape;350;p31"/>
           <p:cNvSpPr txBox="1"/>
           <p:nvPr/>
         </p:nvSpPr>
@@ -30652,7 +30897,7 @@
       </p:sp>
       <p:sp>
         <p:nvSpPr>
-          <p:cNvPr id="350" name="Google Shape;350;p31"/>
+          <p:cNvPr id="351" name="Google Shape;351;p31"/>
           <p:cNvSpPr txBox="1"/>
           <p:nvPr/>
         </p:nvSpPr>
@@ -30702,7 +30947,7 @@
       </p:sp>
       <p:sp>
         <p:nvSpPr>
-          <p:cNvPr id="351" name="Google Shape;351;p31"/>
+          <p:cNvPr id="352" name="Google Shape;352;p31"/>
           <p:cNvSpPr txBox="1"/>
           <p:nvPr/>
         </p:nvSpPr>
@@ -30752,7 +30997,7 @@
       </p:sp>
       <p:sp>
         <p:nvSpPr>
-          <p:cNvPr id="352" name="Google Shape;352;p31"/>
+          <p:cNvPr id="353" name="Google Shape;353;p31"/>
           <p:cNvSpPr txBox="1"/>
           <p:nvPr/>
         </p:nvSpPr>
@@ -30802,7 +31047,7 @@
       </p:sp>
       <p:sp>
         <p:nvSpPr>
-          <p:cNvPr id="353" name="Google Shape;353;p31"/>
+          <p:cNvPr id="354" name="Google Shape;354;p31"/>
           <p:cNvSpPr txBox="1"/>
           <p:nvPr/>
         </p:nvSpPr>
@@ -30852,7 +31097,7 @@
       </p:sp>
       <p:sp>
         <p:nvSpPr>
-          <p:cNvPr id="354" name="Google Shape;354;p31"/>
+          <p:cNvPr id="355" name="Google Shape;355;p31"/>
           <p:cNvSpPr txBox="1"/>
           <p:nvPr/>
         </p:nvSpPr>
@@ -30902,7 +31147,7 @@
       </p:sp>
       <p:sp>
         <p:nvSpPr>
-          <p:cNvPr id="355" name="Google Shape;355;p31"/>
+          <p:cNvPr id="356" name="Google Shape;356;p31"/>
           <p:cNvSpPr txBox="1"/>
           <p:nvPr/>
         </p:nvSpPr>
@@ -30952,7 +31197,7 @@
       </p:sp>
       <p:sp>
         <p:nvSpPr>
-          <p:cNvPr id="356" name="Google Shape;356;p31"/>
+          <p:cNvPr id="357" name="Google Shape;357;p31"/>
           <p:cNvSpPr txBox="1"/>
           <p:nvPr/>
         </p:nvSpPr>
@@ -31002,7 +31247,7 @@
       </p:sp>
       <p:sp>
         <p:nvSpPr>
-          <p:cNvPr id="357" name="Google Shape;357;p31"/>
+          <p:cNvPr id="358" name="Google Shape;358;p31"/>
           <p:cNvSpPr txBox="1"/>
           <p:nvPr/>
         </p:nvSpPr>
@@ -31047,6 +31292,122 @@
               <a:t>  └ report.html</a:t>
             </a:r>
             <a:endParaRPr sz="1100"/>
+          </a:p>
+        </p:txBody>
+      </p:sp>
+      <p:sp>
+        <p:nvSpPr>
+          <p:cNvPr id="359" name="Google Shape;359;p31"/>
+          <p:cNvSpPr txBox="1"/>
+          <p:nvPr/>
+        </p:nvSpPr>
+        <p:spPr>
+          <a:xfrm>
+            <a:off x="4302575" y="91275"/>
+            <a:ext cx="3283500" cy="431100"/>
+          </a:xfrm>
+          <a:prstGeom prst="rect">
+            <a:avLst/>
+          </a:prstGeom>
+          <a:solidFill>
+            <a:srgbClr val="DDDDEE"/>
+          </a:solidFill>
+          <a:ln>
+            <a:noFill/>
+          </a:ln>
+        </p:spPr>
+        <p:txBody>
+          <a:bodyPr anchorCtr="0" anchor="t" bIns="91425" lIns="91425" spcFirstLastPara="1" rIns="91425" wrap="square" tIns="91425">
+            <a:spAutoFit/>
+          </a:bodyPr>
+          <a:lstStyle/>
+          <a:p>
+            <a:pPr indent="0" lvl="0" marL="0" rtl="0" algn="l">
+              <a:spcBef>
+                <a:spcPts val="0"/>
+              </a:spcBef>
+              <a:spcAft>
+                <a:spcPts val="0"/>
+              </a:spcAft>
+              <a:buNone/>
+            </a:pPr>
+            <a:r>
+              <a:rPr lang="zh-TW" sz="800">
+                <a:solidFill>
+                  <a:schemeClr val="dk1"/>
+                </a:solidFill>
+                <a:latin typeface="Calibri"/>
+                <a:ea typeface="Calibri"/>
+                <a:cs typeface="Calibri"/>
+                <a:sym typeface="Calibri"/>
+              </a:rPr>
+              <a:t>更詳細的</a:t>
+            </a:r>
+            <a:r>
+              <a:rPr lang="zh-TW" sz="800">
+                <a:solidFill>
+                  <a:schemeClr val="dk1"/>
+                </a:solidFill>
+                <a:latin typeface="Calibri"/>
+                <a:ea typeface="Calibri"/>
+                <a:cs typeface="Calibri"/>
+                <a:sym typeface="Calibri"/>
+              </a:rPr>
+              <a:t>使用方式</a:t>
+            </a:r>
+            <a:endParaRPr sz="800">
+              <a:solidFill>
+                <a:schemeClr val="dk1"/>
+              </a:solidFill>
+              <a:latin typeface="Calibri"/>
+              <a:ea typeface="Calibri"/>
+              <a:cs typeface="Calibri"/>
+              <a:sym typeface="Calibri"/>
+            </a:endParaRPr>
+          </a:p>
+          <a:p>
+            <a:pPr indent="0" lvl="0" marL="0" rtl="0" algn="l">
+              <a:spcBef>
+                <a:spcPts val="0"/>
+              </a:spcBef>
+              <a:spcAft>
+                <a:spcPts val="0"/>
+              </a:spcAft>
+              <a:buNone/>
+            </a:pPr>
+            <a:r>
+              <a:rPr lang="zh-TW" sz="800">
+                <a:solidFill>
+                  <a:schemeClr val="dk1"/>
+                </a:solidFill>
+                <a:latin typeface="Calibri"/>
+                <a:ea typeface="Calibri"/>
+                <a:cs typeface="Calibri"/>
+                <a:sym typeface="Calibri"/>
+              </a:rPr>
+              <a:t>check ：slot-classifier\docs\</a:t>
+            </a:r>
+            <a:r>
+              <a:rPr lang="zh-TW" sz="800">
+                <a:solidFill>
+                  <a:schemeClr val="dk1"/>
+                </a:solidFill>
+                <a:latin typeface="Calibri"/>
+                <a:ea typeface="Calibri"/>
+                <a:cs typeface="Calibri"/>
+                <a:sym typeface="Calibri"/>
+              </a:rPr>
+              <a:t>slot_classifier_usage_guide.html (執行分類)</a:t>
+            </a:r>
+            <a:endParaRPr sz="800">
+              <a:solidFill>
+                <a:schemeClr val="dk1"/>
+              </a:solidFill>
+              <a:latin typeface="Calibri"/>
+              <a:ea typeface="Calibri"/>
+              <a:cs typeface="Calibri"/>
+              <a:sym typeface="Calibri"/>
+            </a:endParaRPr>
           </a:p>
         </p:txBody>
       </p:sp>
@@ -31063,7 +31424,7 @@
   <p:cSld>
     <p:spTree>
       <p:nvGrpSpPr>
-        <p:cNvPr id="361" name="Shape 361"/>
+        <p:cNvPr id="363" name="Shape 363"/>
         <p:cNvGrpSpPr/>
         <p:nvPr/>
       </p:nvGrpSpPr>
@@ -31077,7 +31438,7 @@
       </p:grpSpPr>
       <p:sp>
         <p:nvSpPr>
-          <p:cNvPr id="362" name="Google Shape;362;p32"/>
+          <p:cNvPr id="364" name="Google Shape;364;p32"/>
           <p:cNvSpPr txBox="1"/>
           <p:nvPr/>
         </p:nvSpPr>
@@ -31128,7 +31489,7 @@
       </p:sp>
       <p:sp>
         <p:nvSpPr>
-          <p:cNvPr id="363" name="Google Shape;363;p32"/>
+          <p:cNvPr id="365" name="Google Shape;365;p32"/>
           <p:cNvSpPr txBox="1"/>
           <p:nvPr/>
         </p:nvSpPr>
@@ -31179,7 +31540,7 @@
       </p:sp>
       <p:sp>
         <p:nvSpPr>
-          <p:cNvPr id="364" name="Google Shape;364;p32"/>
+          <p:cNvPr id="366" name="Google Shape;366;p32"/>
           <p:cNvSpPr txBox="1"/>
           <p:nvPr/>
         </p:nvSpPr>
@@ -31230,7 +31591,7 @@
       </p:sp>
       <p:sp>
         <p:nvSpPr>
-          <p:cNvPr id="365" name="Google Shape;365;p32"/>
+          <p:cNvPr id="367" name="Google Shape;367;p32"/>
           <p:cNvSpPr txBox="1"/>
           <p:nvPr/>
         </p:nvSpPr>
@@ -31280,7 +31641,7 @@
       </p:sp>
       <p:sp>
         <p:nvSpPr>
-          <p:cNvPr id="366" name="Google Shape;366;p32"/>
+          <p:cNvPr id="368" name="Google Shape;368;p32"/>
           <p:cNvSpPr txBox="1"/>
           <p:nvPr/>
         </p:nvSpPr>
@@ -31330,7 +31691,7 @@
       </p:sp>
       <p:sp>
         <p:nvSpPr>
-          <p:cNvPr id="367" name="Google Shape;367;p32"/>
+          <p:cNvPr id="369" name="Google Shape;369;p32"/>
           <p:cNvSpPr txBox="1"/>
           <p:nvPr/>
         </p:nvSpPr>
@@ -31387,7 +31748,7 @@
       </p:sp>
       <p:sp>
         <p:nvSpPr>
-          <p:cNvPr id="368" name="Google Shape;368;p32"/>
+          <p:cNvPr id="370" name="Google Shape;370;p32"/>
           <p:cNvSpPr txBox="1"/>
           <p:nvPr/>
         </p:nvSpPr>
@@ -31437,7 +31798,7 @@
       </p:sp>
       <p:sp>
         <p:nvSpPr>
-          <p:cNvPr id="369" name="Google Shape;369;p32"/>
+          <p:cNvPr id="371" name="Google Shape;371;p32"/>
           <p:cNvSpPr txBox="1"/>
           <p:nvPr/>
         </p:nvSpPr>
@@ -31488,7 +31849,7 @@
       </p:sp>
       <p:sp>
         <p:nvSpPr>
-          <p:cNvPr id="370" name="Google Shape;370;p32"/>
+          <p:cNvPr id="372" name="Google Shape;372;p32"/>
           <p:cNvSpPr txBox="1"/>
           <p:nvPr/>
         </p:nvSpPr>
@@ -31539,7 +31900,7 @@
       </p:sp>
       <p:sp>
         <p:nvSpPr>
-          <p:cNvPr id="371" name="Google Shape;371;p32"/>
+          <p:cNvPr id="373" name="Google Shape;373;p32"/>
           <p:cNvSpPr txBox="1"/>
           <p:nvPr/>
         </p:nvSpPr>
@@ -31589,7 +31950,7 @@
       </p:sp>
       <p:sp>
         <p:nvSpPr>
-          <p:cNvPr id="372" name="Google Shape;372;p32"/>
+          <p:cNvPr id="374" name="Google Shape;374;p32"/>
           <p:cNvSpPr txBox="1"/>
           <p:nvPr/>
         </p:nvSpPr>
@@ -31640,7 +32001,7 @@
       </p:sp>
       <p:sp>
         <p:nvSpPr>
-          <p:cNvPr id="373" name="Google Shape;373;p32"/>
+          <p:cNvPr id="375" name="Google Shape;375;p32"/>
           <p:cNvSpPr txBox="1"/>
           <p:nvPr/>
         </p:nvSpPr>
@@ -31692,7 +32053,7 @@
       </p:sp>
       <p:sp>
         <p:nvSpPr>
-          <p:cNvPr id="374" name="Google Shape;374;p32"/>
+          <p:cNvPr id="376" name="Google Shape;376;p32"/>
           <p:cNvSpPr txBox="1"/>
           <p:nvPr/>
         </p:nvSpPr>
@@ -31742,7 +32103,7 @@
       </p:sp>
       <p:sp>
         <p:nvSpPr>
-          <p:cNvPr id="375" name="Google Shape;375;p32"/>
+          <p:cNvPr id="377" name="Google Shape;377;p32"/>
           <p:cNvSpPr txBox="1"/>
           <p:nvPr/>
         </p:nvSpPr>
@@ -31792,7 +32153,7 @@
       </p:sp>
       <p:sp>
         <p:nvSpPr>
-          <p:cNvPr id="376" name="Google Shape;376;p32"/>
+          <p:cNvPr id="378" name="Google Shape;378;p32"/>
           <p:cNvSpPr txBox="1"/>
           <p:nvPr/>
         </p:nvSpPr>
@@ -31843,7 +32204,7 @@
       </p:sp>
       <p:sp>
         <p:nvSpPr>
-          <p:cNvPr id="377" name="Google Shape;377;p32"/>
+          <p:cNvPr id="379" name="Google Shape;379;p32"/>
           <p:cNvSpPr txBox="1"/>
           <p:nvPr/>
         </p:nvSpPr>
@@ -31895,7 +32256,7 @@
       </p:sp>
       <p:sp>
         <p:nvSpPr>
-          <p:cNvPr id="378" name="Google Shape;378;p32"/>
+          <p:cNvPr id="380" name="Google Shape;380;p32"/>
           <p:cNvSpPr txBox="1"/>
           <p:nvPr/>
         </p:nvSpPr>
@@ -31945,7 +32306,7 @@
       </p:sp>
       <p:sp>
         <p:nvSpPr>
-          <p:cNvPr id="379" name="Google Shape;379;p32"/>
+          <p:cNvPr id="381" name="Google Shape;381;p32"/>
           <p:cNvSpPr txBox="1"/>
           <p:nvPr/>
         </p:nvSpPr>
@@ -31995,7 +32356,7 @@
       </p:sp>
       <p:sp>
         <p:nvSpPr>
-          <p:cNvPr id="380" name="Google Shape;380;p32"/>
+          <p:cNvPr id="382" name="Google Shape;382;p32"/>
           <p:cNvSpPr txBox="1"/>
           <p:nvPr/>
         </p:nvSpPr>
@@ -32046,7 +32407,7 @@
       </p:sp>
       <p:sp>
         <p:nvSpPr>
-          <p:cNvPr id="381" name="Google Shape;381;p32"/>
+          <p:cNvPr id="383" name="Google Shape;383;p32"/>
           <p:cNvSpPr txBox="1"/>
           <p:nvPr/>
         </p:nvSpPr>
@@ -32098,7 +32459,7 @@
       </p:sp>
       <p:sp>
         <p:nvSpPr>
-          <p:cNvPr id="382" name="Google Shape;382;p32"/>
+          <p:cNvPr id="384" name="Google Shape;384;p32"/>
           <p:cNvSpPr txBox="1"/>
           <p:nvPr/>
         </p:nvSpPr>
@@ -32148,7 +32509,7 @@
       </p:sp>
       <p:sp>
         <p:nvSpPr>
-          <p:cNvPr id="383" name="Google Shape;383;p32"/>
+          <p:cNvPr id="385" name="Google Shape;385;p32"/>
           <p:cNvSpPr txBox="1"/>
           <p:nvPr/>
         </p:nvSpPr>
@@ -32198,7 +32559,7 @@
       </p:sp>
       <p:sp>
         <p:nvSpPr>
-          <p:cNvPr id="384" name="Google Shape;384;p32"/>
+          <p:cNvPr id="386" name="Google Shape;386;p32"/>
           <p:cNvSpPr txBox="1"/>
           <p:nvPr/>
         </p:nvSpPr>
@@ -32249,7 +32610,7 @@
       </p:sp>
       <p:sp>
         <p:nvSpPr>
-          <p:cNvPr id="385" name="Google Shape;385;p32"/>
+          <p:cNvPr id="387" name="Google Shape;387;p32"/>
           <p:cNvSpPr txBox="1"/>
           <p:nvPr/>
         </p:nvSpPr>
@@ -32301,7 +32662,7 @@
       </p:sp>
       <p:sp>
         <p:nvSpPr>
-          <p:cNvPr id="386" name="Google Shape;386;p32"/>
+          <p:cNvPr id="388" name="Google Shape;388;p32"/>
           <p:cNvSpPr txBox="1"/>
           <p:nvPr/>
         </p:nvSpPr>
@@ -32351,7 +32712,7 @@
       </p:sp>
       <p:sp>
         <p:nvSpPr>
-          <p:cNvPr id="387" name="Google Shape;387;p32"/>
+          <p:cNvPr id="389" name="Google Shape;389;p32"/>
           <p:cNvSpPr txBox="1"/>
           <p:nvPr/>
         </p:nvSpPr>
@@ -32401,7 +32762,7 @@
       </p:sp>
       <p:sp>
         <p:nvSpPr>
-          <p:cNvPr id="388" name="Google Shape;388;p32"/>
+          <p:cNvPr id="390" name="Google Shape;390;p32"/>
           <p:cNvSpPr txBox="1"/>
           <p:nvPr/>
         </p:nvSpPr>
@@ -32452,7 +32813,7 @@
       </p:sp>
       <p:sp>
         <p:nvSpPr>
-          <p:cNvPr id="389" name="Google Shape;389;p32"/>
+          <p:cNvPr id="391" name="Google Shape;391;p32"/>
           <p:cNvSpPr txBox="1"/>
           <p:nvPr/>
         </p:nvSpPr>
@@ -32503,7 +32864,7 @@
       </p:sp>
       <p:sp>
         <p:nvSpPr>
-          <p:cNvPr id="390" name="Google Shape;390;p32"/>
+          <p:cNvPr id="392" name="Google Shape;392;p32"/>
           <p:cNvSpPr txBox="1"/>
           <p:nvPr/>
         </p:nvSpPr>
@@ -32553,7 +32914,7 @@
       </p:sp>
       <p:sp>
         <p:nvSpPr>
-          <p:cNvPr id="391" name="Google Shape;391;p32"/>
+          <p:cNvPr id="393" name="Google Shape;393;p32"/>
           <p:cNvSpPr txBox="1"/>
           <p:nvPr/>
         </p:nvSpPr>
@@ -32603,7 +32964,7 @@
       </p:sp>
       <p:sp>
         <p:nvSpPr>
-          <p:cNvPr id="392" name="Google Shape;392;p32"/>
+          <p:cNvPr id="394" name="Google Shape;394;p32"/>
           <p:cNvSpPr txBox="1"/>
           <p:nvPr/>
         </p:nvSpPr>
@@ -32660,7 +33021,7 @@
       </p:sp>
       <p:sp>
         <p:nvSpPr>
-          <p:cNvPr id="393" name="Google Shape;393;p32"/>
+          <p:cNvPr id="395" name="Google Shape;395;p32"/>
           <p:cNvSpPr txBox="1"/>
           <p:nvPr/>
         </p:nvSpPr>
@@ -32710,7 +33071,7 @@
       </p:sp>
       <p:sp>
         <p:nvSpPr>
-          <p:cNvPr id="394" name="Google Shape;394;p32"/>
+          <p:cNvPr id="396" name="Google Shape;396;p32"/>
           <p:cNvSpPr txBox="1"/>
           <p:nvPr/>
         </p:nvSpPr>
@@ -32760,7 +33121,7 @@
       </p:sp>
       <p:sp>
         <p:nvSpPr>
-          <p:cNvPr id="395" name="Google Shape;395;p32"/>
+          <p:cNvPr id="397" name="Google Shape;397;p32"/>
           <p:cNvSpPr txBox="1"/>
           <p:nvPr/>
         </p:nvSpPr>
@@ -32811,7 +33172,7 @@
       </p:sp>
       <p:sp>
         <p:nvSpPr>
-          <p:cNvPr id="396" name="Google Shape;396;p32"/>
+          <p:cNvPr id="398" name="Google Shape;398;p32"/>
           <p:cNvSpPr txBox="1"/>
           <p:nvPr/>
         </p:nvSpPr>
@@ -32863,7 +33224,7 @@
       </p:sp>
       <p:sp>
         <p:nvSpPr>
-          <p:cNvPr id="397" name="Google Shape;397;p32"/>
+          <p:cNvPr id="399" name="Google Shape;399;p32"/>
           <p:cNvSpPr txBox="1"/>
           <p:nvPr/>
         </p:nvSpPr>
@@ -32913,7 +33274,7 @@
       </p:sp>
       <p:sp>
         <p:nvSpPr>
-          <p:cNvPr id="398" name="Google Shape;398;p32"/>
+          <p:cNvPr id="400" name="Google Shape;400;p32"/>
           <p:cNvSpPr txBox="1"/>
           <p:nvPr/>
         </p:nvSpPr>
@@ -32963,7 +33324,7 @@
       </p:sp>
       <p:sp>
         <p:nvSpPr>
-          <p:cNvPr id="399" name="Google Shape;399;p32"/>
+          <p:cNvPr id="401" name="Google Shape;401;p32"/>
           <p:cNvSpPr txBox="1"/>
           <p:nvPr/>
         </p:nvSpPr>
@@ -33014,7 +33375,7 @@
       </p:sp>
       <p:sp>
         <p:nvSpPr>
-          <p:cNvPr id="400" name="Google Shape;400;p32"/>
+          <p:cNvPr id="402" name="Google Shape;402;p32"/>
           <p:cNvSpPr txBox="1"/>
           <p:nvPr/>
         </p:nvSpPr>
@@ -33066,7 +33427,7 @@
       </p:sp>
       <p:sp>
         <p:nvSpPr>
-          <p:cNvPr id="401" name="Google Shape;401;p32"/>
+          <p:cNvPr id="403" name="Google Shape;403;p32"/>
           <p:cNvSpPr txBox="1"/>
           <p:nvPr/>
         </p:nvSpPr>
@@ -33116,7 +33477,7 @@
       </p:sp>
       <p:sp>
         <p:nvSpPr>
-          <p:cNvPr id="402" name="Google Shape;402;p32"/>
+          <p:cNvPr id="404" name="Google Shape;404;p32"/>
           <p:cNvSpPr txBox="1"/>
           <p:nvPr/>
         </p:nvSpPr>
@@ -33166,7 +33527,7 @@
       </p:sp>
       <p:sp>
         <p:nvSpPr>
-          <p:cNvPr id="403" name="Google Shape;403;p32"/>
+          <p:cNvPr id="405" name="Google Shape;405;p32"/>
           <p:cNvSpPr txBox="1"/>
           <p:nvPr/>
         </p:nvSpPr>
@@ -33217,7 +33578,7 @@
       </p:sp>
       <p:sp>
         <p:nvSpPr>
-          <p:cNvPr id="404" name="Google Shape;404;p32"/>
+          <p:cNvPr id="406" name="Google Shape;406;p32"/>
           <p:cNvSpPr txBox="1"/>
           <p:nvPr/>
         </p:nvSpPr>
@@ -33269,7 +33630,7 @@
       </p:sp>
       <p:sp>
         <p:nvSpPr>
-          <p:cNvPr id="405" name="Google Shape;405;p32"/>
+          <p:cNvPr id="407" name="Google Shape;407;p32"/>
           <p:cNvSpPr txBox="1"/>
           <p:nvPr/>
         </p:nvSpPr>
@@ -33319,7 +33680,7 @@
       </p:sp>
       <p:sp>
         <p:nvSpPr>
-          <p:cNvPr id="406" name="Google Shape;406;p32"/>
+          <p:cNvPr id="408" name="Google Shape;408;p32"/>
           <p:cNvSpPr txBox="1"/>
           <p:nvPr/>
         </p:nvSpPr>
@@ -33380,7 +33741,7 @@
   <p:cSld>
     <p:spTree>
       <p:nvGrpSpPr>
-        <p:cNvPr id="410" name="Shape 410"/>
+        <p:cNvPr id="412" name="Shape 412"/>
         <p:cNvGrpSpPr/>
         <p:nvPr/>
       </p:nvGrpSpPr>
@@ -33394,7 +33755,7 @@
       </p:grpSpPr>
       <p:sp>
         <p:nvSpPr>
-          <p:cNvPr id="411" name="Google Shape;411;p33"/>
+          <p:cNvPr id="413" name="Google Shape;413;p33"/>
           <p:cNvSpPr txBox="1"/>
           <p:nvPr/>
         </p:nvSpPr>
@@ -33445,7 +33806,7 @@
       </p:sp>
       <p:sp>
         <p:nvSpPr>
-          <p:cNvPr id="412" name="Google Shape;412;p33"/>
+          <p:cNvPr id="414" name="Google Shape;414;p33"/>
           <p:cNvSpPr txBox="1"/>
           <p:nvPr/>
         </p:nvSpPr>
@@ -33496,7 +33857,7 @@
       </p:sp>
       <p:sp>
         <p:nvSpPr>
-          <p:cNvPr id="413" name="Google Shape;413;p33"/>
+          <p:cNvPr id="415" name="Google Shape;415;p33"/>
           <p:cNvSpPr txBox="1"/>
           <p:nvPr/>
         </p:nvSpPr>
@@ -33547,7 +33908,7 @@
       </p:sp>
       <p:sp>
         <p:nvSpPr>
-          <p:cNvPr id="414" name="Google Shape;414;p33"/>
+          <p:cNvPr id="416" name="Google Shape;416;p33"/>
           <p:cNvSpPr txBox="1"/>
           <p:nvPr/>
         </p:nvSpPr>
@@ -33609,7 +33970,7 @@
       </p:sp>
       <p:sp>
         <p:nvSpPr>
-          <p:cNvPr id="415" name="Google Shape;415;p33"/>
+          <p:cNvPr id="417" name="Google Shape;417;p33"/>
           <p:cNvSpPr txBox="1"/>
           <p:nvPr/>
         </p:nvSpPr>
@@ -33659,7 +34020,7 @@
       </p:sp>
       <p:sp>
         <p:nvSpPr>
-          <p:cNvPr id="416" name="Google Shape;416;p33"/>
+          <p:cNvPr id="418" name="Google Shape;418;p33"/>
           <p:cNvSpPr txBox="1"/>
           <p:nvPr/>
         </p:nvSpPr>
@@ -33716,7 +34077,7 @@
       </p:sp>
       <p:sp>
         <p:nvSpPr>
-          <p:cNvPr id="417" name="Google Shape;417;p33"/>
+          <p:cNvPr id="419" name="Google Shape;419;p33"/>
           <p:cNvSpPr txBox="1"/>
           <p:nvPr/>
         </p:nvSpPr>
@@ -33766,7 +34127,7 @@
       </p:sp>
       <p:sp>
         <p:nvSpPr>
-          <p:cNvPr id="418" name="Google Shape;418;p33"/>
+          <p:cNvPr id="420" name="Google Shape;420;p33"/>
           <p:cNvSpPr txBox="1"/>
           <p:nvPr/>
         </p:nvSpPr>
@@ -33818,7 +34179,7 @@
       </p:sp>
       <p:sp>
         <p:nvSpPr>
-          <p:cNvPr id="419" name="Google Shape;419;p33"/>
+          <p:cNvPr id="421" name="Google Shape;421;p33"/>
           <p:cNvSpPr txBox="1"/>
           <p:nvPr/>
         </p:nvSpPr>
@@ -33868,7 +34229,7 @@
       </p:sp>
       <p:sp>
         <p:nvSpPr>
-          <p:cNvPr id="420" name="Google Shape;420;p33"/>
+          <p:cNvPr id="422" name="Google Shape;422;p33"/>
           <p:cNvSpPr txBox="1"/>
           <p:nvPr/>
         </p:nvSpPr>
@@ -33918,7 +34279,7 @@
       </p:sp>
       <p:sp>
         <p:nvSpPr>
-          <p:cNvPr id="421" name="Google Shape;421;p33"/>
+          <p:cNvPr id="423" name="Google Shape;423;p33"/>
           <p:cNvSpPr txBox="1"/>
           <p:nvPr/>
         </p:nvSpPr>
@@ -33975,7 +34336,7 @@
       </p:sp>
       <p:sp>
         <p:nvSpPr>
-          <p:cNvPr id="422" name="Google Shape;422;p33"/>
+          <p:cNvPr id="424" name="Google Shape;424;p33"/>
           <p:cNvSpPr txBox="1"/>
           <p:nvPr/>
         </p:nvSpPr>
@@ -34025,7 +34386,7 @@
       </p:sp>
       <p:sp>
         <p:nvSpPr>
-          <p:cNvPr id="423" name="Google Shape;423;p33"/>
+          <p:cNvPr id="425" name="Google Shape;425;p33"/>
           <p:cNvSpPr txBox="1"/>
           <p:nvPr/>
         </p:nvSpPr>
@@ -34076,7 +34437,7 @@
       </p:sp>
       <p:sp>
         <p:nvSpPr>
-          <p:cNvPr id="424" name="Google Shape;424;p33"/>
+          <p:cNvPr id="426" name="Google Shape;426;p33"/>
           <p:cNvSpPr txBox="1"/>
           <p:nvPr/>
         </p:nvSpPr>
@@ -34128,7 +34489,7 @@
       </p:sp>
       <p:sp>
         <p:nvSpPr>
-          <p:cNvPr id="425" name="Google Shape;425;p33"/>
+          <p:cNvPr id="427" name="Google Shape;427;p33"/>
           <p:cNvSpPr txBox="1"/>
           <p:nvPr/>
         </p:nvSpPr>
@@ -34178,7 +34539,7 @@
       </p:sp>
       <p:sp>
         <p:nvSpPr>
-          <p:cNvPr id="426" name="Google Shape;426;p33"/>
+          <p:cNvPr id="428" name="Google Shape;428;p33"/>
           <p:cNvSpPr txBox="1"/>
           <p:nvPr/>
         </p:nvSpPr>
@@ -34228,7 +34589,7 @@
       </p:sp>
       <p:sp>
         <p:nvSpPr>
-          <p:cNvPr id="427" name="Google Shape;427;p33"/>
+          <p:cNvPr id="429" name="Google Shape;429;p33"/>
           <p:cNvSpPr txBox="1"/>
           <p:nvPr/>
         </p:nvSpPr>
@@ -34285,7 +34646,7 @@
       </p:sp>
       <p:sp>
         <p:nvSpPr>
-          <p:cNvPr id="428" name="Google Shape;428;p33"/>
+          <p:cNvPr id="430" name="Google Shape;430;p33"/>
           <p:cNvSpPr txBox="1"/>
           <p:nvPr/>
         </p:nvSpPr>
@@ -34335,7 +34696,7 @@
       </p:sp>
       <p:sp>
         <p:nvSpPr>
-          <p:cNvPr id="429" name="Google Shape;429;p33"/>
+          <p:cNvPr id="431" name="Google Shape;431;p33"/>
           <p:cNvSpPr txBox="1"/>
           <p:nvPr/>
         </p:nvSpPr>
@@ -34386,7 +34747,7 @@
       </p:sp>
       <p:sp>
         <p:nvSpPr>
-          <p:cNvPr id="430" name="Google Shape;430;p33"/>
+          <p:cNvPr id="432" name="Google Shape;432;p33"/>
           <p:cNvSpPr txBox="1"/>
           <p:nvPr/>
         </p:nvSpPr>
@@ -34438,7 +34799,7 @@
       </p:sp>
       <p:sp>
         <p:nvSpPr>
-          <p:cNvPr id="431" name="Google Shape;431;p33"/>
+          <p:cNvPr id="433" name="Google Shape;433;p33"/>
           <p:cNvSpPr txBox="1"/>
           <p:nvPr/>
         </p:nvSpPr>
@@ -34488,7 +34849,7 @@
       </p:sp>
       <p:sp>
         <p:nvSpPr>
-          <p:cNvPr id="432" name="Google Shape;432;p33"/>
+          <p:cNvPr id="434" name="Google Shape;434;p33"/>
           <p:cNvSpPr txBox="1"/>
           <p:nvPr/>
         </p:nvSpPr>
@@ -34538,7 +34899,7 @@
       </p:sp>
       <p:sp>
         <p:nvSpPr>
-          <p:cNvPr id="433" name="Google Shape;433;p33"/>
+          <p:cNvPr id="435" name="Google Shape;435;p33"/>
           <p:cNvSpPr txBox="1"/>
           <p:nvPr/>
         </p:nvSpPr>
@@ -34589,7 +34950,7 @@
       </p:sp>
       <p:sp>
         <p:nvSpPr>
-          <p:cNvPr id="434" name="Google Shape;434;p33"/>
+          <p:cNvPr id="436" name="Google Shape;436;p33"/>
           <p:cNvSpPr txBox="1"/>
           <p:nvPr/>
         </p:nvSpPr>
@@ -34641,7 +35002,7 @@
       </p:sp>
       <p:sp>
         <p:nvSpPr>
-          <p:cNvPr id="435" name="Google Shape;435;p33"/>
+          <p:cNvPr id="437" name="Google Shape;437;p33"/>
           <p:cNvSpPr txBox="1"/>
           <p:nvPr/>
         </p:nvSpPr>
@@ -34691,7 +35052,7 @@
       </p:sp>
       <p:sp>
         <p:nvSpPr>
-          <p:cNvPr id="436" name="Google Shape;436;p33"/>
+          <p:cNvPr id="438" name="Google Shape;438;p33"/>
           <p:cNvSpPr txBox="1"/>
           <p:nvPr/>
         </p:nvSpPr>
@@ -34741,7 +35102,7 @@
       </p:sp>
       <p:sp>
         <p:nvSpPr>
-          <p:cNvPr id="437" name="Google Shape;437;p33"/>
+          <p:cNvPr id="439" name="Google Shape;439;p33"/>
           <p:cNvSpPr txBox="1"/>
           <p:nvPr/>
         </p:nvSpPr>
@@ -35007,285 +35368,6 @@
 </file>
 
 <file path=ppt/theme/theme1.xml><?xml version="1.0" encoding="utf-8"?>
-<a:theme xmlns:a="http://schemas.openxmlformats.org/drawingml/2006/main" xmlns:r="http://schemas.openxmlformats.org/officeDocument/2006/relationships">
-  <a:themeElements>
-    <a:clrScheme name="Default">
-      <a:dk1>
-        <a:srgbClr val="000000"/>
-      </a:dk1>
-      <a:lt1>
-        <a:srgbClr val="FFFFFF"/>
-      </a:lt1>
-      <a:dk2>
-        <a:srgbClr val="158158"/>
-      </a:dk2>
-      <a:lt2>
-        <a:srgbClr val="F3F3F3"/>
-      </a:lt2>
-      <a:accent1>
-        <a:srgbClr val="058DC7"/>
-      </a:accent1>
-      <a:accent2>
-        <a:srgbClr val="50B432"/>
-      </a:accent2>
-      <a:accent3>
-        <a:srgbClr val="ED561B"/>
-      </a:accent3>
-      <a:accent4>
-        <a:srgbClr val="EDEF00"/>
-      </a:accent4>
-      <a:accent5>
-        <a:srgbClr val="24CBE5"/>
-      </a:accent5>
-      <a:accent6>
-        <a:srgbClr val="64E572"/>
-      </a:accent6>
-      <a:hlink>
-        <a:srgbClr val="2200CC"/>
-      </a:hlink>
-      <a:folHlink>
-        <a:srgbClr val="551A8B"/>
-      </a:folHlink>
-    </a:clrScheme>
-    <a:fontScheme name="Office">
-      <a:majorFont>
-        <a:latin typeface="Arial"/>
-        <a:ea typeface=""/>
-        <a:cs typeface=""/>
-        <a:font script="Jpan" typeface="ＭＳ Ｐゴシック"/>
-        <a:font script="Hang" typeface="맑은 고딕"/>
-        <a:font script="Hans" typeface="宋体"/>
-        <a:font script="Hant" typeface="新細明體"/>
-        <a:font script="Arab" typeface="Times New Roman"/>
-        <a:font script="Hebr" typeface="Times New Roman"/>
-        <a:font script="Thai" typeface="Angsana New"/>
-        <a:font script="Ethi" typeface="Nyala"/>
-        <a:font script="Beng" typeface="Vrinda"/>
-        <a:font script="Gujr" typeface="Shruti"/>
-        <a:font script="Khmr" typeface="MoolBoran"/>
-        <a:font script="Knda" typeface="Tunga"/>
-        <a:font script="Guru" typeface="Raavi"/>
-        <a:font script="Cans" typeface="Euphemia"/>
-        <a:font script="Cher" typeface="Plantagenet Cherokee"/>
-        <a:font script="Yiii" typeface="Microsoft Yi Baiti"/>
-        <a:font script="Tibt" typeface="Microsoft Himalaya"/>
-        <a:font script="Thaa" typeface="MV Boli"/>
-        <a:font script="Deva" typeface="Mangal"/>
-        <a:font script="Telu" typeface="Gautami"/>
-        <a:font script="Taml" typeface="Latha"/>
-        <a:font script="Syrc" typeface="Estrangelo Edessa"/>
-        <a:font script="Orya" typeface="Kalinga"/>
-        <a:font script="Mlym" typeface="Kartika"/>
-        <a:font script="Laoo" typeface="DokChampa"/>
-        <a:font script="Sinh" typeface="Iskoola Pota"/>
-        <a:font script="Mong" typeface="Mongolian Baiti"/>
-        <a:font script="Viet" typeface="Times New Roman"/>
-        <a:font script="Uigh" typeface="Microsoft Uighur"/>
-        <a:font script="Geor" typeface="Sylfaen"/>
-      </a:majorFont>
-      <a:minorFont>
-        <a:latin typeface="Arial"/>
-        <a:ea typeface=""/>
-        <a:cs typeface=""/>
-        <a:font script="Jpan" typeface="ＭＳ Ｐゴシック"/>
-        <a:font script="Hang" typeface="맑은 고딕"/>
-        <a:font script="Hans" typeface="宋体"/>
-        <a:font script="Hant" typeface="新細明體"/>
-        <a:font script="Arab" typeface="Arial"/>
-        <a:font script="Hebr" typeface="Arial"/>
-        <a:font script="Thai" typeface="Cordia New"/>
-        <a:font script="Ethi" typeface="Nyala"/>
-        <a:font script="Beng" typeface="Vrinda"/>
-        <a:font script="Gujr" typeface="Shruti"/>
-        <a:font script="Khmr" typeface="DaunPenh"/>
-        <a:font script="Knda" typeface="Tunga"/>
-        <a:font script="Guru" typeface="Raavi"/>
-        <a:font script="Cans" typeface="Euphemia"/>
-        <a:font script="Cher" typeface="Plantagenet Cherokee"/>
-        <a:font script="Yiii" typeface="Microsoft Yi Baiti"/>
-        <a:font script="Tibt" typeface="Microsoft Himalaya"/>
-        <a:font script="Thaa" typeface="MV Boli"/>
-        <a:font script="Deva" typeface="Mangal"/>
-        <a:font script="Telu" typeface="Gautami"/>
-        <a:font script="Taml" typeface="Latha"/>
-        <a:font script="Syrc" typeface="Estrangelo Edessa"/>
-        <a:font script="Orya" typeface="Kalinga"/>
-        <a:font script="Mlym" typeface="Kartika"/>
-        <a:font script="Laoo" typeface="DokChampa"/>
-        <a:font script="Sinh" typeface="Iskoola Pota"/>
-        <a:font script="Mong" typeface="Mongolian Baiti"/>
-        <a:font script="Viet" typeface="Arial"/>
-        <a:font script="Uigh" typeface="Microsoft Uighur"/>
-        <a:font script="Geor" typeface="Sylfaen"/>
-      </a:minorFont>
-    </a:fontScheme>
-    <a:fmtScheme name="Office">
-      <a:fillStyleLst>
-        <a:solidFill>
-          <a:schemeClr val="phClr"/>
-        </a:solidFill>
-        <a:gradFill rotWithShape="1">
-          <a:gsLst>
-            <a:gs pos="0">
-              <a:schemeClr val="phClr">
-                <a:tint val="50000"/>
-                <a:satMod val="300000"/>
-              </a:schemeClr>
-            </a:gs>
-            <a:gs pos="35000">
-              <a:schemeClr val="phClr">
-                <a:tint val="37000"/>
-                <a:satMod val="300000"/>
-              </a:schemeClr>
-            </a:gs>
-            <a:gs pos="100000">
-              <a:schemeClr val="phClr">
-                <a:tint val="15000"/>
-                <a:satMod val="350000"/>
-              </a:schemeClr>
-            </a:gs>
-          </a:gsLst>
-          <a:lin ang="16200000" scaled="1"/>
-        </a:gradFill>
-        <a:gradFill rotWithShape="1">
-          <a:gsLst>
-            <a:gs pos="0">
-              <a:schemeClr val="phClr">
-                <a:tint val="100000"/>
-                <a:shade val="100000"/>
-                <a:satMod val="130000"/>
-              </a:schemeClr>
-            </a:gs>
-            <a:gs pos="100000">
-              <a:schemeClr val="phClr">
-                <a:tint val="50000"/>
-                <a:shade val="100000"/>
-                <a:satMod val="350000"/>
-              </a:schemeClr>
-            </a:gs>
-          </a:gsLst>
-          <a:lin ang="16200000" scaled="0"/>
-        </a:gradFill>
-      </a:fillStyleLst>
-      <a:lnStyleLst>
-        <a:ln w="9525" cap="flat" cmpd="sng" algn="ctr">
-          <a:solidFill>
-            <a:schemeClr val="phClr">
-              <a:shade val="95000"/>
-              <a:satMod val="105000"/>
-            </a:schemeClr>
-          </a:solidFill>
-          <a:prstDash val="solid"/>
-        </a:ln>
-        <a:ln w="25400" cap="flat" cmpd="sng" algn="ctr">
-          <a:solidFill>
-            <a:schemeClr val="phClr"/>
-          </a:solidFill>
-          <a:prstDash val="solid"/>
-        </a:ln>
-        <a:ln w="38100" cap="flat" cmpd="sng" algn="ctr">
-          <a:solidFill>
-            <a:schemeClr val="phClr"/>
-          </a:solidFill>
-          <a:prstDash val="solid"/>
-        </a:ln>
-      </a:lnStyleLst>
-      <a:effectStyleLst>
-        <a:effectStyle>
-          <a:effectLst>
-            <a:outerShdw blurRad="40000" dist="20000" dir="5400000" rotWithShape="0">
-              <a:srgbClr val="000000">
-                <a:alpha val="38000"/>
-              </a:srgbClr>
-            </a:outerShdw>
-          </a:effectLst>
-        </a:effectStyle>
-        <a:effectStyle>
-          <a:effectLst>
-            <a:outerShdw blurRad="40000" dist="23000" dir="5400000" rotWithShape="0">
-              <a:srgbClr val="000000">
-                <a:alpha val="35000"/>
-              </a:srgbClr>
-            </a:outerShdw>
-          </a:effectLst>
-        </a:effectStyle>
-        <a:effectStyle>
-          <a:effectLst>
-            <a:outerShdw blurRad="40000" dist="23000" dir="5400000" rotWithShape="0">
-              <a:srgbClr val="000000">
-                <a:alpha val="35000"/>
-              </a:srgbClr>
-            </a:outerShdw>
-          </a:effectLst>
-          <a:scene3d>
-            <a:camera prst="orthographicFront">
-              <a:rot lat="0" lon="0" rev="0"/>
-            </a:camera>
-            <a:lightRig rig="threePt" dir="t">
-              <a:rot lat="0" lon="0" rev="1200000"/>
-            </a:lightRig>
-          </a:scene3d>
-          <a:sp3d>
-            <a:bevelT w="63500" h="25400"/>
-          </a:sp3d>
-        </a:effectStyle>
-      </a:effectStyleLst>
-      <a:bgFillStyleLst>
-        <a:solidFill>
-          <a:schemeClr val="phClr"/>
-        </a:solidFill>
-        <a:gradFill rotWithShape="1">
-          <a:gsLst>
-            <a:gs pos="0">
-              <a:schemeClr val="phClr">
-                <a:tint val="40000"/>
-                <a:satMod val="350000"/>
-              </a:schemeClr>
-            </a:gs>
-            <a:gs pos="40000">
-              <a:schemeClr val="phClr">
-                <a:tint val="45000"/>
-                <a:shade val="99000"/>
-                <a:satMod val="350000"/>
-              </a:schemeClr>
-            </a:gs>
-            <a:gs pos="100000">
-              <a:schemeClr val="phClr">
-                <a:shade val="20000"/>
-                <a:satMod val="255000"/>
-              </a:schemeClr>
-            </a:gs>
-          </a:gsLst>
-          <a:path path="circle">
-            <a:fillToRect l="50000" t="-80000" r="50000" b="180000"/>
-          </a:path>
-        </a:gradFill>
-        <a:gradFill rotWithShape="1">
-          <a:gsLst>
-            <a:gs pos="0">
-              <a:schemeClr val="phClr">
-                <a:tint val="80000"/>
-                <a:satMod val="300000"/>
-              </a:schemeClr>
-            </a:gs>
-            <a:gs pos="100000">
-              <a:schemeClr val="phClr">
-                <a:shade val="30000"/>
-                <a:satMod val="200000"/>
-              </a:schemeClr>
-            </a:gs>
-          </a:gsLst>
-          <a:path path="circle">
-            <a:fillToRect l="50000" t="50000" r="50000" b="50000"/>
-          </a:path>
-        </a:gradFill>
-      </a:bgFillStyleLst>
-    </a:fmtScheme>
-  </a:themeElements>
-</a:theme>
-</file>
-
-<file path=ppt/theme/theme2.xml><?xml version="1.0" encoding="utf-8"?>
 <a:theme xmlns:a="http://schemas.openxmlformats.org/drawingml/2006/main" xmlns:r="http://schemas.openxmlformats.org/officeDocument/2006/relationships" name="Office Theme">
   <a:themeElements>
     <a:clrScheme name="Office">
@@ -35564,7 +35646,7 @@
 </a:theme>
 </file>
 
-<file path=ppt/theme/theme3.xml><?xml version="1.0" encoding="utf-8"?>
+<file path=ppt/theme/theme2.xml><?xml version="1.0" encoding="utf-8"?>
 <a:theme xmlns:a="http://schemas.openxmlformats.org/drawingml/2006/main" xmlns:r="http://schemas.openxmlformats.org/officeDocument/2006/relationships" name="Simple Light">
   <a:themeElements>
     <a:clrScheme name="Simple Light">
@@ -35841,4 +35923,283 @@
     </a:fmtScheme>
   </a:themeElements>
 </a:theme>
+</file>
+
+<file path=ppt/theme/theme3.xml><?xml version="1.0" encoding="utf-8"?>
+<a:theme xmlns:a="http://schemas.openxmlformats.org/drawingml/2006/main" xmlns:r="http://schemas.openxmlformats.org/officeDocument/2006/relationships">
+  <a:themeElements>
+    <a:clrScheme name="Default">
+      <a:dk1>
+        <a:srgbClr val="000000"/>
+      </a:dk1>
+      <a:lt1>
+        <a:srgbClr val="FFFFFF"/>
+      </a:lt1>
+      <a:dk2>
+        <a:srgbClr val="158158"/>
+      </a:dk2>
+      <a:lt2>
+        <a:srgbClr val="F3F3F3"/>
+      </a:lt2>
+      <a:accent1>
+        <a:srgbClr val="058DC7"/>
+      </a:accent1>
+      <a:accent2>
+        <a:srgbClr val="50B432"/>
+      </a:accent2>
+      <a:accent3>
+        <a:srgbClr val="ED561B"/>
+      </a:accent3>
+      <a:accent4>
+        <a:srgbClr val="EDEF00"/>
+      </a:accent4>
+      <a:accent5>
+        <a:srgbClr val="24CBE5"/>
+      </a:accent5>
+      <a:accent6>
+        <a:srgbClr val="64E572"/>
+      </a:accent6>
+      <a:hlink>
+        <a:srgbClr val="2200CC"/>
+      </a:hlink>
+      <a:folHlink>
+        <a:srgbClr val="551A8B"/>
+      </a:folHlink>
+    </a:clrScheme>
+    <a:fontScheme name="Office">
+      <a:majorFont>
+        <a:latin typeface="Arial"/>
+        <a:ea typeface=""/>
+        <a:cs typeface=""/>
+        <a:font script="Jpan" typeface="ＭＳ Ｐゴシック"/>
+        <a:font script="Hang" typeface="맑은 고딕"/>
+        <a:font script="Hans" typeface="宋体"/>
+        <a:font script="Hant" typeface="新細明體"/>
+        <a:font script="Arab" typeface="Times New Roman"/>
+        <a:font script="Hebr" typeface="Times New Roman"/>
+        <a:font script="Thai" typeface="Angsana New"/>
+        <a:font script="Ethi" typeface="Nyala"/>
+        <a:font script="Beng" typeface="Vrinda"/>
+        <a:font script="Gujr" typeface="Shruti"/>
+        <a:font script="Khmr" typeface="MoolBoran"/>
+        <a:font script="Knda" typeface="Tunga"/>
+        <a:font script="Guru" typeface="Raavi"/>
+        <a:font script="Cans" typeface="Euphemia"/>
+        <a:font script="Cher" typeface="Plantagenet Cherokee"/>
+        <a:font script="Yiii" typeface="Microsoft Yi Baiti"/>
+        <a:font script="Tibt" typeface="Microsoft Himalaya"/>
+        <a:font script="Thaa" typeface="MV Boli"/>
+        <a:font script="Deva" typeface="Mangal"/>
+        <a:font script="Telu" typeface="Gautami"/>
+        <a:font script="Taml" typeface="Latha"/>
+        <a:font script="Syrc" typeface="Estrangelo Edessa"/>
+        <a:font script="Orya" typeface="Kalinga"/>
+        <a:font script="Mlym" typeface="Kartika"/>
+        <a:font script="Laoo" typeface="DokChampa"/>
+        <a:font script="Sinh" typeface="Iskoola Pota"/>
+        <a:font script="Mong" typeface="Mongolian Baiti"/>
+        <a:font script="Viet" typeface="Times New Roman"/>
+        <a:font script="Uigh" typeface="Microsoft Uighur"/>
+        <a:font script="Geor" typeface="Sylfaen"/>
+      </a:majorFont>
+      <a:minorFont>
+        <a:latin typeface="Arial"/>
+        <a:ea typeface=""/>
+        <a:cs typeface=""/>
+        <a:font script="Jpan" typeface="ＭＳ Ｐゴシック"/>
+        <a:font script="Hang" typeface="맑은 고딕"/>
+        <a:font script="Hans" typeface="宋体"/>
+        <a:font script="Hant" typeface="新細明體"/>
+        <a:font script="Arab" typeface="Arial"/>
+        <a:font script="Hebr" typeface="Arial"/>
+        <a:font script="Thai" typeface="Cordia New"/>
+        <a:font script="Ethi" typeface="Nyala"/>
+        <a:font script="Beng" typeface="Vrinda"/>
+        <a:font script="Gujr" typeface="Shruti"/>
+        <a:font script="Khmr" typeface="DaunPenh"/>
+        <a:font script="Knda" typeface="Tunga"/>
+        <a:font script="Guru" typeface="Raavi"/>
+        <a:font script="Cans" typeface="Euphemia"/>
+        <a:font script="Cher" typeface="Plantagenet Cherokee"/>
+        <a:font script="Yiii" typeface="Microsoft Yi Baiti"/>
+        <a:font script="Tibt" typeface="Microsoft Himalaya"/>
+        <a:font script="Thaa" typeface="MV Boli"/>
+        <a:font script="Deva" typeface="Mangal"/>
+        <a:font script="Telu" typeface="Gautami"/>
+        <a:font script="Taml" typeface="Latha"/>
+        <a:font script="Syrc" typeface="Estrangelo Edessa"/>
+        <a:font script="Orya" typeface="Kalinga"/>
+        <a:font script="Mlym" typeface="Kartika"/>
+        <a:font script="Laoo" typeface="DokChampa"/>
+        <a:font script="Sinh" typeface="Iskoola Pota"/>
+        <a:font script="Mong" typeface="Mongolian Baiti"/>
+        <a:font script="Viet" typeface="Arial"/>
+        <a:font script="Uigh" typeface="Microsoft Uighur"/>
+        <a:font script="Geor" typeface="Sylfaen"/>
+      </a:minorFont>
+    </a:fontScheme>
+    <a:fmtScheme name="Office">
+      <a:fillStyleLst>
+        <a:solidFill>
+          <a:schemeClr val="phClr"/>
+        </a:solidFill>
+        <a:gradFill rotWithShape="1">
+          <a:gsLst>
+            <a:gs pos="0">
+              <a:schemeClr val="phClr">
+                <a:tint val="50000"/>
+                <a:satMod val="300000"/>
+              </a:schemeClr>
+            </a:gs>
+            <a:gs pos="35000">
+              <a:schemeClr val="phClr">
+                <a:tint val="37000"/>
+                <a:satMod val="300000"/>
+              </a:schemeClr>
+            </a:gs>
+            <a:gs pos="100000">
+              <a:schemeClr val="phClr">
+                <a:tint val="15000"/>
+                <a:satMod val="350000"/>
+              </a:schemeClr>
+            </a:gs>
+          </a:gsLst>
+          <a:lin ang="16200000" scaled="1"/>
+        </a:gradFill>
+        <a:gradFill rotWithShape="1">
+          <a:gsLst>
+            <a:gs pos="0">
+              <a:schemeClr val="phClr">
+                <a:tint val="100000"/>
+                <a:shade val="100000"/>
+                <a:satMod val="130000"/>
+              </a:schemeClr>
+            </a:gs>
+            <a:gs pos="100000">
+              <a:schemeClr val="phClr">
+                <a:tint val="50000"/>
+                <a:shade val="100000"/>
+                <a:satMod val="350000"/>
+              </a:schemeClr>
+            </a:gs>
+          </a:gsLst>
+          <a:lin ang="16200000" scaled="0"/>
+        </a:gradFill>
+      </a:fillStyleLst>
+      <a:lnStyleLst>
+        <a:ln w="9525" cap="flat" cmpd="sng" algn="ctr">
+          <a:solidFill>
+            <a:schemeClr val="phClr">
+              <a:shade val="95000"/>
+              <a:satMod val="105000"/>
+            </a:schemeClr>
+          </a:solidFill>
+          <a:prstDash val="solid"/>
+        </a:ln>
+        <a:ln w="25400" cap="flat" cmpd="sng" algn="ctr">
+          <a:solidFill>
+            <a:schemeClr val="phClr"/>
+          </a:solidFill>
+          <a:prstDash val="solid"/>
+        </a:ln>
+        <a:ln w="38100" cap="flat" cmpd="sng" algn="ctr">
+          <a:solidFill>
+            <a:schemeClr val="phClr"/>
+          </a:solidFill>
+          <a:prstDash val="solid"/>
+        </a:ln>
+      </a:lnStyleLst>
+      <a:effectStyleLst>
+        <a:effectStyle>
+          <a:effectLst>
+            <a:outerShdw blurRad="40000" dist="20000" dir="5400000" rotWithShape="0">
+              <a:srgbClr val="000000">
+                <a:alpha val="38000"/>
+              </a:srgbClr>
+            </a:outerShdw>
+          </a:effectLst>
+        </a:effectStyle>
+        <a:effectStyle>
+          <a:effectLst>
+            <a:outerShdw blurRad="40000" dist="23000" dir="5400000" rotWithShape="0">
+              <a:srgbClr val="000000">
+                <a:alpha val="35000"/>
+              </a:srgbClr>
+            </a:outerShdw>
+          </a:effectLst>
+        </a:effectStyle>
+        <a:effectStyle>
+          <a:effectLst>
+            <a:outerShdw blurRad="40000" dist="23000" dir="5400000" rotWithShape="0">
+              <a:srgbClr val="000000">
+                <a:alpha val="35000"/>
+              </a:srgbClr>
+            </a:outerShdw>
+          </a:effectLst>
+          <a:scene3d>
+            <a:camera prst="orthographicFront">
+              <a:rot lat="0" lon="0" rev="0"/>
+            </a:camera>
+            <a:lightRig rig="threePt" dir="t">
+              <a:rot lat="0" lon="0" rev="1200000"/>
+            </a:lightRig>
+          </a:scene3d>
+          <a:sp3d>
+            <a:bevelT w="63500" h="25400"/>
+          </a:sp3d>
+        </a:effectStyle>
+      </a:effectStyleLst>
+      <a:bgFillStyleLst>
+        <a:solidFill>
+          <a:schemeClr val="phClr"/>
+        </a:solidFill>
+        <a:gradFill rotWithShape="1">
+          <a:gsLst>
+            <a:gs pos="0">
+              <a:schemeClr val="phClr">
+                <a:tint val="40000"/>
+                <a:satMod val="350000"/>
+              </a:schemeClr>
+            </a:gs>
+            <a:gs pos="40000">
+              <a:schemeClr val="phClr">
+                <a:tint val="45000"/>
+                <a:shade val="99000"/>
+                <a:satMod val="350000"/>
+              </a:schemeClr>
+            </a:gs>
+            <a:gs pos="100000">
+              <a:schemeClr val="phClr">
+                <a:shade val="20000"/>
+                <a:satMod val="255000"/>
+              </a:schemeClr>
+            </a:gs>
+          </a:gsLst>
+          <a:path path="circle">
+            <a:fillToRect l="50000" t="-80000" r="50000" b="180000"/>
+          </a:path>
+        </a:gradFill>
+        <a:gradFill rotWithShape="1">
+          <a:gsLst>
+            <a:gs pos="0">
+              <a:schemeClr val="phClr">
+                <a:tint val="80000"/>
+                <a:satMod val="300000"/>
+              </a:schemeClr>
+            </a:gs>
+            <a:gs pos="100000">
+              <a:schemeClr val="phClr">
+                <a:shade val="30000"/>
+                <a:satMod val="200000"/>
+              </a:schemeClr>
+            </a:gs>
+          </a:gsLst>
+          <a:path path="circle">
+            <a:fillToRect l="50000" t="50000" r="50000" b="50000"/>
+          </a:path>
+        </a:gradFill>
+      </a:bgFillStyleLst>
+    </a:fmtScheme>
+  </a:themeElements>
+</a:theme>
 </file>
--- a/docs/slot_classifier_share.pptx
+++ b/docs/slot_classifier_share.pptx
@@ -16496,7 +16496,7 @@
                 <a:cs typeface="Calibri"/>
                 <a:sym typeface="Calibri"/>
               </a:rPr>
-              <a:t>自動截圖分類  ·  競品報告生成  ·  Figma Board  ·  Fileserver 備份</a:t>
+              <a:t>Claude Code 串聯  ·  自動截圖分類  ·  ROI 人工確認  ·  審核修正  ·  競品報告生成</a:t>
             </a:r>
             <a:endParaRPr sz="1100"/>
           </a:p>
@@ -16649,7 +16649,7 @@
                 <a:cs typeface="Calibri"/>
                 <a:sym typeface="Calibri"/>
               </a:rPr>
-              <a:t>v 1.0</a:t>
+              <a:t>v 2.0</a:t>
             </a:r>
             <a:endParaRPr sz="1100"/>
           </a:p>
@@ -16877,7 +16877,7 @@
                 <a:cs typeface="Calibri"/>
                 <a:sym typeface="Calibri"/>
               </a:rPr>
-              <a:t>備份至 Fileserver</a:t>
+              <a:t>GitHub 取得最新版本</a:t>
             </a:r>
             <a:endParaRPr sz="1100"/>
           </a:p>
@@ -16927,7 +16927,7 @@
                 <a:cs typeface="Calibri"/>
                 <a:sym typeface="Calibri"/>
               </a:rPr>
-              <a:t>Archive to Fileserver</a:t>
+              <a:t>Getting Latest Version from GitHub</a:t>
             </a:r>
             <a:endParaRPr sz="1100"/>
           </a:p>
@@ -17034,7 +17034,7 @@
                 <a:cs typeface="Calibri"/>
                 <a:sym typeface="Calibri"/>
               </a:rPr>
-              <a:t>4.5  備份</a:t>
+              <a:t>4.5  GitHub</a:t>
             </a:r>
             <a:endParaRPr sz="1100"/>
           </a:p>
@@ -17084,7 +17084,7 @@
                 <a:cs typeface="Calibri"/>
                 <a:sym typeface="Calibri"/>
               </a:rPr>
-              <a:t>執行備份腳本：</a:t>
+              <a:t>更新至最新版：</a:t>
             </a:r>
             <a:endParaRPr sz="1100"/>
           </a:p>
@@ -17191,7 +17191,9 @@
                 <a:cs typeface="Consolas"/>
                 <a:sym typeface="Consolas"/>
               </a:rPr>
-              <a:t>.\archive_to_fileserver.ps1</a:t>
+              <a:t>git fetch origin
+git checkout perf/cpu-optimize-ocr
+git pull</a:t>
             </a:r>
             <a:endParaRPr sz="1100"/>
           </a:p>
@@ -17241,7 +17243,7 @@
                 <a:cs typeface="Calibri"/>
                 <a:sym typeface="Calibri"/>
               </a:rPr>
-              <a:t>備份目標結構  ─  AI_survey / GameName /</a:t>
+              <a:t>主要分支說明</a:t>
             </a:r>
             <a:endParaRPr sz="1100"/>
           </a:p>
@@ -17344,7 +17346,7 @@
                 <a:cs typeface="Calibri"/>
                 <a:sym typeface="Calibri"/>
               </a:rPr>
-              <a:t>01_report</a:t>
+              <a:t>perf/cpu-optimize-ocr</a:t>
             </a:r>
             <a:endParaRPr sz="1100"/>
           </a:p>
@@ -17445,7 +17447,7 @@
                 <a:cs typeface="Calibri"/>
                 <a:sym typeface="Calibri"/>
               </a:rPr>
-              <a:t>HTML 競品分析報告 + assets</a:t>
+              <a:t>目前最新穩定版（CPU 優化 + ROI 確認 + 審核修正）</a:t>
             </a:r>
             <a:endParaRPr sz="1100"/>
           </a:p>
@@ -17548,7 +17550,7 @@
                 <a:cs typeface="Calibri"/>
                 <a:sym typeface="Calibri"/>
               </a:rPr>
-              <a:t>02_classified_images</a:t>
+              <a:t>main</a:t>
             </a:r>
             <a:endParaRPr sz="1100"/>
           </a:p>
@@ -17649,7 +17651,7 @@
                 <a:cs typeface="Calibri"/>
                 <a:sym typeface="Calibri"/>
               </a:rPr>
-              <a:t>分類截圖（Basegame / Feature 等）</a:t>
+              <a:t>穩定發布版（合併後更新）</a:t>
             </a:r>
             <a:endParaRPr sz="1100"/>
           </a:p>
@@ -17752,7 +17754,7 @@
                 <a:cs typeface="Calibri"/>
                 <a:sym typeface="Calibri"/>
               </a:rPr>
-              <a:t>03_figma</a:t>
+              <a:t>關鍵檔案</a:t>
             </a:r>
             <a:endParaRPr sz="1100"/>
           </a:p>
@@ -17853,7 +17855,9 @@
                 <a:cs typeface="Calibri"/>
                 <a:sym typeface="Calibri"/>
               </a:rPr>
-              <a:t>Figma 匯入包（manifest + images）</a:t>
+              <a:t>CLAUDE.md — Claude 工作規則
+app/pipeline.py + scorers/ — 核心分類邏輯
+classify_with_roi_confirm.sh — 主入口腳本</a:t>
             </a:r>
             <a:endParaRPr sz="1100"/>
           </a:p>
@@ -17956,7 +17960,7 @@
                 <a:cs typeface="Calibri"/>
                 <a:sym typeface="Calibri"/>
               </a:rPr>
-              <a:t>04_logs</a:t>
+              <a:t>重要注意</a:t>
             </a:r>
             <a:endParaRPr sz="1100"/>
           </a:p>
@@ -18057,7 +18061,7 @@
                 <a:cs typeface="Calibri"/>
                 <a:sym typeface="Calibri"/>
               </a:rPr>
-              <a:t>執行紀錄與低信心值截圖</a:t>
+              <a:t>Windows 使用者需透過 Git Bash 或 WSL 執行 .sh 腳本</a:t>
             </a:r>
             <a:endParaRPr sz="1100"/>
           </a:p>
@@ -18160,7 +18164,7 @@
                 <a:cs typeface="Calibri"/>
                 <a:sym typeface="Calibri"/>
               </a:rPr>
-              <a:t>video</a:t>
+              <a:t>repo URL</a:t>
             </a:r>
             <a:endParaRPr sz="1100"/>
           </a:p>
@@ -18261,7 +18265,7 @@
                 <a:cs typeface="Calibri"/>
                 <a:sym typeface="Calibri"/>
               </a:rPr>
-              <a:t>原始影片（選擇性備份）</a:t>
+              <a:t>https://github.com/Ashley860511/slot-classifier</a:t>
             </a:r>
             <a:endParaRPr sz="1100"/>
           </a:p>
@@ -18362,7 +18366,7 @@
                 <a:cs typeface="Calibri"/>
                 <a:sym typeface="Calibri"/>
               </a:rPr>
-              <a:t>⚠  low_score 截圖請先人工確認分類正確性，再決定備份至 Help 或 Other；HTML report 與 assets 保持原始資料夾結構以避免路徑失效</a:t>
+              <a:t>⚠  請確保 .venv 已建立且 requirements.txt 安裝完成，才能正確執行分類</a:t>
             </a:r>
             <a:endParaRPr sz="1100"/>
           </a:p>
@@ -18414,7 +18418,7 @@
                 <a:cs typeface="Calibri"/>
                 <a:sym typeface="Calibri"/>
               </a:rPr>
-              <a:t>備份位址：</a:t>
+              <a:t>文件位置：</a:t>
             </a:r>
             <a:endParaRPr sz="800">
               <a:solidFill>
@@ -18446,7 +18450,7 @@
                 <a:cs typeface="Calibri"/>
                 <a:sym typeface="Calibri"/>
               </a:rPr>
-              <a:t>\\192.168.123.5\jl商用遊戲機事務處\JLRD01研發一部\JLRD03美術設計\IGaming\0_Common\AI_survey</a:t>
+              <a:t>docs/ 資料夾內有 slot_classifier_usage_guide.html 與 python_environment_install_guide.html</a:t>
             </a:r>
             <a:endParaRPr sz="800">
               <a:solidFill>
@@ -19091,7 +19095,7 @@
                 <a:cs typeface="Calibri"/>
                 <a:sym typeface="Calibri"/>
               </a:rPr>
-              <a:t>app/               主程式：分類器、OCR、ROI 偵測、Symbol Table 提取</a:t>
+              <a:t>app/pipeline.py + scorers/    核心分類流程與各類別評分模組</a:t>
             </a:r>
             <a:endParaRPr sz="1100"/>
           </a:p>
@@ -19192,7 +19196,7 @@
                 <a:cs typeface="Calibri"/>
                 <a:sym typeface="Calibri"/>
               </a:rPr>
-              <a:t>claude/            slot-report Skill 安裝指南與完整 SKILL.md 範本</a:t>
+              <a:t>app/generate_review_page.py   生成 review.html 審核頁</a:t>
             </a:r>
             <a:endParaRPr sz="1100"/>
           </a:p>
@@ -19293,7 +19297,7 @@
                 <a:cs typeface="Calibri"/>
                 <a:sym typeface="Calibri"/>
               </a:rPr>
-              <a:t>figma_tools/       Figma plugin（manifest + code.js）與 export 腳本</a:t>
+              <a:t>review_server.py  /  apply_corrections.py   本機審核 Server + 修正套用</a:t>
             </a:r>
             <a:endParaRPr sz="1100"/>
           </a:p>
@@ -19394,7 +19398,7 @@
                 <a:cs typeface="Calibri"/>
                 <a:sym typeface="Calibri"/>
               </a:rPr>
-              <a:t>docs/              HTML 技術文件（使用教學、環境安裝說明）</a:t>
+              <a:t>classify_with_roi_confirm.sh   主入口腳本（ROI 確認 → 分類 → 審核 → Server）</a:t>
             </a:r>
             <a:endParaRPr sz="1100"/>
           </a:p>
@@ -19495,7 +19499,8 @@
                 <a:cs typeface="Calibri"/>
                 <a:sym typeface="Calibri"/>
               </a:rPr>
-              <a:t>setup_venv.ps1  /  run_classifier.ps1  /  run_figma_export.ps1  /  archive_to_fileserver.ps1</a:t>
+              <a:t>CLAUDE.md   Claude Code 工作規則（啟動後自動載入）
+docs/   HTML 技術文件（使用教學、環境安裝說明）</a:t>
             </a:r>
             <a:endParaRPr sz="1100"/>
           </a:p>
@@ -20028,7 +20033,7 @@
                 <a:cs typeface="Calibri"/>
                 <a:sym typeface="Calibri"/>
               </a:rPr>
-              <a:t>Feature 細分偵測</a:t>
+              <a:t>✅ Feature 細分偵測（已完成）</a:t>
             </a:r>
             <a:endParaRPr sz="1100"/>
           </a:p>
@@ -20078,7 +20083,7 @@
                 <a:cs typeface="Calibri"/>
                 <a:sym typeface="Calibri"/>
               </a:rPr>
-              <a:t>偵測 Feature active / subtype，自動辨識 Free Spins、Bonus、Jackpot 等子類型，提升分類粒度。</a:t>
+              <a:t>feature_subtype 已實作，支援 FreeSpins / PickBonus / Jackpot / Multiplier 等子類型自動辨識。</a:t>
             </a:r>
             <a:endParaRPr sz="1100"/>
           </a:p>
@@ -20333,7 +20338,7 @@
                 <a:cs typeface="Calibri"/>
                 <a:sym typeface="Calibri"/>
               </a:rPr>
-              <a:t>大型 Bonus Game 支援</a:t>
+              <a:t>🔄 大型 Bonus Game 支援（待優化）</a:t>
             </a:r>
             <a:endParaRPr sz="1100"/>
           </a:p>
@@ -20638,7 +20643,7 @@
                 <a:cs typeface="Calibri"/>
                 <a:sym typeface="Calibri"/>
               </a:rPr>
-              <a:t>OCR 辨識率提升</a:t>
+              <a:t>✅ OCR 效能優化（已完成）</a:t>
             </a:r>
             <a:endParaRPr sz="1100"/>
           </a:p>
@@ -20688,7 +20693,7 @@
                 <a:cs typeface="Calibri"/>
                 <a:sym typeface="Calibri"/>
               </a:rPr>
-              <a:t>改善中英文混合介面的文字辨識率，優化遊戲標題、數值與符號文字的提取品質。</a:t>
+              <a:t>cpu_threads=2 + OCR 輸入限 480px + 停用 angle classifier。4 分鐘影片約 5～10 分鐘完成（CPU-only）。</a:t>
             </a:r>
             <a:endParaRPr sz="1100"/>
           </a:p>
@@ -20943,7 +20948,7 @@
                 <a:cs typeface="Calibri"/>
                 <a:sym typeface="Calibri"/>
               </a:rPr>
-              <a:t>資料管理強化</a:t>
+              <a:t>🔄 Symbol 裁切整合（待優化）</a:t>
             </a:r>
             <a:endParaRPr sz="1100"/>
           </a:p>
@@ -20993,7 +20998,7 @@
                 <a:cs typeface="Calibri"/>
                 <a:sym typeface="Calibri"/>
               </a:rPr>
-              <a:t>建立競品遊戲資料庫索引、Fileserver manifest、版本控管，以及定期自動比對與更新機制。</a:t>
+              <a:t>從 Help / Paytable 截圖自動裁切 Symbol 圖示，整合至競品報告的符號賠率表段落。</a:t>
             </a:r>
             <a:endParaRPr sz="1100"/>
           </a:p>
@@ -21983,7 +21988,7 @@
                 <a:cs typeface="Calibri"/>
                 <a:sym typeface="Calibri"/>
               </a:rPr>
-              <a:t>整合 Figma 與 Fileserver</a:t>
+              <a:t>Claude Code 串聯完整流程</a:t>
             </a:r>
             <a:endParaRPr sz="1100"/>
           </a:p>
@@ -22033,7 +22038,7 @@
                 <a:cs typeface="Calibri"/>
                 <a:sym typeface="Calibri"/>
               </a:rPr>
-              <a:t>一鍵匯出 Figma Research Board，並自動備份至公司 Fileserver（AI_survey 資料夾），建立可查詢的競品資料庫。</a:t>
+              <a:t>在專案根目錄執行 claude，用對話觸發完整流程：ROI 確認 → 截圖分類 → review.html 審核 → 競品報告，全程不需手動執行腳本。</a:t>
             </a:r>
             <a:endParaRPr sz="1100"/>
           </a:p>
@@ -23881,7 +23886,7 @@
                 <a:cs typeface="Calibri"/>
                 <a:sym typeface="Calibri"/>
               </a:rPr>
-              <a:t>figma_export/</a:t>
+              <a:t>review.html</a:t>
             </a:r>
             <a:endParaRPr sz="1100"/>
           </a:p>
@@ -23931,7 +23936,7 @@
                 <a:cs typeface="Calibri"/>
                 <a:sym typeface="Calibri"/>
               </a:rPr>
-              <a:t>Figma Research Board 匯入包</a:t>
+              <a:t>瀏覽器審核頁，支援改分類與排除</a:t>
             </a:r>
             <a:endParaRPr sz="1100"/>
           </a:p>
@@ -24084,7 +24089,7 @@
                 <a:cs typeface="Calibri"/>
                 <a:sym typeface="Calibri"/>
               </a:rPr>
-              <a:t>Fileserver 備份</a:t>
+              <a:t>needs_review/</a:t>
             </a:r>
             <a:endParaRPr sz="1100"/>
           </a:p>
@@ -24134,7 +24139,7 @@
                 <a:cs typeface="Calibri"/>
                 <a:sym typeface="Calibri"/>
               </a:rPr>
-              <a:t>AI_survey 資料夾標準備份</a:t>
+              <a:t>中低信心截圖副本，供人工複審</a:t>
             </a:r>
             <a:endParaRPr sz="1100"/>
           </a:p>
@@ -25169,7 +25174,7 @@
                 <a:cs typeface="Calibri"/>
                 <a:sym typeface="Calibri"/>
               </a:rPr>
-              <a:t>主程式截圖分類</a:t>
+              <a:t>Claude Code 串聯分類</a:t>
             </a:r>
             <a:endParaRPr sz="1100"/>
           </a:p>
@@ -25744,7 +25749,7 @@
                 <a:cs typeface="Calibri"/>
                 <a:sym typeface="Calibri"/>
               </a:rPr>
-              <a:t>Claude Skill 生成報告</a:t>
+              <a:t>人工審核修正</a:t>
             </a:r>
             <a:endParaRPr sz="1100"/>
           </a:p>
@@ -25810,6 +25815,561 @@
         <p:spPr>
           <a:xfrm>
             <a:off x="4976775" y="1611630"/>
+            <a:ext cx="1543452" cy="288036"/>
+          </a:xfrm>
+          <a:prstGeom prst="rect">
+            <a:avLst/>
+          </a:prstGeom>
+          <a:noFill/>
+          <a:ln>
+            <a:noFill/>
+          </a:ln>
+        </p:spPr>
+        <p:txBody>
+          <a:bodyPr anchorCtr="0" anchor="t" bIns="37500" lIns="37500" spcFirstLastPara="1" rIns="37500" wrap="square" tIns="37500">
+            <a:spAutoFit/>
+          </a:bodyPr>
+          <a:lstStyle/>
+          <a:p>
+            <a:pPr indent="0" lvl="0" marL="0" marR="0" rtl="0" algn="l">
+              <a:spcBef>
+                <a:spcPts val="0"/>
+              </a:spcBef>
+              <a:spcAft>
+                <a:spcPts val="0"/>
+              </a:spcAft>
+              <a:buNone/>
+            </a:pPr>
+            <a:r>
+              <a:rPr b="0" i="0" lang="zh-TW" sz="800">
+                <a:solidFill>
+                  <a:srgbClr val="2D2D2D"/>
+                </a:solidFill>
+                <a:latin typeface="Calibri"/>
+                <a:ea typeface="Calibri"/>
+                <a:cs typeface="Calibri"/>
+                <a:sym typeface="Calibri"/>
+              </a:rPr>
+              <a:t>http://localhost:8765</a:t>
+            </a:r>
+            <a:endParaRPr sz="1100"/>
+          </a:p>
+        </p:txBody>
+      </p:sp>
+      <p:sp>
+        <p:nvSpPr>
+          <p:cNvPr id="245" name="Google Shape;245;p28"/>
+          <p:cNvSpPr txBox="1"/>
+          <p:nvPr/>
+        </p:nvSpPr>
+        <p:spPr>
+          <a:xfrm>
+            <a:off x="4860159" y="2057400"/>
+            <a:ext cx="41159" cy="150876"/>
+          </a:xfrm>
+          <a:prstGeom prst="rect">
+            <a:avLst/>
+          </a:prstGeom>
+          <a:solidFill>
+            <a:srgbClr val="7C3AED"/>
+          </a:solidFill>
+          <a:ln>
+            <a:noFill/>
+          </a:ln>
+        </p:spPr>
+        <p:txBody>
+          <a:bodyPr anchorCtr="0" anchor="t" bIns="34275" lIns="68575" spcFirstLastPara="1" rIns="68575" wrap="square" tIns="34275">
+            <a:spAutoFit/>
+          </a:bodyPr>
+          <a:lstStyle/>
+          <a:p>
+            <a:pPr indent="0" lvl="0" marL="0" marR="0" rtl="0" algn="l">
+              <a:spcBef>
+                <a:spcPts val="0"/>
+              </a:spcBef>
+              <a:spcAft>
+                <a:spcPts val="0"/>
+              </a:spcAft>
+              <a:buNone/>
+            </a:pPr>
+            <a:r>
+              <a:t/>
+            </a:r>
+            <a:endParaRPr sz="1400">
+              <a:solidFill>
+                <a:schemeClr val="dk1"/>
+              </a:solidFill>
+              <a:latin typeface="Calibri"/>
+              <a:ea typeface="Calibri"/>
+              <a:cs typeface="Calibri"/>
+              <a:sym typeface="Calibri"/>
+            </a:endParaRPr>
+          </a:p>
+        </p:txBody>
+      </p:sp>
+      <p:sp>
+        <p:nvSpPr>
+          <p:cNvPr id="246" name="Google Shape;246;p28"/>
+          <p:cNvSpPr txBox="1"/>
+          <p:nvPr/>
+        </p:nvSpPr>
+        <p:spPr>
+          <a:xfrm>
+            <a:off x="4976775" y="1988820"/>
+            <a:ext cx="1543452" cy="288036"/>
+          </a:xfrm>
+          <a:prstGeom prst="rect">
+            <a:avLst/>
+          </a:prstGeom>
+          <a:noFill/>
+          <a:ln>
+            <a:noFill/>
+          </a:ln>
+        </p:spPr>
+        <p:txBody>
+          <a:bodyPr anchorCtr="0" anchor="t" bIns="37500" lIns="37500" spcFirstLastPara="1" rIns="37500" wrap="square" tIns="37500">
+            <a:spAutoFit/>
+          </a:bodyPr>
+          <a:lstStyle/>
+          <a:p>
+            <a:pPr indent="0" lvl="0" marL="0" marR="0" rtl="0" algn="l">
+              <a:spcBef>
+                <a:spcPts val="0"/>
+              </a:spcBef>
+              <a:spcAft>
+                <a:spcPts val="0"/>
+              </a:spcAft>
+              <a:buNone/>
+            </a:pPr>
+            <a:r>
+              <a:rPr b="0" i="0" lang="zh-TW" sz="800">
+                <a:solidFill>
+                  <a:srgbClr val="2D2D2D"/>
+                </a:solidFill>
+                <a:latin typeface="Calibri"/>
+                <a:ea typeface="Calibri"/>
+                <a:cs typeface="Calibri"/>
+                <a:sym typeface="Calibri"/>
+              </a:rPr>
+              <a:t>review.html 審核頁</a:t>
+            </a:r>
+            <a:endParaRPr sz="1100"/>
+          </a:p>
+        </p:txBody>
+      </p:sp>
+      <p:sp>
+        <p:nvSpPr>
+          <p:cNvPr id="247" name="Google Shape;247;p28"/>
+          <p:cNvSpPr txBox="1"/>
+          <p:nvPr/>
+        </p:nvSpPr>
+        <p:spPr>
+          <a:xfrm>
+            <a:off x="4860159" y="2434590"/>
+            <a:ext cx="41159" cy="150876"/>
+          </a:xfrm>
+          <a:prstGeom prst="rect">
+            <a:avLst/>
+          </a:prstGeom>
+          <a:solidFill>
+            <a:srgbClr val="7C3AED"/>
+          </a:solidFill>
+          <a:ln>
+            <a:noFill/>
+          </a:ln>
+        </p:spPr>
+        <p:txBody>
+          <a:bodyPr anchorCtr="0" anchor="t" bIns="34275" lIns="68575" spcFirstLastPara="1" rIns="68575" wrap="square" tIns="34275">
+            <a:spAutoFit/>
+          </a:bodyPr>
+          <a:lstStyle/>
+          <a:p>
+            <a:pPr indent="0" lvl="0" marL="0" marR="0" rtl="0" algn="l">
+              <a:spcBef>
+                <a:spcPts val="0"/>
+              </a:spcBef>
+              <a:spcAft>
+                <a:spcPts val="0"/>
+              </a:spcAft>
+              <a:buNone/>
+            </a:pPr>
+            <a:r>
+              <a:t/>
+            </a:r>
+            <a:endParaRPr sz="1400">
+              <a:solidFill>
+                <a:schemeClr val="dk1"/>
+              </a:solidFill>
+              <a:latin typeface="Calibri"/>
+              <a:ea typeface="Calibri"/>
+              <a:cs typeface="Calibri"/>
+              <a:sym typeface="Calibri"/>
+            </a:endParaRPr>
+          </a:p>
+        </p:txBody>
+      </p:sp>
+      <p:sp>
+        <p:nvSpPr>
+          <p:cNvPr id="248" name="Google Shape;248;p28"/>
+          <p:cNvSpPr txBox="1"/>
+          <p:nvPr/>
+        </p:nvSpPr>
+        <p:spPr>
+          <a:xfrm>
+            <a:off x="4976775" y="2366010"/>
+            <a:ext cx="1543452" cy="288036"/>
+          </a:xfrm>
+          <a:prstGeom prst="rect">
+            <a:avLst/>
+          </a:prstGeom>
+          <a:noFill/>
+          <a:ln>
+            <a:noFill/>
+          </a:ln>
+        </p:spPr>
+        <p:txBody>
+          <a:bodyPr anchorCtr="0" anchor="t" bIns="37500" lIns="37500" spcFirstLastPara="1" rIns="37500" wrap="square" tIns="37500">
+            <a:spAutoFit/>
+          </a:bodyPr>
+          <a:lstStyle/>
+          <a:p>
+            <a:pPr indent="0" lvl="0" marL="0" marR="0" rtl="0" algn="l">
+              <a:spcBef>
+                <a:spcPts val="0"/>
+              </a:spcBef>
+              <a:spcAft>
+                <a:spcPts val="0"/>
+              </a:spcAft>
+              <a:buNone/>
+            </a:pPr>
+            <a:r>
+              <a:rPr b="0" i="0" lang="zh-TW" sz="800">
+                <a:solidFill>
+                  <a:srgbClr val="2D2D2D"/>
+                </a:solidFill>
+                <a:latin typeface="Calibri"/>
+                <a:ea typeface="Calibri"/>
+                <a:cs typeface="Calibri"/>
+                <a:sym typeface="Calibri"/>
+              </a:rPr>
+              <a:t>改分類 / 排除 / 套用修正</a:t>
+            </a:r>
+            <a:endParaRPr sz="1100"/>
+          </a:p>
+        </p:txBody>
+      </p:sp>
+      <p:sp>
+        <p:nvSpPr>
+          <p:cNvPr id="249" name="Google Shape;249;p28"/>
+          <p:cNvSpPr txBox="1"/>
+          <p:nvPr/>
+        </p:nvSpPr>
+        <p:spPr>
+          <a:xfrm>
+            <a:off x="6650562" y="2606040"/>
+            <a:ext cx="150915" cy="342900"/>
+          </a:xfrm>
+          <a:prstGeom prst="rect">
+            <a:avLst/>
+          </a:prstGeom>
+          <a:noFill/>
+          <a:ln>
+            <a:noFill/>
+          </a:ln>
+        </p:spPr>
+        <p:txBody>
+          <a:bodyPr anchorCtr="0" anchor="ctr" bIns="37500" lIns="37500" spcFirstLastPara="1" rIns="37500" wrap="square" tIns="37500">
+            <a:spAutoFit/>
+          </a:bodyPr>
+          <a:lstStyle/>
+          <a:p>
+            <a:pPr indent="0" lvl="0" marL="0" marR="0" rtl="0" algn="ctr">
+              <a:spcBef>
+                <a:spcPts val="0"/>
+              </a:spcBef>
+              <a:spcAft>
+                <a:spcPts val="0"/>
+              </a:spcAft>
+              <a:buNone/>
+            </a:pPr>
+            <a:r>
+              <a:rPr b="1" i="0" lang="zh-TW" sz="1100">
+                <a:solidFill>
+                  <a:srgbClr val="FCA311"/>
+                </a:solidFill>
+                <a:latin typeface="Calibri"/>
+                <a:ea typeface="Calibri"/>
+                <a:cs typeface="Calibri"/>
+                <a:sym typeface="Calibri"/>
+              </a:rPr>
+              <a:t>▶</a:t>
+            </a:r>
+            <a:endParaRPr sz="1100"/>
+          </a:p>
+        </p:txBody>
+      </p:sp>
+      <p:sp>
+        <p:nvSpPr>
+          <p:cNvPr id="250" name="Google Shape;250;p28"/>
+          <p:cNvSpPr txBox="1"/>
+          <p:nvPr/>
+        </p:nvSpPr>
+        <p:spPr>
+          <a:xfrm>
+            <a:off x="6815198" y="1028700"/>
+            <a:ext cx="1955039" cy="2606040"/>
+          </a:xfrm>
+          <a:prstGeom prst="rect">
+            <a:avLst/>
+          </a:prstGeom>
+          <a:solidFill>
+            <a:srgbClr val="F4F5F7"/>
+          </a:solidFill>
+          <a:ln>
+            <a:noFill/>
+          </a:ln>
+        </p:spPr>
+        <p:txBody>
+          <a:bodyPr anchorCtr="0" anchor="t" bIns="34275" lIns="68575" spcFirstLastPara="1" rIns="68575" wrap="square" tIns="34275">
+            <a:spAutoFit/>
+          </a:bodyPr>
+          <a:lstStyle/>
+          <a:p>
+            <a:pPr indent="0" lvl="0" marL="0" marR="0" rtl="0" algn="l">
+              <a:spcBef>
+                <a:spcPts val="0"/>
+              </a:spcBef>
+              <a:spcAft>
+                <a:spcPts val="0"/>
+              </a:spcAft>
+              <a:buNone/>
+            </a:pPr>
+            <a:r>
+              <a:t/>
+            </a:r>
+            <a:endParaRPr sz="1400">
+              <a:solidFill>
+                <a:schemeClr val="dk1"/>
+              </a:solidFill>
+              <a:latin typeface="Calibri"/>
+              <a:ea typeface="Calibri"/>
+              <a:cs typeface="Calibri"/>
+              <a:sym typeface="Calibri"/>
+            </a:endParaRPr>
+          </a:p>
+        </p:txBody>
+      </p:sp>
+      <p:sp>
+        <p:nvSpPr>
+          <p:cNvPr id="251" name="Google Shape;251;p28"/>
+          <p:cNvSpPr txBox="1"/>
+          <p:nvPr/>
+        </p:nvSpPr>
+        <p:spPr>
+          <a:xfrm>
+            <a:off x="6815198" y="1028700"/>
+            <a:ext cx="1955039" cy="425196"/>
+          </a:xfrm>
+          <a:prstGeom prst="rect">
+            <a:avLst/>
+          </a:prstGeom>
+          <a:solidFill>
+            <a:srgbClr val="E86A17"/>
+          </a:solidFill>
+          <a:ln>
+            <a:noFill/>
+          </a:ln>
+        </p:spPr>
+        <p:txBody>
+          <a:bodyPr anchorCtr="0" anchor="t" bIns="34275" lIns="68575" spcFirstLastPara="1" rIns="68575" wrap="square" tIns="34275">
+            <a:spAutoFit/>
+          </a:bodyPr>
+          <a:lstStyle/>
+          <a:p>
+            <a:pPr indent="0" lvl="0" marL="0" marR="0" rtl="0" algn="l">
+              <a:spcBef>
+                <a:spcPts val="0"/>
+              </a:spcBef>
+              <a:spcAft>
+                <a:spcPts val="0"/>
+              </a:spcAft>
+              <a:buNone/>
+            </a:pPr>
+            <a:r>
+              <a:t/>
+            </a:r>
+            <a:endParaRPr sz="1400">
+              <a:solidFill>
+                <a:schemeClr val="dk1"/>
+              </a:solidFill>
+              <a:latin typeface="Calibri"/>
+              <a:ea typeface="Calibri"/>
+              <a:cs typeface="Calibri"/>
+              <a:sym typeface="Calibri"/>
+            </a:endParaRPr>
+          </a:p>
+        </p:txBody>
+      </p:sp>
+      <p:sp>
+        <p:nvSpPr>
+          <p:cNvPr id="252" name="Google Shape;252;p28"/>
+          <p:cNvSpPr txBox="1"/>
+          <p:nvPr/>
+        </p:nvSpPr>
+        <p:spPr>
+          <a:xfrm>
+            <a:off x="6918095" y="1097280"/>
+            <a:ext cx="329270" cy="308610"/>
+          </a:xfrm>
+          <a:prstGeom prst="rect">
+            <a:avLst/>
+          </a:prstGeom>
+          <a:noFill/>
+          <a:ln>
+            <a:noFill/>
+          </a:ln>
+        </p:spPr>
+        <p:txBody>
+          <a:bodyPr anchorCtr="0" anchor="t" bIns="37500" lIns="37500" spcFirstLastPara="1" rIns="37500" wrap="square" tIns="37500">
+            <a:spAutoFit/>
+          </a:bodyPr>
+          <a:lstStyle/>
+          <a:p>
+            <a:pPr indent="0" lvl="0" marL="0" marR="0" rtl="0" algn="l">
+              <a:spcBef>
+                <a:spcPts val="0"/>
+              </a:spcBef>
+              <a:spcAft>
+                <a:spcPts val="0"/>
+              </a:spcAft>
+              <a:buNone/>
+            </a:pPr>
+            <a:r>
+              <a:rPr b="1" i="0" lang="zh-TW" sz="1400">
+                <a:solidFill>
+                  <a:srgbClr val="FFFFFF"/>
+                </a:solidFill>
+                <a:latin typeface="Calibri"/>
+                <a:ea typeface="Calibri"/>
+                <a:cs typeface="Calibri"/>
+                <a:sym typeface="Calibri"/>
+              </a:rPr>
+              <a:t>04</a:t>
+            </a:r>
+            <a:endParaRPr sz="1100"/>
+          </a:p>
+        </p:txBody>
+      </p:sp>
+      <p:sp>
+        <p:nvSpPr>
+          <p:cNvPr id="253" name="Google Shape;253;p28"/>
+          <p:cNvSpPr txBox="1"/>
+          <p:nvPr/>
+        </p:nvSpPr>
+        <p:spPr>
+          <a:xfrm>
+            <a:off x="7192486" y="1083564"/>
+            <a:ext cx="1474854" cy="329184"/>
+          </a:xfrm>
+          <a:prstGeom prst="rect">
+            <a:avLst/>
+          </a:prstGeom>
+          <a:noFill/>
+          <a:ln>
+            <a:noFill/>
+          </a:ln>
+        </p:spPr>
+        <p:txBody>
+          <a:bodyPr anchorCtr="0" anchor="t" bIns="37500" lIns="37500" spcFirstLastPara="1" rIns="37500" wrap="square" tIns="37500">
+            <a:spAutoFit/>
+          </a:bodyPr>
+          <a:lstStyle/>
+          <a:p>
+            <a:pPr indent="0" lvl="0" marL="0" marR="0" rtl="0" algn="l">
+              <a:spcBef>
+                <a:spcPts val="0"/>
+              </a:spcBef>
+              <a:spcAft>
+                <a:spcPts val="0"/>
+              </a:spcAft>
+              <a:buNone/>
+            </a:pPr>
+            <a:r>
+              <a:rPr b="1" i="0" lang="zh-TW" sz="900">
+                <a:solidFill>
+                  <a:srgbClr val="FFFFFF"/>
+                </a:solidFill>
+                <a:latin typeface="Calibri"/>
+                <a:ea typeface="Calibri"/>
+                <a:cs typeface="Calibri"/>
+                <a:sym typeface="Calibri"/>
+              </a:rPr>
+              <a:t>Claude Skill 生成報告</a:t>
+            </a:r>
+            <a:endParaRPr sz="1100"/>
+          </a:p>
+        </p:txBody>
+      </p:sp>
+      <p:sp>
+        <p:nvSpPr>
+          <p:cNvPr id="254" name="Google Shape;254;p28"/>
+          <p:cNvSpPr txBox="1"/>
+          <p:nvPr/>
+        </p:nvSpPr>
+        <p:spPr>
+          <a:xfrm>
+            <a:off x="7007272" y="1680210"/>
+            <a:ext cx="41159" cy="150876"/>
+          </a:xfrm>
+          <a:prstGeom prst="rect">
+            <a:avLst/>
+          </a:prstGeom>
+          <a:solidFill>
+            <a:srgbClr val="E86A17"/>
+          </a:solidFill>
+          <a:ln>
+            <a:noFill/>
+          </a:ln>
+        </p:spPr>
+        <p:txBody>
+          <a:bodyPr anchorCtr="0" anchor="t" bIns="34275" lIns="68575" spcFirstLastPara="1" rIns="68575" wrap="square" tIns="34275">
+            <a:spAutoFit/>
+          </a:bodyPr>
+          <a:lstStyle/>
+          <a:p>
+            <a:pPr indent="0" lvl="0" marL="0" marR="0" rtl="0" algn="l">
+              <a:spcBef>
+                <a:spcPts val="0"/>
+              </a:spcBef>
+              <a:spcAft>
+                <a:spcPts val="0"/>
+              </a:spcAft>
+              <a:buNone/>
+            </a:pPr>
+            <a:r>
+              <a:t/>
+            </a:r>
+            <a:endParaRPr sz="1400">
+              <a:solidFill>
+                <a:schemeClr val="dk1"/>
+              </a:solidFill>
+              <a:latin typeface="Calibri"/>
+              <a:ea typeface="Calibri"/>
+              <a:cs typeface="Calibri"/>
+              <a:sym typeface="Calibri"/>
+            </a:endParaRPr>
+          </a:p>
+        </p:txBody>
+      </p:sp>
+      <p:sp>
+        <p:nvSpPr>
+          <p:cNvPr id="255" name="Google Shape;255;p28"/>
+          <p:cNvSpPr txBox="1"/>
+          <p:nvPr/>
+        </p:nvSpPr>
+        <p:spPr>
+          <a:xfrm>
+            <a:off x="7123888" y="1611630"/>
             <a:ext cx="1543452" cy="288036"/>
           </a:xfrm>
           <a:prstGeom prst="rect">
@@ -25847,26 +26407,34 @@
               </a:rPr>
               <a:t>slot-report skill</a:t>
             </a:r>
-            <a:endParaRPr sz="1100"/>
-          </a:p>
-        </p:txBody>
-      </p:sp>
-      <p:sp>
-        <p:nvSpPr>
-          <p:cNvPr id="245" name="Google Shape;245;p28"/>
+            <a:endParaRPr b="0" i="0" sz="800">
+              <a:solidFill>
+                <a:srgbClr val="2D2D2D"/>
+              </a:solidFill>
+              <a:latin typeface="Calibri"/>
+              <a:ea typeface="Calibri"/>
+              <a:cs typeface="Calibri"/>
+              <a:sym typeface="Calibri"/>
+            </a:endParaRPr>
+          </a:p>
+        </p:txBody>
+      </p:sp>
+      <p:sp>
+        <p:nvSpPr>
+          <p:cNvPr id="256" name="Google Shape;256;p28"/>
           <p:cNvSpPr txBox="1"/>
           <p:nvPr/>
         </p:nvSpPr>
         <p:spPr>
           <a:xfrm>
-            <a:off x="4860159" y="2057400"/>
+            <a:off x="7007272" y="2057400"/>
             <a:ext cx="41159" cy="150876"/>
           </a:xfrm>
           <a:prstGeom prst="rect">
             <a:avLst/>
           </a:prstGeom>
           <a:solidFill>
-            <a:srgbClr val="7C3AED"/>
+            <a:srgbClr val="E86A17"/>
           </a:solidFill>
           <a:ln>
             <a:noFill/>
@@ -25904,13 +26472,13 @@
       </p:sp>
       <p:sp>
         <p:nvSpPr>
-          <p:cNvPr id="246" name="Google Shape;246;p28"/>
+          <p:cNvPr id="257" name="Google Shape;257;p28"/>
           <p:cNvSpPr txBox="1"/>
           <p:nvPr/>
         </p:nvSpPr>
         <p:spPr>
           <a:xfrm>
-            <a:off x="4976775" y="1988820"/>
+            <a:off x="7123888" y="1988820"/>
             <a:ext cx="1543452" cy="288036"/>
           </a:xfrm>
           <a:prstGeom prst="rect">
@@ -25946,7 +26514,7 @@
                 <a:cs typeface="Calibri"/>
                 <a:sym typeface="Calibri"/>
               </a:rPr>
-              <a:t>生成 report.html</a:t>
+              <a:t>report.html</a:t>
             </a:r>
             <a:endParaRPr sz="1100"/>
           </a:p>
@@ -25954,20 +26522,20 @@
       </p:sp>
       <p:sp>
         <p:nvSpPr>
-          <p:cNvPr id="247" name="Google Shape;247;p28"/>
+          <p:cNvPr id="258" name="Google Shape;258;p28"/>
           <p:cNvSpPr txBox="1"/>
           <p:nvPr/>
         </p:nvSpPr>
         <p:spPr>
           <a:xfrm>
-            <a:off x="4860159" y="2434590"/>
+            <a:off x="7007272" y="2434590"/>
             <a:ext cx="41159" cy="150876"/>
           </a:xfrm>
           <a:prstGeom prst="rect">
             <a:avLst/>
           </a:prstGeom>
           <a:solidFill>
-            <a:srgbClr val="7C3AED"/>
+            <a:srgbClr val="E86A17"/>
           </a:solidFill>
           <a:ln>
             <a:noFill/>
@@ -26005,13 +26573,13 @@
       </p:sp>
       <p:sp>
         <p:nvSpPr>
-          <p:cNvPr id="248" name="Google Shape;248;p28"/>
+          <p:cNvPr id="259" name="Google Shape;259;p28"/>
           <p:cNvSpPr txBox="1"/>
           <p:nvPr/>
         </p:nvSpPr>
         <p:spPr>
           <a:xfrm>
-            <a:off x="4976775" y="2366010"/>
+            <a:off x="7123888" y="2366010"/>
             <a:ext cx="1543452" cy="288036"/>
           </a:xfrm>
           <a:prstGeom prst="rect">
@@ -26055,70 +26623,20 @@
       </p:sp>
       <p:sp>
         <p:nvSpPr>
-          <p:cNvPr id="249" name="Google Shape;249;p28"/>
+          <p:cNvPr id="260" name="Google Shape;260;p28"/>
           <p:cNvSpPr txBox="1"/>
           <p:nvPr/>
         </p:nvSpPr>
         <p:spPr>
           <a:xfrm>
-            <a:off x="6650562" y="2606040"/>
-            <a:ext cx="150915" cy="342900"/>
-          </a:xfrm>
-          <a:prstGeom prst="rect">
-            <a:avLst/>
-          </a:prstGeom>
-          <a:noFill/>
-          <a:ln>
-            <a:noFill/>
-          </a:ln>
-        </p:spPr>
-        <p:txBody>
-          <a:bodyPr anchorCtr="0" anchor="ctr" bIns="37500" lIns="37500" spcFirstLastPara="1" rIns="37500" wrap="square" tIns="37500">
-            <a:spAutoFit/>
-          </a:bodyPr>
-          <a:lstStyle/>
-          <a:p>
-            <a:pPr indent="0" lvl="0" marL="0" marR="0" rtl="0" algn="ctr">
-              <a:spcBef>
-                <a:spcPts val="0"/>
-              </a:spcBef>
-              <a:spcAft>
-                <a:spcPts val="0"/>
-              </a:spcAft>
-              <a:buNone/>
-            </a:pPr>
-            <a:r>
-              <a:rPr b="1" i="0" lang="zh-TW" sz="1100">
-                <a:solidFill>
-                  <a:srgbClr val="FCA311"/>
-                </a:solidFill>
-                <a:latin typeface="Calibri"/>
-                <a:ea typeface="Calibri"/>
-                <a:cs typeface="Calibri"/>
-                <a:sym typeface="Calibri"/>
-              </a:rPr>
-              <a:t>▶</a:t>
-            </a:r>
-            <a:endParaRPr sz="1100"/>
-          </a:p>
-        </p:txBody>
-      </p:sp>
-      <p:sp>
-        <p:nvSpPr>
-          <p:cNvPr id="250" name="Google Shape;250;p28"/>
-          <p:cNvSpPr txBox="1"/>
-          <p:nvPr/>
-        </p:nvSpPr>
-        <p:spPr>
-          <a:xfrm>
-            <a:off x="6815198" y="1028700"/>
-            <a:ext cx="1955039" cy="2606040"/>
+            <a:off x="342989" y="4834890"/>
+            <a:ext cx="8458117" cy="219456"/>
           </a:xfrm>
           <a:prstGeom prst="rect">
             <a:avLst/>
           </a:prstGeom>
           <a:solidFill>
-            <a:srgbClr val="F4F5F7"/>
+            <a:srgbClr val="FFEFCC"/>
           </a:solidFill>
           <a:ln>
             <a:noFill/>
@@ -26156,519 +26674,6 @@
       </p:sp>
       <p:sp>
         <p:nvSpPr>
-          <p:cNvPr id="251" name="Google Shape;251;p28"/>
-          <p:cNvSpPr txBox="1"/>
-          <p:nvPr/>
-        </p:nvSpPr>
-        <p:spPr>
-          <a:xfrm>
-            <a:off x="6815198" y="1028700"/>
-            <a:ext cx="1955039" cy="425196"/>
-          </a:xfrm>
-          <a:prstGeom prst="rect">
-            <a:avLst/>
-          </a:prstGeom>
-          <a:solidFill>
-            <a:srgbClr val="E86A17"/>
-          </a:solidFill>
-          <a:ln>
-            <a:noFill/>
-          </a:ln>
-        </p:spPr>
-        <p:txBody>
-          <a:bodyPr anchorCtr="0" anchor="t" bIns="34275" lIns="68575" spcFirstLastPara="1" rIns="68575" wrap="square" tIns="34275">
-            <a:spAutoFit/>
-          </a:bodyPr>
-          <a:lstStyle/>
-          <a:p>
-            <a:pPr indent="0" lvl="0" marL="0" marR="0" rtl="0" algn="l">
-              <a:spcBef>
-                <a:spcPts val="0"/>
-              </a:spcBef>
-              <a:spcAft>
-                <a:spcPts val="0"/>
-              </a:spcAft>
-              <a:buNone/>
-            </a:pPr>
-            <a:r>
-              <a:t/>
-            </a:r>
-            <a:endParaRPr sz="1400">
-              <a:solidFill>
-                <a:schemeClr val="dk1"/>
-              </a:solidFill>
-              <a:latin typeface="Calibri"/>
-              <a:ea typeface="Calibri"/>
-              <a:cs typeface="Calibri"/>
-              <a:sym typeface="Calibri"/>
-            </a:endParaRPr>
-          </a:p>
-        </p:txBody>
-      </p:sp>
-      <p:sp>
-        <p:nvSpPr>
-          <p:cNvPr id="252" name="Google Shape;252;p28"/>
-          <p:cNvSpPr txBox="1"/>
-          <p:nvPr/>
-        </p:nvSpPr>
-        <p:spPr>
-          <a:xfrm>
-            <a:off x="6918095" y="1097280"/>
-            <a:ext cx="329270" cy="308610"/>
-          </a:xfrm>
-          <a:prstGeom prst="rect">
-            <a:avLst/>
-          </a:prstGeom>
-          <a:noFill/>
-          <a:ln>
-            <a:noFill/>
-          </a:ln>
-        </p:spPr>
-        <p:txBody>
-          <a:bodyPr anchorCtr="0" anchor="t" bIns="37500" lIns="37500" spcFirstLastPara="1" rIns="37500" wrap="square" tIns="37500">
-            <a:spAutoFit/>
-          </a:bodyPr>
-          <a:lstStyle/>
-          <a:p>
-            <a:pPr indent="0" lvl="0" marL="0" marR="0" rtl="0" algn="l">
-              <a:spcBef>
-                <a:spcPts val="0"/>
-              </a:spcBef>
-              <a:spcAft>
-                <a:spcPts val="0"/>
-              </a:spcAft>
-              <a:buNone/>
-            </a:pPr>
-            <a:r>
-              <a:rPr b="1" i="0" lang="zh-TW" sz="1400">
-                <a:solidFill>
-                  <a:srgbClr val="FFFFFF"/>
-                </a:solidFill>
-                <a:latin typeface="Calibri"/>
-                <a:ea typeface="Calibri"/>
-                <a:cs typeface="Calibri"/>
-                <a:sym typeface="Calibri"/>
-              </a:rPr>
-              <a:t>04</a:t>
-            </a:r>
-            <a:endParaRPr sz="1100"/>
-          </a:p>
-        </p:txBody>
-      </p:sp>
-      <p:sp>
-        <p:nvSpPr>
-          <p:cNvPr id="253" name="Google Shape;253;p28"/>
-          <p:cNvSpPr txBox="1"/>
-          <p:nvPr/>
-        </p:nvSpPr>
-        <p:spPr>
-          <a:xfrm>
-            <a:off x="7192486" y="1083564"/>
-            <a:ext cx="1474854" cy="329184"/>
-          </a:xfrm>
-          <a:prstGeom prst="rect">
-            <a:avLst/>
-          </a:prstGeom>
-          <a:noFill/>
-          <a:ln>
-            <a:noFill/>
-          </a:ln>
-        </p:spPr>
-        <p:txBody>
-          <a:bodyPr anchorCtr="0" anchor="t" bIns="37500" lIns="37500" spcFirstLastPara="1" rIns="37500" wrap="square" tIns="37500">
-            <a:spAutoFit/>
-          </a:bodyPr>
-          <a:lstStyle/>
-          <a:p>
-            <a:pPr indent="0" lvl="0" marL="0" marR="0" rtl="0" algn="l">
-              <a:spcBef>
-                <a:spcPts val="0"/>
-              </a:spcBef>
-              <a:spcAft>
-                <a:spcPts val="0"/>
-              </a:spcAft>
-              <a:buNone/>
-            </a:pPr>
-            <a:r>
-              <a:rPr b="1" i="0" lang="zh-TW" sz="900">
-                <a:solidFill>
-                  <a:srgbClr val="FFFFFF"/>
-                </a:solidFill>
-                <a:latin typeface="Calibri"/>
-                <a:ea typeface="Calibri"/>
-                <a:cs typeface="Calibri"/>
-                <a:sym typeface="Calibri"/>
-              </a:rPr>
-              <a:t>備份 / 輸出 Figma</a:t>
-            </a:r>
-            <a:endParaRPr sz="1100"/>
-          </a:p>
-        </p:txBody>
-      </p:sp>
-      <p:sp>
-        <p:nvSpPr>
-          <p:cNvPr id="254" name="Google Shape;254;p28"/>
-          <p:cNvSpPr txBox="1"/>
-          <p:nvPr/>
-        </p:nvSpPr>
-        <p:spPr>
-          <a:xfrm>
-            <a:off x="7007272" y="1680210"/>
-            <a:ext cx="41159" cy="150876"/>
-          </a:xfrm>
-          <a:prstGeom prst="rect">
-            <a:avLst/>
-          </a:prstGeom>
-          <a:solidFill>
-            <a:srgbClr val="E86A17"/>
-          </a:solidFill>
-          <a:ln>
-            <a:noFill/>
-          </a:ln>
-        </p:spPr>
-        <p:txBody>
-          <a:bodyPr anchorCtr="0" anchor="t" bIns="34275" lIns="68575" spcFirstLastPara="1" rIns="68575" wrap="square" tIns="34275">
-            <a:spAutoFit/>
-          </a:bodyPr>
-          <a:lstStyle/>
-          <a:p>
-            <a:pPr indent="0" lvl="0" marL="0" marR="0" rtl="0" algn="l">
-              <a:spcBef>
-                <a:spcPts val="0"/>
-              </a:spcBef>
-              <a:spcAft>
-                <a:spcPts val="0"/>
-              </a:spcAft>
-              <a:buNone/>
-            </a:pPr>
-            <a:r>
-              <a:t/>
-            </a:r>
-            <a:endParaRPr sz="1400">
-              <a:solidFill>
-                <a:schemeClr val="dk1"/>
-              </a:solidFill>
-              <a:latin typeface="Calibri"/>
-              <a:ea typeface="Calibri"/>
-              <a:cs typeface="Calibri"/>
-              <a:sym typeface="Calibri"/>
-            </a:endParaRPr>
-          </a:p>
-        </p:txBody>
-      </p:sp>
-      <p:sp>
-        <p:nvSpPr>
-          <p:cNvPr id="255" name="Google Shape;255;p28"/>
-          <p:cNvSpPr txBox="1"/>
-          <p:nvPr/>
-        </p:nvSpPr>
-        <p:spPr>
-          <a:xfrm>
-            <a:off x="7123888" y="1611630"/>
-            <a:ext cx="1543452" cy="288036"/>
-          </a:xfrm>
-          <a:prstGeom prst="rect">
-            <a:avLst/>
-          </a:prstGeom>
-          <a:noFill/>
-          <a:ln>
-            <a:noFill/>
-          </a:ln>
-        </p:spPr>
-        <p:txBody>
-          <a:bodyPr anchorCtr="0" anchor="t" bIns="37500" lIns="37500" spcFirstLastPara="1" rIns="37500" wrap="square" tIns="37500">
-            <a:spAutoFit/>
-          </a:bodyPr>
-          <a:lstStyle/>
-          <a:p>
-            <a:pPr indent="0" lvl="0" marL="0" marR="0" rtl="0" algn="l">
-              <a:spcBef>
-                <a:spcPts val="0"/>
-              </a:spcBef>
-              <a:spcAft>
-                <a:spcPts val="0"/>
-              </a:spcAft>
-              <a:buNone/>
-            </a:pPr>
-            <a:r>
-              <a:rPr b="0" i="0" lang="zh-TW" sz="800">
-                <a:solidFill>
-                  <a:srgbClr val="2D2D2D"/>
-                </a:solidFill>
-                <a:latin typeface="Calibri"/>
-                <a:ea typeface="Calibri"/>
-                <a:cs typeface="Calibri"/>
-                <a:sym typeface="Calibri"/>
-              </a:rPr>
-              <a:t>archive_to_fileserver</a:t>
-            </a:r>
-            <a:endParaRPr b="0" i="0" sz="800">
-              <a:solidFill>
-                <a:srgbClr val="2D2D2D"/>
-              </a:solidFill>
-              <a:latin typeface="Calibri"/>
-              <a:ea typeface="Calibri"/>
-              <a:cs typeface="Calibri"/>
-              <a:sym typeface="Calibri"/>
-            </a:endParaRPr>
-          </a:p>
-        </p:txBody>
-      </p:sp>
-      <p:sp>
-        <p:nvSpPr>
-          <p:cNvPr id="256" name="Google Shape;256;p28"/>
-          <p:cNvSpPr txBox="1"/>
-          <p:nvPr/>
-        </p:nvSpPr>
-        <p:spPr>
-          <a:xfrm>
-            <a:off x="7007272" y="2057400"/>
-            <a:ext cx="41159" cy="150876"/>
-          </a:xfrm>
-          <a:prstGeom prst="rect">
-            <a:avLst/>
-          </a:prstGeom>
-          <a:solidFill>
-            <a:srgbClr val="E86A17"/>
-          </a:solidFill>
-          <a:ln>
-            <a:noFill/>
-          </a:ln>
-        </p:spPr>
-        <p:txBody>
-          <a:bodyPr anchorCtr="0" anchor="t" bIns="34275" lIns="68575" spcFirstLastPara="1" rIns="68575" wrap="square" tIns="34275">
-            <a:spAutoFit/>
-          </a:bodyPr>
-          <a:lstStyle/>
-          <a:p>
-            <a:pPr indent="0" lvl="0" marL="0" marR="0" rtl="0" algn="l">
-              <a:spcBef>
-                <a:spcPts val="0"/>
-              </a:spcBef>
-              <a:spcAft>
-                <a:spcPts val="0"/>
-              </a:spcAft>
-              <a:buNone/>
-            </a:pPr>
-            <a:r>
-              <a:t/>
-            </a:r>
-            <a:endParaRPr sz="1400">
-              <a:solidFill>
-                <a:schemeClr val="dk1"/>
-              </a:solidFill>
-              <a:latin typeface="Calibri"/>
-              <a:ea typeface="Calibri"/>
-              <a:cs typeface="Calibri"/>
-              <a:sym typeface="Calibri"/>
-            </a:endParaRPr>
-          </a:p>
-        </p:txBody>
-      </p:sp>
-      <p:sp>
-        <p:nvSpPr>
-          <p:cNvPr id="257" name="Google Shape;257;p28"/>
-          <p:cNvSpPr txBox="1"/>
-          <p:nvPr/>
-        </p:nvSpPr>
-        <p:spPr>
-          <a:xfrm>
-            <a:off x="7123888" y="1988820"/>
-            <a:ext cx="1543452" cy="288036"/>
-          </a:xfrm>
-          <a:prstGeom prst="rect">
-            <a:avLst/>
-          </a:prstGeom>
-          <a:noFill/>
-          <a:ln>
-            <a:noFill/>
-          </a:ln>
-        </p:spPr>
-        <p:txBody>
-          <a:bodyPr anchorCtr="0" anchor="t" bIns="37500" lIns="37500" spcFirstLastPara="1" rIns="37500" wrap="square" tIns="37500">
-            <a:spAutoFit/>
-          </a:bodyPr>
-          <a:lstStyle/>
-          <a:p>
-            <a:pPr indent="0" lvl="0" marL="0" marR="0" rtl="0" algn="l">
-              <a:spcBef>
-                <a:spcPts val="0"/>
-              </a:spcBef>
-              <a:spcAft>
-                <a:spcPts val="0"/>
-              </a:spcAft>
-              <a:buNone/>
-            </a:pPr>
-            <a:r>
-              <a:rPr b="0" i="0" lang="zh-TW" sz="800">
-                <a:solidFill>
-                  <a:srgbClr val="2D2D2D"/>
-                </a:solidFill>
-                <a:latin typeface="Calibri"/>
-                <a:ea typeface="Calibri"/>
-                <a:cs typeface="Calibri"/>
-                <a:sym typeface="Calibri"/>
-              </a:rPr>
-              <a:t>run_figma_export</a:t>
-            </a:r>
-            <a:endParaRPr sz="1100"/>
-          </a:p>
-        </p:txBody>
-      </p:sp>
-      <p:sp>
-        <p:nvSpPr>
-          <p:cNvPr id="258" name="Google Shape;258;p28"/>
-          <p:cNvSpPr txBox="1"/>
-          <p:nvPr/>
-        </p:nvSpPr>
-        <p:spPr>
-          <a:xfrm>
-            <a:off x="7007272" y="2434590"/>
-            <a:ext cx="41159" cy="150876"/>
-          </a:xfrm>
-          <a:prstGeom prst="rect">
-            <a:avLst/>
-          </a:prstGeom>
-          <a:solidFill>
-            <a:srgbClr val="E86A17"/>
-          </a:solidFill>
-          <a:ln>
-            <a:noFill/>
-          </a:ln>
-        </p:spPr>
-        <p:txBody>
-          <a:bodyPr anchorCtr="0" anchor="t" bIns="34275" lIns="68575" spcFirstLastPara="1" rIns="68575" wrap="square" tIns="34275">
-            <a:spAutoFit/>
-          </a:bodyPr>
-          <a:lstStyle/>
-          <a:p>
-            <a:pPr indent="0" lvl="0" marL="0" marR="0" rtl="0" algn="l">
-              <a:spcBef>
-                <a:spcPts val="0"/>
-              </a:spcBef>
-              <a:spcAft>
-                <a:spcPts val="0"/>
-              </a:spcAft>
-              <a:buNone/>
-            </a:pPr>
-            <a:r>
-              <a:t/>
-            </a:r>
-            <a:endParaRPr sz="1400">
-              <a:solidFill>
-                <a:schemeClr val="dk1"/>
-              </a:solidFill>
-              <a:latin typeface="Calibri"/>
-              <a:ea typeface="Calibri"/>
-              <a:cs typeface="Calibri"/>
-              <a:sym typeface="Calibri"/>
-            </a:endParaRPr>
-          </a:p>
-        </p:txBody>
-      </p:sp>
-      <p:sp>
-        <p:nvSpPr>
-          <p:cNvPr id="259" name="Google Shape;259;p28"/>
-          <p:cNvSpPr txBox="1"/>
-          <p:nvPr/>
-        </p:nvSpPr>
-        <p:spPr>
-          <a:xfrm>
-            <a:off x="7123888" y="2366010"/>
-            <a:ext cx="1543452" cy="288036"/>
-          </a:xfrm>
-          <a:prstGeom prst="rect">
-            <a:avLst/>
-          </a:prstGeom>
-          <a:noFill/>
-          <a:ln>
-            <a:noFill/>
-          </a:ln>
-        </p:spPr>
-        <p:txBody>
-          <a:bodyPr anchorCtr="0" anchor="t" bIns="37500" lIns="37500" spcFirstLastPara="1" rIns="37500" wrap="square" tIns="37500">
-            <a:spAutoFit/>
-          </a:bodyPr>
-          <a:lstStyle/>
-          <a:p>
-            <a:pPr indent="0" lvl="0" marL="0" marR="0" rtl="0" algn="l">
-              <a:spcBef>
-                <a:spcPts val="0"/>
-              </a:spcBef>
-              <a:spcAft>
-                <a:spcPts val="0"/>
-              </a:spcAft>
-              <a:buNone/>
-            </a:pPr>
-            <a:r>
-              <a:rPr b="0" i="0" lang="zh-TW" sz="800">
-                <a:solidFill>
-                  <a:srgbClr val="2D2D2D"/>
-                </a:solidFill>
-                <a:latin typeface="Calibri"/>
-                <a:ea typeface="Calibri"/>
-                <a:cs typeface="Calibri"/>
-                <a:sym typeface="Calibri"/>
-              </a:rPr>
-              <a:t>Figma Board 匯入</a:t>
-            </a:r>
-            <a:endParaRPr sz="1100"/>
-          </a:p>
-        </p:txBody>
-      </p:sp>
-      <p:sp>
-        <p:nvSpPr>
-          <p:cNvPr id="260" name="Google Shape;260;p28"/>
-          <p:cNvSpPr txBox="1"/>
-          <p:nvPr/>
-        </p:nvSpPr>
-        <p:spPr>
-          <a:xfrm>
-            <a:off x="342989" y="4834890"/>
-            <a:ext cx="8458117" cy="219456"/>
-          </a:xfrm>
-          <a:prstGeom prst="rect">
-            <a:avLst/>
-          </a:prstGeom>
-          <a:solidFill>
-            <a:srgbClr val="FFEFCC"/>
-          </a:solidFill>
-          <a:ln>
-            <a:noFill/>
-          </a:ln>
-        </p:spPr>
-        <p:txBody>
-          <a:bodyPr anchorCtr="0" anchor="t" bIns="34275" lIns="68575" spcFirstLastPara="1" rIns="68575" wrap="square" tIns="34275">
-            <a:spAutoFit/>
-          </a:bodyPr>
-          <a:lstStyle/>
-          <a:p>
-            <a:pPr indent="0" lvl="0" marL="0" marR="0" rtl="0" algn="l">
-              <a:spcBef>
-                <a:spcPts val="0"/>
-              </a:spcBef>
-              <a:spcAft>
-                <a:spcPts val="0"/>
-              </a:spcAft>
-              <a:buNone/>
-            </a:pPr>
-            <a:r>
-              <a:t/>
-            </a:r>
-            <a:endParaRPr sz="1400">
-              <a:solidFill>
-                <a:schemeClr val="dk1"/>
-              </a:solidFill>
-              <a:latin typeface="Calibri"/>
-              <a:ea typeface="Calibri"/>
-              <a:cs typeface="Calibri"/>
-              <a:sym typeface="Calibri"/>
-            </a:endParaRPr>
-          </a:p>
-        </p:txBody>
-      </p:sp>
-      <p:sp>
-        <p:nvSpPr>
           <p:cNvPr id="261" name="Google Shape;261;p28"/>
           <p:cNvSpPr txBox="1"/>
           <p:nvPr/>
@@ -26711,7 +26716,7 @@
                 <a:cs typeface="Calibri"/>
                 <a:sym typeface="Calibri"/>
               </a:rPr>
-              <a:t>⚠  每個步驟均有對應的 PowerShell 腳本，可單獨執行，也可依需求彈性組合</a:t>
+              <a:t>在專案根目錄執行 claude 後，只需輸入「幫我分析 GameName」即可串聯全部步驟</a:t>
             </a:r>
             <a:endParaRPr sz="1100"/>
           </a:p>
@@ -27294,7 +27299,7 @@
                 <a:cs typeface="Calibri"/>
                 <a:sym typeface="Calibri"/>
               </a:rPr>
-              <a:t>4.2  主程式使用方式</a:t>
+              <a:t>4.2  ROI 確認與分類流程</a:t>
             </a:r>
             <a:endParaRPr sz="1100"/>
           </a:p>
@@ -27447,7 +27452,7 @@
                 <a:cs typeface="Calibri"/>
                 <a:sym typeface="Calibri"/>
               </a:rPr>
-              <a:t>4.3  Claude Skill 建立與呼叫</a:t>
+              <a:t>4.3  人工審核修正</a:t>
             </a:r>
             <a:endParaRPr sz="1100"/>
           </a:p>
@@ -27600,7 +27605,7 @@
                 <a:cs typeface="Calibri"/>
                 <a:sym typeface="Calibri"/>
               </a:rPr>
-              <a:t>4.4  Figma Board 匯入方式</a:t>
+              <a:t>4.4  Claude Skill 競品報告</a:t>
             </a:r>
             <a:endParaRPr sz="1100"/>
           </a:p>
@@ -27753,7 +27758,7 @@
                 <a:cs typeface="Calibri"/>
                 <a:sym typeface="Calibri"/>
               </a:rPr>
-              <a:t>4.5  備份至 Fileserver</a:t>
+              <a:t>4.5  GitHub 取得最新版本</a:t>
             </a:r>
             <a:endParaRPr sz="1100"/>
           </a:p>
@@ -28249,7 +28254,7 @@
                 <a:cs typeface="Calibri"/>
                 <a:sym typeface="Calibri"/>
               </a:rPr>
-              <a:t>建立虛擬環境並安裝套件</a:t>
+              <a:t>取得專案並建立虛擬環境</a:t>
             </a:r>
             <a:endParaRPr sz="1100"/>
           </a:p>
@@ -28299,7 +28304,7 @@
                 <a:cs typeface="Calibri"/>
                 <a:sym typeface="Calibri"/>
               </a:rPr>
-              <a:t>自動建立 .venv 並安裝 numpy、opencv、paddleocr 等相依套件</a:t>
+              <a:t>git clone + checkout perf/cpu-optimize-ocr，再建立 .venv 安裝套件</a:t>
             </a:r>
             <a:endParaRPr sz="1100"/>
           </a:p>
@@ -28406,7 +28411,9 @@
                 <a:cs typeface="Consolas"/>
                 <a:sym typeface="Consolas"/>
               </a:rPr>
-              <a:t>PS&gt;  .\setup_venv.ps1</a:t>
+              <a:t>git clone https://github.com/Ashley860511/slot-classifier.git
+git checkout perf/cpu-optimize-ocr
+pip install -r requirements.txt</a:t>
             </a:r>
             <a:endParaRPr sz="1100"/>
           </a:p>
@@ -28559,7 +28566,7 @@
                 <a:cs typeface="Calibri"/>
                 <a:sym typeface="Calibri"/>
               </a:rPr>
-              <a:t>確認環境正常</a:t>
+              <a:t>安裝 Claude Code CLI</a:t>
             </a:r>
             <a:endParaRPr sz="1100"/>
           </a:p>
@@ -28609,7 +28616,7 @@
                 <a:cs typeface="Calibri"/>
                 <a:sym typeface="Calibri"/>
               </a:rPr>
-              <a:t>執行環境檢查，確認所有套件版本與相依性無誤</a:t>
+              <a:t>需要 Node.js 18+。安裝後執行 claude login 完成帳號綁定</a:t>
             </a:r>
             <a:endParaRPr sz="1100"/>
           </a:p>
@@ -28716,7 +28723,8 @@
                 <a:cs typeface="Consolas"/>
                 <a:sym typeface="Consolas"/>
               </a:rPr>
-              <a:t>PS&gt;  .\check_environment.ps1</a:t>
+              <a:t>npm install -g @anthropic/claude-code
+claude login</a:t>
             </a:r>
             <a:endParaRPr sz="1100"/>
           </a:p>
@@ -28869,7 +28877,7 @@
                 <a:cs typeface="Calibri"/>
                 <a:sym typeface="Calibri"/>
               </a:rPr>
-              <a:t>首次執行自動下載 OCR 模型</a:t>
+              <a:t>確認環境並首次執行</a:t>
             </a:r>
             <a:endParaRPr sz="1100"/>
           </a:p>
@@ -28919,7 +28927,7 @@
                 <a:cs typeface="Calibri"/>
                 <a:sym typeface="Calibri"/>
               </a:rPr>
-              <a:t>PaddleOCR 模型約 50MB，首次執行時自動下載，需確保網路連線</a:t>
+              <a:t>python check_environment.py 確認套件無誤。首次分類時 PaddleOCR 自動下載語言模型（約 300 MB）</a:t>
             </a:r>
             <a:endParaRPr sz="1100"/>
           </a:p>
@@ -29540,7 +29548,7 @@
                 <a:cs typeface="Calibri"/>
                 <a:sym typeface="Calibri"/>
               </a:rPr>
-              <a:t>主程式使用方式</a:t>
+              <a:t>ROI 確認與分類流程</a:t>
             </a:r>
             <a:endParaRPr sz="1100"/>
           </a:p>
@@ -29590,7 +29598,7 @@
                 <a:cs typeface="Calibri"/>
                 <a:sym typeface="Calibri"/>
               </a:rPr>
-              <a:t>Running the Classifier</a:t>
+              <a:t>ROI Confirmation &amp; Classification</a:t>
             </a:r>
             <a:endParaRPr sz="1100"/>
           </a:p>
@@ -29697,7 +29705,7 @@
                 <a:cs typeface="Calibri"/>
                 <a:sym typeface="Calibri"/>
               </a:rPr>
-              <a:t>4.2  主程式</a:t>
+              <a:t>4.2  ROI 確認與分類</a:t>
             </a:r>
             <a:endParaRPr sz="1100"/>
           </a:p>
@@ -29849,7 +29857,7 @@
                 <a:cs typeface="Calibri"/>
                 <a:sym typeface="Calibri"/>
               </a:rPr>
-              <a:t>將競品遊戲影片（.mp4）放入以下資料夾，支援多個影片一次處理</a:t>
+              <a:t>將競品遊戲影片（.mp4）放入資料夾。在專案根目錄啟動 Claude Code</a:t>
             </a:r>
             <a:endParaRPr sz="900">
               <a:solidFill>
@@ -29881,7 +29889,7 @@
                 <a:cs typeface="Calibri"/>
                 <a:sym typeface="Calibri"/>
               </a:rPr>
-              <a:t>請確保影片錄製完整，包含競品分析所需資料</a:t>
+              <a:t>然後輸入：幫我分析 GameName</a:t>
             </a:r>
             <a:endParaRPr sz="900">
               <a:solidFill>
@@ -29996,7 +30004,8 @@
                 <a:cs typeface="Consolas"/>
                 <a:sym typeface="Consolas"/>
               </a:rPr>
-              <a:t>project\input_videos\GameName.mp4</a:t>
+              <a:t>project/input_videos/GameName.mp4
+$ claude → 幫我分析 GameName</a:t>
             </a:r>
             <a:endParaRPr sz="1100"/>
           </a:p>
@@ -30149,7 +30158,7 @@
                 <a:cs typeface="Calibri"/>
                 <a:sym typeface="Calibri"/>
               </a:rPr>
-              <a:t>執行分類主程式</a:t>
+              <a:t>確認 ROI 邊框</a:t>
             </a:r>
             <a:endParaRPr sz="1100"/>
           </a:p>
@@ -30199,7 +30208,7 @@
                 <a:cs typeface="Calibri"/>
                 <a:sym typeface="Calibri"/>
               </a:rPr>
-              <a:t>一般執行處理所有影片；可加 GameName 參數指定單一遊戲</a:t>
+              <a:t>Claude 輸出 WAITING_ROI_CONFIRM 後，用瀏覽器開啟 _debug/roi_adjust.html 確認遊戲畫面邊框</a:t>
             </a:r>
             <a:endParaRPr sz="1100"/>
           </a:p>
@@ -30306,7 +30315,7 @@
                 <a:cs typeface="Consolas"/>
                 <a:sym typeface="Consolas"/>
               </a:rPr>
-              <a:t>.\run_classifier.ps1</a:t>
+              <a:t>回覆：ROI 確認：x,y,w,h  或  ROI OK</a:t>
             </a:r>
             <a:endParaRPr sz="1100"/>
           </a:p>
@@ -30531,7 +30540,7 @@
                 <a:cs typeface="Calibri"/>
                 <a:sym typeface="Calibri"/>
               </a:rPr>
-              <a:t>確認輸出結果</a:t>
+              <a:t>分類完成，人工審核</a:t>
             </a:r>
             <a:endParaRPr sz="1100"/>
           </a:p>
@@ -30581,7 +30590,7 @@
                 <a:cs typeface="Calibri"/>
                 <a:sym typeface="Calibri"/>
               </a:rPr>
-              <a:t>每款遊戲獨立資料夾，包含分類截圖、CSV 統計表與低信心值截圖</a:t>
+              <a:t>分類後 review server 自動啟動，開瀏覽器前往 localhost:8765 進行人工審核修正</a:t>
             </a:r>
             <a:endParaRPr sz="1100"/>
           </a:p>
@@ -30688,7 +30697,7 @@
                 <a:cs typeface="Consolas"/>
                 <a:sym typeface="Consolas"/>
               </a:rPr>
-              <a:t>project\output\GameName\</a:t>
+              <a:t>http://localhost:8765</a:t>
             </a:r>
             <a:endParaRPr sz="1100"/>
           </a:p>
@@ -31189,7 +31198,7 @@
                 <a:cs typeface="Consolas"/>
                 <a:sym typeface="Consolas"/>
               </a:rPr>
-              <a:t>  ├ low_score/</a:t>
+              <a:t>  ├ needs_review/</a:t>
             </a:r>
             <a:endParaRPr sz="1100"/>
           </a:p>
@@ -31239,7 +31248,7 @@
                 <a:cs typeface="Consolas"/>
                 <a:sym typeface="Consolas"/>
               </a:rPr>
-              <a:t>  ├ cls_result.csv</a:t>
+              <a:t>  ├ classification_result.csv</a:t>
             </a:r>
             <a:endParaRPr sz="1100"/>
           </a:p>
@@ -31633,7 +31642,7 @@
                 <a:cs typeface="Calibri"/>
                 <a:sym typeface="Calibri"/>
               </a:rPr>
-              <a:t>Claude Skill — 競品報告生成</a:t>
+              <a:t>人工審核修正</a:t>
             </a:r>
             <a:endParaRPr sz="1100"/>
           </a:p>
@@ -31683,7 +31692,7 @@
                 <a:cs typeface="Calibri"/>
                 <a:sym typeface="Calibri"/>
               </a:rPr>
-              <a:t>Creating &amp; Calling the slot-report Skill</a:t>
+              <a:t>Review &amp; Apply Corrections</a:t>
             </a:r>
             <a:endParaRPr sz="1100"/>
           </a:p>
@@ -31790,7 +31799,7 @@
                 <a:cs typeface="Calibri"/>
                 <a:sym typeface="Calibri"/>
               </a:rPr>
-              <a:t>4.3  Claude Skill</a:t>
+              <a:t>4.3  人工審核修正</a:t>
             </a:r>
             <a:endParaRPr sz="1100"/>
           </a:p>
@@ -31942,7 +31951,7 @@
                 <a:cs typeface="Calibri"/>
                 <a:sym typeface="Calibri"/>
               </a:rPr>
-              <a:t>安裝 Skill</a:t>
+              <a:t>信心等級</a:t>
             </a:r>
             <a:endParaRPr sz="1100"/>
           </a:p>
@@ -32095,7 +32104,7 @@
                 <a:cs typeface="Calibri"/>
                 <a:sym typeface="Calibri"/>
               </a:rPr>
-              <a:t>找到 Skills 資料夾</a:t>
+              <a:t>high — 分類確定（綠色）</a:t>
             </a:r>
             <a:endParaRPr sz="1100"/>
           </a:p>
@@ -32145,7 +32154,7 @@
                 <a:cs typeface="Calibri"/>
                 <a:sym typeface="Calibri"/>
               </a:rPr>
-              <a:t>%APPDATA%\Claude\...\skills\</a:t>
+              <a:t>直接跳過，無需確認</a:t>
             </a:r>
             <a:endParaRPr sz="1100"/>
           </a:p>
@@ -32298,7 +32307,7 @@
                 <a:cs typeface="Calibri"/>
                 <a:sym typeface="Calibri"/>
               </a:rPr>
-              <a:t>建立 slot-report/ 子目錄</a:t>
+              <a:t>medium — 邊界模糊（黃色）</a:t>
             </a:r>
             <a:endParaRPr sz="1100"/>
           </a:p>
@@ -32348,7 +32357,7 @@
                 <a:cs typeface="Calibri"/>
                 <a:sym typeface="Calibri"/>
               </a:rPr>
-              <a:t>在 skills/ 內新增 slot-report 資料夾</a:t>
+              <a:t>快速掃一眼，有問題再修正</a:t>
             </a:r>
             <a:endParaRPr sz="1100"/>
           </a:p>
@@ -32501,7 +32510,7 @@
                 <a:cs typeface="Calibri"/>
                 <a:sym typeface="Calibri"/>
               </a:rPr>
-              <a:t>複製 claude/Skill.md 內容</a:t>
+              <a:t>low — 信心不足（紅色）</a:t>
             </a:r>
             <a:endParaRPr sz="1100"/>
           </a:p>
@@ -32551,7 +32560,7 @@
                 <a:cs typeface="Calibri"/>
                 <a:sym typeface="Calibri"/>
               </a:rPr>
-              <a:t>貼入 slot-report/SKILL.md 並儲存</a:t>
+              <a:t>建議確認，改分類或排除</a:t>
             </a:r>
             <a:endParaRPr sz="1100"/>
           </a:p>
@@ -32704,7 +32713,7 @@
                 <a:cs typeface="Calibri"/>
                 <a:sym typeface="Calibri"/>
               </a:rPr>
-              <a:t>重新啟動 Claude Code</a:t>
+              <a:t/>
             </a:r>
             <a:endParaRPr sz="1100"/>
           </a:p>
@@ -32754,7 +32763,7 @@
                 <a:cs typeface="Calibri"/>
                 <a:sym typeface="Calibri"/>
               </a:rPr>
-              <a:t>Skill 即可在對話中使用</a:t>
+              <a:t/>
             </a:r>
             <a:endParaRPr sz="1100"/>
           </a:p>
@@ -32906,7 +32915,7 @@
                 <a:cs typeface="Calibri"/>
                 <a:sym typeface="Calibri"/>
               </a:rPr>
-              <a:t>呼叫 Skill</a:t>
+              <a:t>操作方式</a:t>
             </a:r>
             <a:endParaRPr sz="1100"/>
           </a:p>
@@ -32956,7 +32965,7 @@
                 <a:cs typeface="Calibri"/>
                 <a:sym typeface="Calibri"/>
               </a:rPr>
-              <a:t>在 Claude Code 輸入：</a:t>
+              <a:t>瀏覽器開啟 http://localhost:8765</a:t>
             </a:r>
             <a:endParaRPr sz="1100"/>
           </a:p>
@@ -33063,7 +33072,8 @@
                 <a:cs typeface="Consolas"/>
                 <a:sym typeface="Consolas"/>
               </a:rPr>
-              <a:t>幫我分析 project/output/GameName 這款遊戲，生成 report.html</a:t>
+              <a:t>每張截圖可選擇：✅ 正確 / 🔀 改分類 / 🗑️ 排除
+完成後按「套用修正」，CSV 與截圖自動更新</a:t>
             </a:r>
             <a:endParaRPr sz="1100"/>
           </a:p>
@@ -33113,7 +33123,7 @@
                 <a:cs typeface="Calibri"/>
                 <a:sym typeface="Calibri"/>
               </a:rPr>
-              <a:t>報告三大段落：</a:t>
+              <a:t>review server 說明：</a:t>
             </a:r>
             <a:endParaRPr sz="1100"/>
           </a:p>
@@ -33266,7 +33276,7 @@
                 <a:cs typeface="Calibri"/>
                 <a:sym typeface="Calibri"/>
               </a:rPr>
-              <a:t>符號賠率表</a:t>
+              <a:t>自動啟動</a:t>
             </a:r>
             <a:endParaRPr sz="1100"/>
           </a:p>
@@ -33316,7 +33326,7 @@
                 <a:cs typeface="Calibri"/>
                 <a:sym typeface="Calibri"/>
               </a:rPr>
-              <a:t>特殊符號（Scatter/Wild）、主力符號、低值符號，各附圖片與賠率</a:t>
+              <a:t>分類完成後由 classify_with_roi_confirm.sh 自動啟動</a:t>
             </a:r>
             <a:endParaRPr sz="1100"/>
           </a:p>
@@ -33469,7 +33479,7 @@
                 <a:cs typeface="Calibri"/>
                 <a:sym typeface="Calibri"/>
               </a:rPr>
-              <a:t>玩法機制</a:t>
+              <a:t>port 8765</a:t>
             </a:r>
             <a:endParaRPr sz="1100"/>
           </a:p>
@@ -33519,7 +33529,7 @@
                 <a:cs typeface="Calibri"/>
                 <a:sym typeface="Calibri"/>
               </a:rPr>
-              <a:t>4–6 張機制卡，說明觸發條件、特效規則、連鎖機制</a:t>
+              <a:t>localhost 環境直接 POST，非 localhost 複製 JSON 到剪貼簿</a:t>
             </a:r>
             <a:endParaRPr sz="1100"/>
           </a:p>
@@ -33672,7 +33682,7 @@
                 <a:cs typeface="Calibri"/>
                 <a:sym typeface="Calibri"/>
               </a:rPr>
-              <a:t>遊戲流程圖</a:t>
+              <a:t>apply_corrections.py</a:t>
             </a:r>
             <a:endParaRPr sz="1100"/>
           </a:p>
@@ -33722,7 +33732,7 @@
                 <a:cs typeface="Calibri"/>
                 <a:sym typeface="Calibri"/>
               </a:rPr>
-              <a:t>主遊戲 + 免費旋轉雙列橫向流程，各節點附截圖縮圖</a:t>
+              <a:t>移動截圖並更新 classification_result.csv</a:t>
             </a:r>
             <a:endParaRPr sz="1100"/>
           </a:p>
@@ -34012,7 +34022,7 @@
                 <a:cs typeface="Calibri"/>
                 <a:sym typeface="Calibri"/>
               </a:rPr>
-              <a:t>Importing to Figma Desktop</a:t>
+              <a:t>Generating Competitive Analysis Report</a:t>
             </a:r>
             <a:endParaRPr sz="1100"/>
           </a:p>
@@ -34119,7 +34129,7 @@
                 <a:cs typeface="Calibri"/>
                 <a:sym typeface="Calibri"/>
               </a:rPr>
-              <a:t>4.4  Figma</a:t>
+              <a:t>4.4  Claude Skill 報告</a:t>
             </a:r>
             <a:endParaRPr sz="1100"/>
           </a:p>
@@ -34221,7 +34231,7 @@
                 <a:cs typeface="Calibri"/>
                 <a:sym typeface="Calibri"/>
               </a:rPr>
-              <a:t>執行 Figma Export</a:t>
+              <a:t>在 Claude Code 呼叫 slot-report Skill</a:t>
             </a:r>
             <a:endParaRPr sz="1100"/>
           </a:p>
@@ -34271,7 +34281,7 @@
                 <a:cs typeface="Calibri"/>
                 <a:sym typeface="Calibri"/>
               </a:rPr>
-              <a:t>在專案根目錄執行以下指令，自動生成 figma_export/ 資料夾與 manifest</a:t>
+              <a:t>分類完成後，在 Claude Code 輸入：</a:t>
             </a:r>
             <a:endParaRPr sz="1100"/>
           </a:p>
@@ -34378,7 +34388,7 @@
                 <a:cs typeface="Consolas"/>
                 <a:sym typeface="Consolas"/>
               </a:rPr>
-              <a:t>.\run_figma_export.ps1</a:t>
+              <a:t>幫我分析 project/output/GameName 這款遊戲，生成 report.html</a:t>
             </a:r>
             <a:endParaRPr sz="1100"/>
           </a:p>
@@ -34531,7 +34541,7 @@
                 <a:cs typeface="Calibri"/>
                 <a:sym typeface="Calibri"/>
               </a:rPr>
-              <a:t>匯入 Plugin Manifest</a:t>
+              <a:t>報告三大段落</a:t>
             </a:r>
             <a:endParaRPr sz="1100"/>
           </a:p>
@@ -34581,7 +34591,7 @@
                 <a:cs typeface="Calibri"/>
                 <a:sym typeface="Calibri"/>
               </a:rPr>
-              <a:t>開啟 Figma Desktop → Plugins &gt; Development &gt; Import plugin from manifest</a:t>
+              <a:t>📊 符號賠率表：特殊符號、主力符號、低值符號（附圖片與賠率）</a:t>
             </a:r>
             <a:endParaRPr sz="1100"/>
           </a:p>
@@ -34688,7 +34698,7 @@
                 <a:cs typeface="Consolas"/>
                 <a:sym typeface="Consolas"/>
               </a:rPr>
-              <a:t>figma_tools\figma_plugin\manifest.json</a:t>
+              <a:t>🃏 玩法機制：4–6 張機制卡，觸發條件、特效規則、連鎖機制</a:t>
             </a:r>
             <a:endParaRPr sz="1100"/>
           </a:p>
@@ -34841,7 +34851,7 @@
                 <a:cs typeface="Calibri"/>
                 <a:sym typeface="Calibri"/>
               </a:rPr>
-              <a:t>執行 Slot Research Board Importer</a:t>
+              <a:t>同步到 CCMS 瀏覽器</a:t>
             </a:r>
             <a:endParaRPr sz="1100"/>
           </a:p>
@@ -34891,7 +34901,7 @@
                 <a:cs typeface="Calibri"/>
                 <a:sym typeface="Calibri"/>
               </a:rPr>
-              <a:t>在 Figma 中執行 Plugin，選擇 figma_export/ 資料夾路徑</a:t>
+              <a:t>🗺 流程圖：主遊戲 + 免費旋轉雙列橫向流程，各節點附截圖縮圖</a:t>
             </a:r>
             <a:endParaRPr sz="1100"/>
           </a:p>
@@ -35094,7 +35104,7 @@
                 <a:cs typeface="Calibri"/>
                 <a:sym typeface="Calibri"/>
               </a:rPr>
-              <a:t>Plugin 自動建立分類截圖板，依 Loading / Basegame / Feature / BigWin 等分組排列</a:t>
+              <a:t>sync-html-to-ccms skill 同步報告至 CCMS Server，團隊直接用瀏覽器開啟，無需翻網路磁碟</a:t>
             </a:r>
             <a:endParaRPr sz="1100"/>
           </a:p>
@@ -35146,7 +35156,7 @@
                 <a:cs typeface="Calibri"/>
                 <a:sym typeface="Calibri"/>
               </a:rPr>
-              <a:t>目前Figma會匯入本地project 內所有專案</a:t>
+              <a:t/>
             </a:r>
             <a:endParaRPr sz="800">
               <a:solidFill>

--- a/docs/slot_classifier_share.pptx
+++ b/docs/slot_classifier_share.pptx
@@ -17192,7 +17192,6 @@
                 <a:sym typeface="Consolas"/>
               </a:rPr>
               <a:t>git fetch origin
-git checkout perf/cpu-optimize-ocr
 git pull</a:t>
             </a:r>
             <a:endParaRPr sz="1100"/>
@@ -17346,7 +17345,7 @@
                 <a:cs typeface="Calibri"/>
                 <a:sym typeface="Calibri"/>
               </a:rPr>
-              <a:t>perf/cpu-optimize-ocr</a:t>
+              <a:t>main</a:t>
             </a:r>
             <a:endParaRPr sz="1100"/>
           </a:p>
@@ -28304,7 +28303,7 @@
                 <a:cs typeface="Calibri"/>
                 <a:sym typeface="Calibri"/>
               </a:rPr>
-              <a:t>git clone + checkout perf/cpu-optimize-ocr，再建立 .venv 安裝套件</a:t>
+              <a:t>git clone，再執行 python setup.py 一鍵建立環境</a:t>
             </a:r>
             <a:endParaRPr sz="1100"/>
           </a:p>
@@ -28412,8 +28411,7 @@
                 <a:sym typeface="Consolas"/>
               </a:rPr>
               <a:t>git clone https://github.com/Ashley860511/slot-classifier.git
-git checkout perf/cpu-optimize-ocr
-pip install -r requirements.txt</a:t>
+python setup.py</a:t>
             </a:r>
             <a:endParaRPr sz="1100"/>
           </a:p>
